--- a/slides/src/rag_iii_claims_english.pptx
+++ b/slides/src/rag_iii_claims_english.pptx
@@ -48775,12 +48775,20 @@
             <p:ph type="title"/>
           </p:nvPr>
         </p:nvSpPr>
-        <p:spPr/>
+        <p:spPr>
+          <a:effectLst/>
+        </p:spPr>
         <p:txBody>
           <a:bodyPr/>
           <a:lstStyle/>
           <a:p>
             <a:r>
+              <a:rPr b="0" sz="2800" cap="none">
+                <a:solidFill>
+                  <a:srgbClr val="212427"/>
+                </a:solidFill>
+                <a:latin typeface="Verdana"/>
+              </a:rPr>
               <a:t>Guess the number</a:t>
             </a:r>
           </a:p>
@@ -48794,13 +48802,15 @@
         </p:nvSpPr>
         <p:spPr>
           <a:xfrm>
-            <a:off x="704088" y="1188720"/>
-            <a:ext cx="1097280" cy="1356360"/>
+            <a:off x="704088" y="1115568"/>
+            <a:ext cx="609600" cy="38100"/>
           </a:xfrm>
           <a:prstGeom prst="rect">
             <a:avLst/>
           </a:prstGeom>
-          <a:noFill/>
+          <a:solidFill>
+            <a:srgbClr val="B1063A"/>
+          </a:solidFill>
           <a:ln>
             <a:noFill/>
           </a:ln>
@@ -48821,40 +48831,152 @@
           </a:fontRef>
         </p:style>
         <p:txBody>
-          <a:bodyPr rtlCol="0" anchor="t" wrap="square" lIns="109728" rIns="109728" tIns="73152" bIns="73152"/>
+          <a:bodyPr rtlCol="0" anchor="ctr"/>
           <a:lstStyle/>
           <a:p>
-            <a:pPr algn="l"/>
+            <a:pPr algn="ctr"/>
+          </a:p>
+        </p:txBody>
+      </p:sp>
+      <p:sp>
+        <p:nvSpPr>
+          <p:cNvPr id="5" name="TextBox 4"/>
+          <p:cNvSpPr txBox="1"/>
+          <p:nvPr/>
+        </p:nvSpPr>
+        <p:spPr>
+          <a:xfrm>
+            <a:off x="704088" y="1234440"/>
+            <a:ext cx="10789920" cy="365760"/>
+          </a:xfrm>
+          <a:prstGeom prst="rect">
+            <a:avLst/>
+          </a:prstGeom>
+          <a:noFill/>
+          <a:effectLst/>
+        </p:spPr>
+        <p:txBody>
+          <a:bodyPr wrap="square" anchor="t" lIns="36576" rIns="36576" tIns="27432" bIns="27432">
+            <a:spAutoFit/>
+          </a:bodyPr>
+          <a:lstStyle/>
+          <a:p>
+            <a:pPr algn="l">
+              <a:spcAft>
+                <a:spcPts val="0"/>
+              </a:spcAft>
+            </a:pPr>
             <a:r>
-              <a:rPr sz="1400" b="1">
+              <a:rPr sz="1400" b="0">
                 <a:solidFill>
                   <a:srgbClr val="5A6065"/>
                 </a:solidFill>
+                <a:latin typeface="Verdana"/>
               </a:rPr>
-              <a:t>Text 1</a:t>
+              <a:t>How many claims are in each text?</a:t>
             </a:r>
           </a:p>
         </p:txBody>
       </p:sp>
       <p:sp>
         <p:nvSpPr>
-          <p:cNvPr id="5" name="Rectangle 4"/>
+          <p:cNvPr id="6" name="TextBox 5"/>
+          <p:cNvSpPr txBox="1"/>
+          <p:nvPr/>
+        </p:nvSpPr>
+        <p:spPr>
+          <a:xfrm>
+            <a:off x="704088" y="1737360"/>
+            <a:ext cx="548640" cy="1341120"/>
+          </a:xfrm>
+          <a:prstGeom prst="rect">
+            <a:avLst/>
+          </a:prstGeom>
+          <a:noFill/>
+          <a:effectLst/>
+        </p:spPr>
+        <p:txBody>
+          <a:bodyPr wrap="square" anchor="ctr" lIns="36576" rIns="36576" tIns="27432" bIns="27432">
+            <a:spAutoFit/>
+          </a:bodyPr>
+          <a:lstStyle/>
+          <a:p>
+            <a:pPr algn="l">
+              <a:spcAft>
+                <a:spcPts val="0"/>
+              </a:spcAft>
+            </a:pPr>
+            <a:r>
+              <a:rPr sz="2000" b="0">
+                <a:solidFill>
+                  <a:srgbClr val="5A6065"/>
+                </a:solidFill>
+                <a:latin typeface="Verdana"/>
+              </a:rPr>
+              <a:t>A</a:t>
+            </a:r>
+          </a:p>
+        </p:txBody>
+      </p:sp>
+      <p:sp>
+        <p:nvSpPr>
+          <p:cNvPr id="7" name="TextBox 6"/>
+          <p:cNvSpPr txBox="1"/>
+          <p:nvPr/>
+        </p:nvSpPr>
+        <p:spPr>
+          <a:xfrm>
+            <a:off x="1344168" y="1737360"/>
+            <a:ext cx="10149840" cy="1341120"/>
+          </a:xfrm>
+          <a:prstGeom prst="rect">
+            <a:avLst/>
+          </a:prstGeom>
+          <a:noFill/>
+          <a:effectLst/>
+        </p:spPr>
+        <p:txBody>
+          <a:bodyPr wrap="square" anchor="ctr" lIns="36576" rIns="36576" tIns="27432" bIns="27432">
+            <a:spAutoFit/>
+          </a:bodyPr>
+          <a:lstStyle/>
+          <a:p>
+            <a:pPr algn="l">
+              <a:spcAft>
+                <a:spcPts val="0"/>
+              </a:spcAft>
+            </a:pPr>
+            <a:r>
+              <a:rPr sz="1600" b="0">
+                <a:solidFill>
+                  <a:srgbClr val="212427"/>
+                </a:solidFill>
+                <a:latin typeface="Verdana"/>
+              </a:rPr>
+              <a:t>The requirements must be documented so that they can be identified and taken into account during planning, operation, and procurement.</a:t>
+            </a:r>
+          </a:p>
+        </p:txBody>
+      </p:sp>
+      <p:sp>
+        <p:nvSpPr>
+          <p:cNvPr id="8" name="Rectangle 7"/>
           <p:cNvSpPr/>
           <p:nvPr/>
         </p:nvSpPr>
         <p:spPr>
           <a:xfrm>
-            <a:off x="1828800" y="1188720"/>
-            <a:ext cx="9692640" cy="1356360"/>
+            <a:off x="704088" y="3078480"/>
+            <a:ext cx="10789920" cy="9525"/>
           </a:xfrm>
           <a:prstGeom prst="rect">
             <a:avLst/>
           </a:prstGeom>
-          <a:noFill/>
-          <a:ln w="9525">
-            <a:solidFill>
-              <a:srgbClr val="D6D7D8"/>
-            </a:solidFill>
+          <a:solidFill>
+            <a:srgbClr val="D6D7D8"/>
+          </a:solidFill>
+          <a:ln>
+            <a:noFill/>
           </a:ln>
           <a:effectLst/>
         </p:spPr>
@@ -48873,36 +48995,110 @@
           </a:fontRef>
         </p:style>
         <p:txBody>
-          <a:bodyPr rtlCol="0" anchor="ctr" wrap="square" lIns="109728" rIns="109728" tIns="73152" bIns="73152"/>
+          <a:bodyPr rtlCol="0" anchor="ctr"/>
           <a:lstStyle/>
           <a:p>
-            <a:pPr algn="l"/>
+            <a:pPr algn="ctr"/>
+          </a:p>
+        </p:txBody>
+      </p:sp>
+      <p:sp>
+        <p:nvSpPr>
+          <p:cNvPr id="9" name="TextBox 8"/>
+          <p:cNvSpPr txBox="1"/>
+          <p:nvPr/>
+        </p:nvSpPr>
+        <p:spPr>
+          <a:xfrm>
+            <a:off x="704088" y="3078480"/>
+            <a:ext cx="548640" cy="1341120"/>
+          </a:xfrm>
+          <a:prstGeom prst="rect">
+            <a:avLst/>
+          </a:prstGeom>
+          <a:noFill/>
+          <a:effectLst/>
+        </p:spPr>
+        <p:txBody>
+          <a:bodyPr wrap="square" anchor="ctr" lIns="36576" rIns="36576" tIns="27432" bIns="27432">
+            <a:spAutoFit/>
+          </a:bodyPr>
+          <a:lstStyle/>
+          <a:p>
+            <a:pPr algn="l">
+              <a:spcAft>
+                <a:spcPts val="0"/>
+              </a:spcAft>
+            </a:pPr>
             <a:r>
-              <a:rPr sz="1500" b="0">
+              <a:rPr sz="2000" b="0">
                 <a:solidFill>
-                  <a:srgbClr val="212427"/>
+                  <a:srgbClr val="5A6065"/>
                 </a:solidFill>
+                <a:latin typeface="Verdana"/>
               </a:rPr>
-              <a:t>Administrative accounts should be protected by multi-factor authentication, because they have a particularly high potential for damage and represent a preferred attack target.</a:t>
+              <a:t>B</a:t>
             </a:r>
           </a:p>
         </p:txBody>
       </p:sp>
       <p:sp>
         <p:nvSpPr>
-          <p:cNvPr id="6" name="Rectangle 5"/>
+          <p:cNvPr id="10" name="TextBox 9"/>
+          <p:cNvSpPr txBox="1"/>
+          <p:nvPr/>
+        </p:nvSpPr>
+        <p:spPr>
+          <a:xfrm>
+            <a:off x="1344168" y="3078480"/>
+            <a:ext cx="10149840" cy="1341120"/>
+          </a:xfrm>
+          <a:prstGeom prst="rect">
+            <a:avLst/>
+          </a:prstGeom>
+          <a:noFill/>
+          <a:effectLst/>
+        </p:spPr>
+        <p:txBody>
+          <a:bodyPr wrap="square" anchor="ctr" lIns="36576" rIns="36576" tIns="27432" bIns="27432">
+            <a:spAutoFit/>
+          </a:bodyPr>
+          <a:lstStyle/>
+          <a:p>
+            <a:pPr algn="l">
+              <a:spcAft>
+                <a:spcPts val="0"/>
+              </a:spcAft>
+            </a:pPr>
+            <a:r>
+              <a:rPr sz="1600" b="0">
+                <a:solidFill>
+                  <a:srgbClr val="212427"/>
+                </a:solidFill>
+                <a:latin typeface="Verdana"/>
+              </a:rPr>
+              <a:t>Without binding password rules, there is a risk of weak or reused passwords that can be easily compromised.</a:t>
+            </a:r>
+          </a:p>
+        </p:txBody>
+      </p:sp>
+      <p:sp>
+        <p:nvSpPr>
+          <p:cNvPr id="11" name="Rectangle 10"/>
           <p:cNvSpPr/>
           <p:nvPr/>
         </p:nvSpPr>
         <p:spPr>
           <a:xfrm>
-            <a:off x="704088" y="2682240"/>
-            <a:ext cx="1097280" cy="1356360"/>
+            <a:off x="704088" y="4419600"/>
+            <a:ext cx="10789920" cy="9525"/>
           </a:xfrm>
           <a:prstGeom prst="rect">
             <a:avLst/>
           </a:prstGeom>
-          <a:noFill/>
+          <a:solidFill>
+            <a:srgbClr val="D6D7D8"/>
+          </a:solidFill>
           <a:ln>
             <a:noFill/>
           </a:ln>
@@ -48923,219 +49119,127 @@
           </a:fontRef>
         </p:style>
         <p:txBody>
-          <a:bodyPr rtlCol="0" anchor="t" wrap="square" lIns="109728" rIns="109728" tIns="73152" bIns="73152"/>
+          <a:bodyPr rtlCol="0" anchor="ctr"/>
           <a:lstStyle/>
           <a:p>
-            <a:pPr algn="l"/>
+            <a:pPr algn="ctr"/>
+          </a:p>
+        </p:txBody>
+      </p:sp>
+      <p:sp>
+        <p:nvSpPr>
+          <p:cNvPr id="12" name="TextBox 11"/>
+          <p:cNvSpPr txBox="1"/>
+          <p:nvPr/>
+        </p:nvSpPr>
+        <p:spPr>
+          <a:xfrm>
+            <a:off x="704088" y="4419600"/>
+            <a:ext cx="548640" cy="1341120"/>
+          </a:xfrm>
+          <a:prstGeom prst="rect">
+            <a:avLst/>
+          </a:prstGeom>
+          <a:noFill/>
+          <a:effectLst/>
+        </p:spPr>
+        <p:txBody>
+          <a:bodyPr wrap="square" anchor="ctr" lIns="36576" rIns="36576" tIns="27432" bIns="27432">
+            <a:spAutoFit/>
+          </a:bodyPr>
+          <a:lstStyle/>
+          <a:p>
+            <a:pPr algn="l">
+              <a:spcAft>
+                <a:spcPts val="0"/>
+              </a:spcAft>
+            </a:pPr>
             <a:r>
-              <a:rPr sz="1400" b="1">
+              <a:rPr sz="2000" b="0">
                 <a:solidFill>
                   <a:srgbClr val="5A6065"/>
                 </a:solidFill>
+                <a:latin typeface="Verdana"/>
               </a:rPr>
-              <a:t>Text 2</a:t>
+              <a:t>C</a:t>
             </a:r>
           </a:p>
         </p:txBody>
       </p:sp>
       <p:sp>
         <p:nvSpPr>
-          <p:cNvPr id="7" name="Rectangle 6"/>
-          <p:cNvSpPr/>
+          <p:cNvPr id="13" name="TextBox 12"/>
+          <p:cNvSpPr txBox="1"/>
           <p:nvPr/>
         </p:nvSpPr>
         <p:spPr>
           <a:xfrm>
-            <a:off x="1828800" y="2682240"/>
-            <a:ext cx="9692640" cy="1356360"/>
+            <a:off x="1344168" y="4419600"/>
+            <a:ext cx="10149840" cy="1341120"/>
           </a:xfrm>
           <a:prstGeom prst="rect">
             <a:avLst/>
           </a:prstGeom>
           <a:noFill/>
-          <a:ln w="9525">
-            <a:solidFill>
-              <a:srgbClr val="D6D7D8"/>
-            </a:solidFill>
-          </a:ln>
           <a:effectLst/>
         </p:spPr>
-        <p:style>
-          <a:lnRef idx="1">
-            <a:schemeClr val="accent1"/>
-          </a:lnRef>
-          <a:fillRef idx="3">
-            <a:schemeClr val="accent1"/>
-          </a:fillRef>
-          <a:effectRef idx="2">
-            <a:schemeClr val="accent1"/>
-          </a:effectRef>
-          <a:fontRef idx="minor">
-            <a:schemeClr val="lt1"/>
-          </a:fontRef>
-        </p:style>
         <p:txBody>
-          <a:bodyPr rtlCol="0" anchor="ctr" wrap="square" lIns="109728" rIns="109728" tIns="73152" bIns="73152"/>
+          <a:bodyPr wrap="square" anchor="ctr" lIns="36576" rIns="36576" tIns="27432" bIns="27432">
+            <a:spAutoFit/>
+          </a:bodyPr>
           <a:lstStyle/>
           <a:p>
-            <a:pPr algn="l"/>
+            <a:pPr algn="l">
+              <a:spcAft>
+                <a:spcPts val="0"/>
+              </a:spcAft>
+            </a:pPr>
             <a:r>
-              <a:rPr sz="1500" b="0">
+              <a:rPr sz="1600" b="0">
                 <a:solidFill>
                   <a:srgbClr val="212427"/>
                 </a:solidFill>
+                <a:latin typeface="Verdana"/>
               </a:rPr>
-              <a:t>Create a cloud usage strategy (A1), a security policy (A2), service definitions (A3), and define responsibility areas as well as interfaces (A4). These four basic requirements must be met as a priority.</a:t>
+              <a:t>Issuance and revocation of entry, access, and usage media must be documented and replaced immediately if compromised.</a:t>
             </a:r>
           </a:p>
         </p:txBody>
       </p:sp>
       <p:sp>
         <p:nvSpPr>
-          <p:cNvPr id="8" name="Rectangle 7"/>
-          <p:cNvSpPr/>
+          <p:cNvPr id="14" name="TextBox 13"/>
+          <p:cNvSpPr txBox="1"/>
           <p:nvPr/>
         </p:nvSpPr>
         <p:spPr>
           <a:xfrm>
-            <a:off x="704088" y="4175760"/>
-            <a:ext cx="1097280" cy="1356360"/>
+            <a:off x="7836408" y="5897880"/>
+            <a:ext cx="3657600" cy="365760"/>
           </a:xfrm>
           <a:prstGeom prst="rect">
             <a:avLst/>
           </a:prstGeom>
           <a:noFill/>
-          <a:ln>
-            <a:noFill/>
-          </a:ln>
           <a:effectLst/>
         </p:spPr>
-        <p:style>
-          <a:lnRef idx="1">
-            <a:schemeClr val="accent1"/>
-          </a:lnRef>
-          <a:fillRef idx="3">
-            <a:schemeClr val="accent1"/>
-          </a:fillRef>
-          <a:effectRef idx="2">
-            <a:schemeClr val="accent1"/>
-          </a:effectRef>
-          <a:fontRef idx="minor">
-            <a:schemeClr val="lt1"/>
-          </a:fontRef>
-        </p:style>
         <p:txBody>
-          <a:bodyPr rtlCol="0" anchor="t" wrap="square" lIns="109728" rIns="109728" tIns="73152" bIns="73152"/>
+          <a:bodyPr wrap="square" anchor="t" lIns="36576" rIns="36576" tIns="27432" bIns="27432">
+            <a:spAutoFit/>
+          </a:bodyPr>
           <a:lstStyle/>
           <a:p>
-            <a:pPr algn="l"/>
+            <a:pPr algn="r">
+              <a:spcAft>
+                <a:spcPts val="0"/>
+              </a:spcAft>
+            </a:pPr>
             <a:r>
-              <a:rPr sz="1400" b="1">
+              <a:rPr sz="1400" b="0">
                 <a:solidFill>
                   <a:srgbClr val="5A6065"/>
                 </a:solidFill>
-              </a:rPr>
-              <a:t>Text 3</a:t>
-            </a:r>
-          </a:p>
-        </p:txBody>
-      </p:sp>
-      <p:sp>
-        <p:nvSpPr>
-          <p:cNvPr id="9" name="Rectangle 8"/>
-          <p:cNvSpPr/>
-          <p:nvPr/>
-        </p:nvSpPr>
-        <p:spPr>
-          <a:xfrm>
-            <a:off x="1828800" y="4175760"/>
-            <a:ext cx="9692640" cy="1356360"/>
-          </a:xfrm>
-          <a:prstGeom prst="rect">
-            <a:avLst/>
-          </a:prstGeom>
-          <a:noFill/>
-          <a:ln w="9525">
-            <a:solidFill>
-              <a:srgbClr val="D6D7D8"/>
-            </a:solidFill>
-          </a:ln>
-          <a:effectLst/>
-        </p:spPr>
-        <p:style>
-          <a:lnRef idx="1">
-            <a:schemeClr val="accent1"/>
-          </a:lnRef>
-          <a:fillRef idx="3">
-            <a:schemeClr val="accent1"/>
-          </a:fillRef>
-          <a:effectRef idx="2">
-            <a:schemeClr val="accent1"/>
-          </a:effectRef>
-          <a:fontRef idx="minor">
-            <a:schemeClr val="lt1"/>
-          </a:fontRef>
-        </p:style>
-        <p:txBody>
-          <a:bodyPr rtlCol="0" anchor="ctr" wrap="square" lIns="109728" rIns="109728" tIns="73152" bIns="73152"/>
-          <a:lstStyle/>
-          <a:p>
-            <a:pPr algn="l"/>
-            <a:r>
-              <a:rPr sz="1500" b="0">
-                <a:solidFill>
-                  <a:srgbClr val="212427"/>
-                </a:solidFill>
-              </a:rPr>
-              <a:t>When personnel changes occur, user IDs and permissions that are no longer needed must be removed promptly to avoid unauthorized access by former or transferred employees. Permissions may only be granted based on the actual need for task fulfillment.</a:t>
-            </a:r>
-          </a:p>
-        </p:txBody>
-      </p:sp>
-      <p:sp>
-        <p:nvSpPr>
-          <p:cNvPr id="10" name="Rectangle 9"/>
-          <p:cNvSpPr/>
-          <p:nvPr/>
-        </p:nvSpPr>
-        <p:spPr>
-          <a:xfrm>
-            <a:off x="7863840" y="5806440"/>
-            <a:ext cx="3657600" cy="411480"/>
-          </a:xfrm>
-          <a:prstGeom prst="rect">
-            <a:avLst/>
-          </a:prstGeom>
-          <a:noFill/>
-          <a:ln>
-            <a:noFill/>
-          </a:ln>
-          <a:effectLst/>
-        </p:spPr>
-        <p:style>
-          <a:lnRef idx="1">
-            <a:schemeClr val="accent1"/>
-          </a:lnRef>
-          <a:fillRef idx="3">
-            <a:schemeClr val="accent1"/>
-          </a:fillRef>
-          <a:effectRef idx="2">
-            <a:schemeClr val="accent1"/>
-          </a:effectRef>
-          <a:fontRef idx="minor">
-            <a:schemeClr val="lt1"/>
-          </a:fontRef>
-        </p:style>
-        <p:txBody>
-          <a:bodyPr rtlCol="0" anchor="t" wrap="square" lIns="109728" rIns="109728" tIns="73152" bIns="73152"/>
-          <a:lstStyle/>
-          <a:p>
-            <a:pPr algn="r"/>
-            <a:r>
-              <a:rPr sz="1400" b="1">
-                <a:solidFill>
-                  <a:srgbClr val="B1063A"/>
-                </a:solidFill>
+                <a:latin typeface="Verdana"/>
               </a:rPr>
               <a:t>Mentimeter code: ____</a:t>
             </a:r>
@@ -49170,12 +49274,20 @@
             <p:ph type="title"/>
           </p:nvPr>
         </p:nvSpPr>
-        <p:spPr/>
+        <p:spPr>
+          <a:effectLst/>
+        </p:spPr>
         <p:txBody>
           <a:bodyPr/>
           <a:lstStyle/>
           <a:p>
             <a:r>
+              <a:rPr b="0" sz="2800" cap="none">
+                <a:solidFill>
+                  <a:srgbClr val="212427"/>
+                </a:solidFill>
+                <a:latin typeface="Verdana"/>
+              </a:rPr>
               <a:t>What is a claim?</a:t>
             </a:r>
           </a:p>
@@ -49189,13 +49301,15 @@
         </p:nvSpPr>
         <p:spPr>
           <a:xfrm>
-            <a:off x="704088" y="1280160"/>
-            <a:ext cx="3429000" cy="548640"/>
+            <a:off x="704088" y="1115568"/>
+            <a:ext cx="609600" cy="38100"/>
           </a:xfrm>
           <a:prstGeom prst="rect">
             <a:avLst/>
           </a:prstGeom>
-          <a:noFill/>
+          <a:solidFill>
+            <a:srgbClr val="B1063A"/>
+          </a:solidFill>
           <a:ln>
             <a:noFill/>
           </a:ln>
@@ -49216,40 +49330,112 @@
           </a:fontRef>
         </p:style>
         <p:txBody>
-          <a:bodyPr rtlCol="0" anchor="t" wrap="square" lIns="109728" rIns="109728" tIns="73152" bIns="73152"/>
+          <a:bodyPr rtlCol="0" anchor="ctr"/>
           <a:lstStyle/>
           <a:p>
-            <a:pPr algn="l"/>
+            <a:pPr algn="ctr"/>
+          </a:p>
+        </p:txBody>
+      </p:sp>
+      <p:sp>
+        <p:nvSpPr>
+          <p:cNvPr id="5" name="TextBox 4"/>
+          <p:cNvSpPr txBox="1"/>
+          <p:nvPr/>
+        </p:nvSpPr>
+        <p:spPr>
+          <a:xfrm>
+            <a:off x="704088" y="1325880"/>
+            <a:ext cx="2651760" cy="1051560"/>
+          </a:xfrm>
+          <a:prstGeom prst="rect">
+            <a:avLst/>
+          </a:prstGeom>
+          <a:noFill/>
+          <a:effectLst/>
+        </p:spPr>
+        <p:txBody>
+          <a:bodyPr wrap="square" anchor="ctr" lIns="36576" rIns="36576" tIns="27432" bIns="27432">
+            <a:spAutoFit/>
+          </a:bodyPr>
+          <a:lstStyle/>
+          <a:p>
+            <a:pPr algn="l">
+              <a:spcAft>
+                <a:spcPts val="0"/>
+              </a:spcAft>
+            </a:pPr>
             <a:r>
-              <a:rPr sz="1800" b="1">
+              <a:rPr sz="1400" b="0">
                 <a:solidFill>
-                  <a:srgbClr val="212427"/>
+                  <a:srgbClr val="5A6065"/>
                 </a:solidFill>
+                <a:latin typeface="Verdana"/>
               </a:rPr>
-              <a:t>Everyday (dictionary)</a:t>
+              <a:t>Everyday, whole</a:t>
             </a:r>
           </a:p>
         </p:txBody>
       </p:sp>
       <p:sp>
         <p:nvSpPr>
-          <p:cNvPr id="5" name="Rectangle 4"/>
+          <p:cNvPr id="6" name="TextBox 5"/>
+          <p:cNvSpPr txBox="1"/>
+          <p:nvPr/>
+        </p:nvSpPr>
+        <p:spPr>
+          <a:xfrm>
+            <a:off x="3447288" y="1325880"/>
+            <a:ext cx="8046720" cy="1051560"/>
+          </a:xfrm>
+          <a:prstGeom prst="rect">
+            <a:avLst/>
+          </a:prstGeom>
+          <a:noFill/>
+          <a:effectLst/>
+        </p:spPr>
+        <p:txBody>
+          <a:bodyPr wrap="square" anchor="ctr" lIns="36576" rIns="36576" tIns="27432" bIns="27432">
+            <a:spAutoFit/>
+          </a:bodyPr>
+          <a:lstStyle/>
+          <a:p>
+            <a:pPr algn="l">
+              <a:spcAft>
+                <a:spcPts val="0"/>
+              </a:spcAft>
+            </a:pPr>
+            <a:r>
+              <a:rPr sz="1600" b="0">
+                <a:solidFill>
+                  <a:srgbClr val="212427"/>
+                </a:solidFill>
+                <a:latin typeface="Verdana"/>
+              </a:rPr>
+              <a:t>A claim is a sentence that states something.</a:t>
+            </a:r>
+          </a:p>
+        </p:txBody>
+      </p:sp>
+      <p:sp>
+        <p:nvSpPr>
+          <p:cNvPr id="7" name="Rectangle 6"/>
           <p:cNvSpPr/>
           <p:nvPr/>
         </p:nvSpPr>
         <p:spPr>
           <a:xfrm>
-            <a:off x="704088" y="1874519"/>
-            <a:ext cx="3429000" cy="1645920"/>
+            <a:off x="704088" y="2377439"/>
+            <a:ext cx="10789920" cy="9525"/>
           </a:xfrm>
           <a:prstGeom prst="rect">
             <a:avLst/>
           </a:prstGeom>
-          <a:noFill/>
-          <a:ln w="9525">
-            <a:solidFill>
-              <a:srgbClr val="D6D7D8"/>
-            </a:solidFill>
+          <a:solidFill>
+            <a:srgbClr val="D6D7D8"/>
+          </a:solidFill>
+          <a:ln>
+            <a:noFill/>
           </a:ln>
           <a:effectLst/>
         </p:spPr>
@@ -49268,36 +49454,110 @@
           </a:fontRef>
         </p:style>
         <p:txBody>
-          <a:bodyPr rtlCol="0" anchor="ctr" wrap="square" lIns="109728" rIns="109728" tIns="73152" bIns="73152"/>
+          <a:bodyPr rtlCol="0" anchor="ctr"/>
           <a:lstStyle/>
           <a:p>
-            <a:pPr algn="l"/>
+            <a:pPr algn="ctr"/>
+          </a:p>
+        </p:txBody>
+      </p:sp>
+      <p:sp>
+        <p:nvSpPr>
+          <p:cNvPr id="8" name="TextBox 7"/>
+          <p:cNvSpPr txBox="1"/>
+          <p:nvPr/>
+        </p:nvSpPr>
+        <p:spPr>
+          <a:xfrm>
+            <a:off x="704088" y="2377439"/>
+            <a:ext cx="2651760" cy="1051560"/>
+          </a:xfrm>
+          <a:prstGeom prst="rect">
+            <a:avLst/>
+          </a:prstGeom>
+          <a:noFill/>
+          <a:effectLst/>
+        </p:spPr>
+        <p:txBody>
+          <a:bodyPr wrap="square" anchor="ctr" lIns="36576" rIns="36576" tIns="27432" bIns="27432">
+            <a:spAutoFit/>
+          </a:bodyPr>
+          <a:lstStyle/>
+          <a:p>
+            <a:pPr algn="l">
+              <a:spcAft>
+                <a:spcPts val="0"/>
+              </a:spcAft>
+            </a:pPr>
             <a:r>
-              <a:rPr sz="1600" b="0">
+              <a:rPr sz="1400" b="0">
                 <a:solidFill>
-                  <a:srgbClr val="212427"/>
+                  <a:srgbClr val="5A6065"/>
                 </a:solidFill>
+                <a:latin typeface="Verdana"/>
               </a:rPr>
-              <a:t>A claim is a sentence that states something.</a:t>
+              <a:t>Everyday, granular</a:t>
             </a:r>
           </a:p>
         </p:txBody>
       </p:sp>
       <p:sp>
         <p:nvSpPr>
-          <p:cNvPr id="6" name="Rectangle 5"/>
+          <p:cNvPr id="9" name="TextBox 8"/>
+          <p:cNvSpPr txBox="1"/>
+          <p:nvPr/>
+        </p:nvSpPr>
+        <p:spPr>
+          <a:xfrm>
+            <a:off x="3447288" y="2377439"/>
+            <a:ext cx="8046720" cy="1051560"/>
+          </a:xfrm>
+          <a:prstGeom prst="rect">
+            <a:avLst/>
+          </a:prstGeom>
+          <a:noFill/>
+          <a:effectLst/>
+        </p:spPr>
+        <p:txBody>
+          <a:bodyPr wrap="square" anchor="ctr" lIns="36576" rIns="36576" tIns="27432" bIns="27432">
+            <a:spAutoFit/>
+          </a:bodyPr>
+          <a:lstStyle/>
+          <a:p>
+            <a:pPr algn="l">
+              <a:spcAft>
+                <a:spcPts val="0"/>
+              </a:spcAft>
+            </a:pPr>
+            <a:r>
+              <a:rPr sz="1600" b="0">
+                <a:solidFill>
+                  <a:srgbClr val="212427"/>
+                </a:solidFill>
+                <a:latin typeface="Verdana"/>
+              </a:rPr>
+              <a:t>Every clause that states something is a claim: main clause and subordinate clause count separately.</a:t>
+            </a:r>
+          </a:p>
+        </p:txBody>
+      </p:sp>
+      <p:sp>
+        <p:nvSpPr>
+          <p:cNvPr id="10" name="Rectangle 9"/>
           <p:cNvSpPr/>
           <p:nvPr/>
         </p:nvSpPr>
         <p:spPr>
           <a:xfrm>
-            <a:off x="704088" y="3657600"/>
-            <a:ext cx="3429000" cy="2011680"/>
+            <a:off x="704088" y="3428999"/>
+            <a:ext cx="10789920" cy="9525"/>
           </a:xfrm>
           <a:prstGeom prst="rect">
             <a:avLst/>
           </a:prstGeom>
-          <a:noFill/>
+          <a:solidFill>
+            <a:srgbClr val="D6D7D8"/>
+          </a:solidFill>
           <a:ln>
             <a:noFill/>
           </a:ln>
@@ -49318,36 +49578,110 @@
           </a:fontRef>
         </p:style>
         <p:txBody>
-          <a:bodyPr rtlCol="0" anchor="t" wrap="square" lIns="109728" rIns="109728" tIns="73152" bIns="73152"/>
+          <a:bodyPr rtlCol="0" anchor="ctr"/>
           <a:lstStyle/>
           <a:p>
-            <a:pPr algn="l"/>
+            <a:pPr algn="ctr"/>
+          </a:p>
+        </p:txBody>
+      </p:sp>
+      <p:sp>
+        <p:nvSpPr>
+          <p:cNvPr id="11" name="TextBox 10"/>
+          <p:cNvSpPr txBox="1"/>
+          <p:nvPr/>
+        </p:nvSpPr>
+        <p:spPr>
+          <a:xfrm>
+            <a:off x="704088" y="3428999"/>
+            <a:ext cx="2651760" cy="1051560"/>
+          </a:xfrm>
+          <a:prstGeom prst="rect">
+            <a:avLst/>
+          </a:prstGeom>
+          <a:noFill/>
+          <a:effectLst/>
+        </p:spPr>
+        <p:txBody>
+          <a:bodyPr wrap="square" anchor="ctr" lIns="36576" rIns="36576" tIns="27432" bIns="27432">
+            <a:spAutoFit/>
+          </a:bodyPr>
+          <a:lstStyle/>
+          <a:p>
+            <a:pPr algn="l">
+              <a:spcAft>
+                <a:spcPts val="0"/>
+              </a:spcAft>
+            </a:pPr>
             <a:r>
-              <a:rPr sz="1300" b="0">
+              <a:rPr sz="1400" b="0">
                 <a:solidFill>
                   <a:srgbClr val="5A6065"/>
                 </a:solidFill>
+                <a:latin typeface="Verdana"/>
               </a:rPr>
-              <a:t>By that the example is one claim. One could also count two: main clause and subordinate clause are two sentences.</a:t>
+              <a:t>Logic</a:t>
             </a:r>
           </a:p>
         </p:txBody>
       </p:sp>
       <p:sp>
         <p:nvSpPr>
-          <p:cNvPr id="7" name="Rectangle 6"/>
+          <p:cNvPr id="12" name="TextBox 11"/>
+          <p:cNvSpPr txBox="1"/>
+          <p:nvPr/>
+        </p:nvSpPr>
+        <p:spPr>
+          <a:xfrm>
+            <a:off x="3447288" y="3428999"/>
+            <a:ext cx="8046720" cy="1051560"/>
+          </a:xfrm>
+          <a:prstGeom prst="rect">
+            <a:avLst/>
+          </a:prstGeom>
+          <a:noFill/>
+          <a:effectLst/>
+        </p:spPr>
+        <p:txBody>
+          <a:bodyPr wrap="square" anchor="ctr" lIns="36576" rIns="36576" tIns="27432" bIns="27432">
+            <a:spAutoFit/>
+          </a:bodyPr>
+          <a:lstStyle/>
+          <a:p>
+            <a:pPr algn="l">
+              <a:spcAft>
+                <a:spcPts val="0"/>
+              </a:spcAft>
+            </a:pPr>
+            <a:r>
+              <a:rPr sz="1600" b="0">
+                <a:solidFill>
+                  <a:srgbClr val="212427"/>
+                </a:solidFill>
+                <a:latin typeface="Verdana"/>
+              </a:rPr>
+              <a:t>A claim is something that can be true or false on its own. Every element of a list counts for every action it belongs to.</a:t>
+            </a:r>
+          </a:p>
+        </p:txBody>
+      </p:sp>
+      <p:sp>
+        <p:nvSpPr>
+          <p:cNvPr id="13" name="Rectangle 12"/>
           <p:cNvSpPr/>
           <p:nvPr/>
         </p:nvSpPr>
         <p:spPr>
           <a:xfrm>
-            <a:off x="4407408" y="1280160"/>
-            <a:ext cx="3429000" cy="548640"/>
+            <a:off x="704088" y="4480559"/>
+            <a:ext cx="10789920" cy="9525"/>
           </a:xfrm>
           <a:prstGeom prst="rect">
             <a:avLst/>
           </a:prstGeom>
-          <a:noFill/>
+          <a:solidFill>
+            <a:srgbClr val="D6D7D8"/>
+          </a:solidFill>
           <a:ln>
             <a:noFill/>
           </a:ln>
@@ -49368,271 +49702,89 @@
           </a:fontRef>
         </p:style>
         <p:txBody>
-          <a:bodyPr rtlCol="0" anchor="t" wrap="square" lIns="109728" rIns="109728" tIns="73152" bIns="73152"/>
+          <a:bodyPr rtlCol="0" anchor="ctr"/>
           <a:lstStyle/>
           <a:p>
-            <a:pPr algn="l"/>
+            <a:pPr algn="ctr"/>
+          </a:p>
+        </p:txBody>
+      </p:sp>
+      <p:sp>
+        <p:nvSpPr>
+          <p:cNvPr id="14" name="TextBox 13"/>
+          <p:cNvSpPr txBox="1"/>
+          <p:nvPr/>
+        </p:nvSpPr>
+        <p:spPr>
+          <a:xfrm>
+            <a:off x="704088" y="4480559"/>
+            <a:ext cx="2651760" cy="1051560"/>
+          </a:xfrm>
+          <a:prstGeom prst="rect">
+            <a:avLst/>
+          </a:prstGeom>
+          <a:noFill/>
+          <a:effectLst/>
+        </p:spPr>
+        <p:txBody>
+          <a:bodyPr wrap="square" anchor="ctr" lIns="36576" rIns="36576" tIns="27432" bIns="27432">
+            <a:spAutoFit/>
+          </a:bodyPr>
+          <a:lstStyle/>
+          <a:p>
+            <a:pPr algn="l">
+              <a:spcAft>
+                <a:spcPts val="0"/>
+              </a:spcAft>
+            </a:pPr>
             <a:r>
-              <a:rPr sz="1800" b="1">
+              <a:rPr sz="1400" b="0">
                 <a:solidFill>
-                  <a:srgbClr val="212427"/>
+                  <a:srgbClr val="5A6065"/>
                 </a:solidFill>
+                <a:latin typeface="Verdana"/>
               </a:rPr>
-              <a:t>Logic</a:t>
+              <a:t>Working definition</a:t>
             </a:r>
           </a:p>
         </p:txBody>
       </p:sp>
       <p:sp>
         <p:nvSpPr>
-          <p:cNvPr id="8" name="Rectangle 7"/>
-          <p:cNvSpPr/>
+          <p:cNvPr id="15" name="TextBox 14"/>
+          <p:cNvSpPr txBox="1"/>
           <p:nvPr/>
         </p:nvSpPr>
         <p:spPr>
           <a:xfrm>
-            <a:off x="4407408" y="1874519"/>
-            <a:ext cx="3429000" cy="1645920"/>
+            <a:off x="3447288" y="4480559"/>
+            <a:ext cx="8046720" cy="1051560"/>
           </a:xfrm>
           <a:prstGeom prst="rect">
             <a:avLst/>
           </a:prstGeom>
           <a:noFill/>
-          <a:ln w="9525">
-            <a:solidFill>
-              <a:srgbClr val="D6D7D8"/>
-            </a:solidFill>
-          </a:ln>
           <a:effectLst/>
         </p:spPr>
-        <p:style>
-          <a:lnRef idx="1">
-            <a:schemeClr val="accent1"/>
-          </a:lnRef>
-          <a:fillRef idx="3">
-            <a:schemeClr val="accent1"/>
-          </a:fillRef>
-          <a:effectRef idx="2">
-            <a:schemeClr val="accent1"/>
-          </a:effectRef>
-          <a:fontRef idx="minor">
-            <a:schemeClr val="lt1"/>
-          </a:fontRef>
-        </p:style>
         <p:txBody>
-          <a:bodyPr rtlCol="0" anchor="ctr" wrap="square" lIns="109728" rIns="109728" tIns="73152" bIns="73152"/>
+          <a:bodyPr wrap="square" anchor="ctr" lIns="36576" rIns="36576" tIns="27432" bIns="27432">
+            <a:spAutoFit/>
+          </a:bodyPr>
           <a:lstStyle/>
           <a:p>
-            <a:pPr algn="l"/>
+            <a:pPr algn="l">
+              <a:spcAft>
+                <a:spcPts val="0"/>
+              </a:spcAft>
+            </a:pPr>
             <a:r>
               <a:rPr sz="1600" b="0">
                 <a:solidFill>
                   <a:srgbClr val="212427"/>
                 </a:solidFill>
+                <a:latin typeface="Verdana"/>
               </a:rPr>
-              <a:t>A claim is something that can be true or false on its own.</a:t>
-            </a:r>
-          </a:p>
-        </p:txBody>
-      </p:sp>
-      <p:sp>
-        <p:nvSpPr>
-          <p:cNvPr id="9" name="Rectangle 8"/>
-          <p:cNvSpPr/>
-          <p:nvPr/>
-        </p:nvSpPr>
-        <p:spPr>
-          <a:xfrm>
-            <a:off x="4407408" y="3657600"/>
-            <a:ext cx="3429000" cy="2011680"/>
-          </a:xfrm>
-          <a:prstGeom prst="rect">
-            <a:avLst/>
-          </a:prstGeom>
-          <a:noFill/>
-          <a:ln>
-            <a:noFill/>
-          </a:ln>
-          <a:effectLst/>
-        </p:spPr>
-        <p:style>
-          <a:lnRef idx="1">
-            <a:schemeClr val="accent1"/>
-          </a:lnRef>
-          <a:fillRef idx="3">
-            <a:schemeClr val="accent1"/>
-          </a:fillRef>
-          <a:effectRef idx="2">
-            <a:schemeClr val="accent1"/>
-          </a:effectRef>
-          <a:fontRef idx="minor">
-            <a:schemeClr val="lt1"/>
-          </a:fontRef>
-        </p:style>
-        <p:txBody>
-          <a:bodyPr rtlCol="0" anchor="t" wrap="square" lIns="109728" rIns="109728" tIns="73152" bIns="73152"/>
-          <a:lstStyle/>
-          <a:p>
-            <a:pPr algn="l"/>
-            <a:r>
-              <a:rPr sz="1300" b="0">
-                <a:solidFill>
-                  <a:srgbClr val="5A6065"/>
-                </a:solidFill>
-              </a:rPr>
-              <a:t>"A, because B and C" are three claims: A, B, C, plus the claim that B and C are the reason for A. By that the example has three to four claims.</a:t>
-            </a:r>
-          </a:p>
-        </p:txBody>
-      </p:sp>
-      <p:sp>
-        <p:nvSpPr>
-          <p:cNvPr id="10" name="Rectangle 9"/>
-          <p:cNvSpPr/>
-          <p:nvPr/>
-        </p:nvSpPr>
-        <p:spPr>
-          <a:xfrm>
-            <a:off x="8110727" y="1280160"/>
-            <a:ext cx="3429000" cy="548640"/>
-          </a:xfrm>
-          <a:prstGeom prst="rect">
-            <a:avLst/>
-          </a:prstGeom>
-          <a:noFill/>
-          <a:ln>
-            <a:noFill/>
-          </a:ln>
-          <a:effectLst/>
-        </p:spPr>
-        <p:style>
-          <a:lnRef idx="1">
-            <a:schemeClr val="accent1"/>
-          </a:lnRef>
-          <a:fillRef idx="3">
-            <a:schemeClr val="accent1"/>
-          </a:fillRef>
-          <a:effectRef idx="2">
-            <a:schemeClr val="accent1"/>
-          </a:effectRef>
-          <a:fontRef idx="minor">
-            <a:schemeClr val="lt1"/>
-          </a:fontRef>
-        </p:style>
-        <p:txBody>
-          <a:bodyPr rtlCol="0" anchor="t" wrap="square" lIns="109728" rIns="109728" tIns="73152" bIns="73152"/>
-          <a:lstStyle/>
-          <a:p>
-            <a:pPr algn="l"/>
-            <a:r>
-              <a:rPr sz="1800" b="1">
-                <a:solidFill>
-                  <a:srgbClr val="212427"/>
-                </a:solidFill>
-              </a:rPr>
-              <a:t>NLP research (FActScore)</a:t>
-            </a:r>
-          </a:p>
-        </p:txBody>
-      </p:sp>
-      <p:sp>
-        <p:nvSpPr>
-          <p:cNvPr id="11" name="Rectangle 10"/>
-          <p:cNvSpPr/>
-          <p:nvPr/>
-        </p:nvSpPr>
-        <p:spPr>
-          <a:xfrm>
-            <a:off x="8110727" y="1874519"/>
-            <a:ext cx="3429000" cy="1645920"/>
-          </a:xfrm>
-          <a:prstGeom prst="rect">
-            <a:avLst/>
-          </a:prstGeom>
-          <a:noFill/>
-          <a:ln w="9525">
-            <a:solidFill>
-              <a:srgbClr val="D6D7D8"/>
-            </a:solidFill>
-          </a:ln>
-          <a:effectLst/>
-        </p:spPr>
-        <p:style>
-          <a:lnRef idx="1">
-            <a:schemeClr val="accent1"/>
-          </a:lnRef>
-          <a:fillRef idx="3">
-            <a:schemeClr val="accent1"/>
-          </a:fillRef>
-          <a:effectRef idx="2">
-            <a:schemeClr val="accent1"/>
-          </a:effectRef>
-          <a:fontRef idx="minor">
-            <a:schemeClr val="lt1"/>
-          </a:fontRef>
-        </p:style>
-        <p:txBody>
-          <a:bodyPr rtlCol="0" anchor="ctr" wrap="square" lIns="109728" rIns="109728" tIns="73152" bIns="73152"/>
-          <a:lstStyle/>
-          <a:p>
-            <a:pPr algn="l"/>
-            <a:r>
-              <a:rPr sz="1600" b="0">
-                <a:solidFill>
-                  <a:srgbClr val="212427"/>
-                </a:solidFill>
-              </a:rPr>
-              <a:t>A claim is the smallest unit that carries one piece of information and can be checked against a source.</a:t>
-            </a:r>
-          </a:p>
-        </p:txBody>
-      </p:sp>
-      <p:sp>
-        <p:nvSpPr>
-          <p:cNvPr id="12" name="Rectangle 11"/>
-          <p:cNvSpPr/>
-          <p:nvPr/>
-        </p:nvSpPr>
-        <p:spPr>
-          <a:xfrm>
-            <a:off x="8110727" y="3657600"/>
-            <a:ext cx="3429000" cy="2011680"/>
-          </a:xfrm>
-          <a:prstGeom prst="rect">
-            <a:avLst/>
-          </a:prstGeom>
-          <a:noFill/>
-          <a:ln>
-            <a:noFill/>
-          </a:ln>
-          <a:effectLst/>
-        </p:spPr>
-        <p:style>
-          <a:lnRef idx="1">
-            <a:schemeClr val="accent1"/>
-          </a:lnRef>
-          <a:fillRef idx="3">
-            <a:schemeClr val="accent1"/>
-          </a:fillRef>
-          <a:effectRef idx="2">
-            <a:schemeClr val="accent1"/>
-          </a:effectRef>
-          <a:fontRef idx="minor">
-            <a:schemeClr val="lt1"/>
-          </a:fontRef>
-        </p:style>
-        <p:txBody>
-          <a:bodyPr rtlCol="0" anchor="t" wrap="square" lIns="109728" rIns="109728" tIns="73152" bIns="73152"/>
-          <a:lstStyle/>
-          <a:p>
-            <a:pPr algn="l"/>
-            <a:r>
-              <a:rPr sz="1300" b="0">
-                <a:solidFill>
-                  <a:srgbClr val="5A6065"/>
-                </a:solidFill>
-              </a:rPr>
-              <a:t>Each element of a list counts. By that the example has three claims.</a:t>
+              <a:t>A claim is the smallest part of the reference answer that can be checked at one place in the Kompendium.</a:t>
             </a:r>
           </a:p>
         </p:txBody>
@@ -49665,12 +49817,20 @@
             <p:ph type="title"/>
           </p:nvPr>
         </p:nvSpPr>
-        <p:spPr/>
+        <p:spPr>
+          <a:effectLst/>
+        </p:spPr>
         <p:txBody>
           <a:bodyPr/>
           <a:lstStyle/>
           <a:p>
             <a:r>
+              <a:rPr b="0" sz="2800" cap="none">
+                <a:solidFill>
+                  <a:srgbClr val="212427"/>
+                </a:solidFill>
+                <a:latin typeface="Verdana"/>
+              </a:rPr>
               <a:t>Working definition</a:t>
             </a:r>
           </a:p>
@@ -49684,14 +49844,14 @@
         </p:nvSpPr>
         <p:spPr>
           <a:xfrm>
-            <a:off x="704088" y="1371600"/>
-            <a:ext cx="10789920" cy="1188720"/>
+            <a:off x="704088" y="1115568"/>
+            <a:ext cx="609600" cy="38100"/>
           </a:xfrm>
           <a:prstGeom prst="rect">
             <a:avLst/>
           </a:prstGeom>
           <a:solidFill>
-            <a:srgbClr val="FDE9BF"/>
+            <a:srgbClr val="B1063A"/>
           </a:solidFill>
           <a:ln>
             <a:noFill/>
@@ -49713,36 +49873,70 @@
           </a:fontRef>
         </p:style>
         <p:txBody>
-          <a:bodyPr rtlCol="0" anchor="ctr" wrap="square" lIns="109728" rIns="109728" tIns="73152" bIns="73152"/>
+          <a:bodyPr rtlCol="0" anchor="ctr"/>
           <a:lstStyle/>
           <a:p>
-            <a:pPr algn="l"/>
+            <a:pPr algn="ctr"/>
+          </a:p>
+        </p:txBody>
+      </p:sp>
+      <p:sp>
+        <p:nvSpPr>
+          <p:cNvPr id="5" name="TextBox 4"/>
+          <p:cNvSpPr txBox="1"/>
+          <p:nvPr/>
+        </p:nvSpPr>
+        <p:spPr>
+          <a:xfrm>
+            <a:off x="704088" y="1371600"/>
+            <a:ext cx="10789920" cy="1097280"/>
+          </a:xfrm>
+          <a:prstGeom prst="rect">
+            <a:avLst/>
+          </a:prstGeom>
+          <a:noFill/>
+          <a:effectLst/>
+        </p:spPr>
+        <p:txBody>
+          <a:bodyPr wrap="square" anchor="ctr" lIns="36576" rIns="36576" tIns="27432" bIns="27432">
+            <a:spAutoFit/>
+          </a:bodyPr>
+          <a:lstStyle/>
+          <a:p>
+            <a:pPr algn="l">
+              <a:spcAft>
+                <a:spcPts val="0"/>
+              </a:spcAft>
+            </a:pPr>
             <a:r>
               <a:rPr sz="2200" b="0">
                 <a:solidFill>
                   <a:srgbClr val="212427"/>
                 </a:solidFill>
+                <a:latin typeface="Verdana"/>
               </a:rPr>
-              <a:t>A claim is the smallest part of the reference answer that can be checked against the Kompendium on its own.</a:t>
+              <a:t>A claim is the smallest part of the reference answer that can be checked at one place in the Kompendium.</a:t>
             </a:r>
           </a:p>
         </p:txBody>
       </p:sp>
       <p:sp>
         <p:nvSpPr>
-          <p:cNvPr id="5" name="Rectangle 4"/>
+          <p:cNvPr id="6" name="Rectangle 5"/>
           <p:cNvSpPr/>
           <p:nvPr/>
         </p:nvSpPr>
         <p:spPr>
           <a:xfrm>
-            <a:off x="704088" y="2926080"/>
-            <a:ext cx="457200" cy="548640"/>
+            <a:off x="704088" y="2606040"/>
+            <a:ext cx="10789920" cy="9525"/>
           </a:xfrm>
           <a:prstGeom prst="rect">
             <a:avLst/>
           </a:prstGeom>
-          <a:noFill/>
+          <a:solidFill>
+            <a:srgbClr val="D6D7D8"/>
+          </a:solidFill>
           <a:ln>
             <a:noFill/>
           </a:ln>
@@ -49763,15 +49957,47 @@
           </a:fontRef>
         </p:style>
         <p:txBody>
-          <a:bodyPr rtlCol="0" anchor="t" wrap="square" lIns="109728" rIns="109728" tIns="73152" bIns="73152"/>
+          <a:bodyPr rtlCol="0" anchor="ctr"/>
           <a:lstStyle/>
           <a:p>
-            <a:pPr algn="l"/>
+            <a:pPr algn="ctr"/>
+          </a:p>
+        </p:txBody>
+      </p:sp>
+      <p:sp>
+        <p:nvSpPr>
+          <p:cNvPr id="7" name="TextBox 6"/>
+          <p:cNvSpPr txBox="1"/>
+          <p:nvPr/>
+        </p:nvSpPr>
+        <p:spPr>
+          <a:xfrm>
+            <a:off x="704088" y="2788920"/>
+            <a:ext cx="457200" cy="640080"/>
+          </a:xfrm>
+          <a:prstGeom prst="rect">
+            <a:avLst/>
+          </a:prstGeom>
+          <a:noFill/>
+          <a:effectLst/>
+        </p:spPr>
+        <p:txBody>
+          <a:bodyPr wrap="square" anchor="ctr" lIns="36576" rIns="36576" tIns="27432" bIns="27432">
+            <a:spAutoFit/>
+          </a:bodyPr>
+          <a:lstStyle/>
+          <a:p>
+            <a:pPr algn="l">
+              <a:spcAft>
+                <a:spcPts val="0"/>
+              </a:spcAft>
+            </a:pPr>
             <a:r>
-              <a:rPr sz="1800" b="1">
+              <a:rPr sz="1800" b="0">
                 <a:solidFill>
                   <a:srgbClr val="5A6065"/>
                 </a:solidFill>
+                <a:latin typeface="Verdana"/>
               </a:rPr>
               <a:t>1</a:t>
             </a:r>
@@ -49780,98 +50006,78 @@
       </p:sp>
       <p:sp>
         <p:nvSpPr>
-          <p:cNvPr id="6" name="Rectangle 5"/>
-          <p:cNvSpPr/>
+          <p:cNvPr id="8" name="TextBox 7"/>
+          <p:cNvSpPr txBox="1"/>
           <p:nvPr/>
         </p:nvSpPr>
         <p:spPr>
           <a:xfrm>
-            <a:off x="1188720" y="2926080"/>
-            <a:ext cx="10241280" cy="548640"/>
+            <a:off x="1252728" y="2788920"/>
+            <a:ext cx="10241280" cy="640080"/>
           </a:xfrm>
           <a:prstGeom prst="rect">
             <a:avLst/>
           </a:prstGeom>
           <a:noFill/>
-          <a:ln>
-            <a:noFill/>
-          </a:ln>
           <a:effectLst/>
         </p:spPr>
-        <p:style>
-          <a:lnRef idx="1">
-            <a:schemeClr val="accent1"/>
-          </a:lnRef>
-          <a:fillRef idx="3">
-            <a:schemeClr val="accent1"/>
-          </a:fillRef>
-          <a:effectRef idx="2">
-            <a:schemeClr val="accent1"/>
-          </a:effectRef>
-          <a:fontRef idx="minor">
-            <a:schemeClr val="lt1"/>
-          </a:fontRef>
-        </p:style>
         <p:txBody>
-          <a:bodyPr rtlCol="0" anchor="ctr" wrap="square" lIns="109728" rIns="109728" tIns="73152" bIns="73152"/>
+          <a:bodyPr wrap="square" anchor="ctr" lIns="36576" rIns="36576" tIns="27432" bIns="27432">
+            <a:spAutoFit/>
+          </a:bodyPr>
           <a:lstStyle/>
           <a:p>
-            <a:pPr algn="l"/>
+            <a:pPr algn="l">
+              <a:spcAft>
+                <a:spcPts val="0"/>
+              </a:spcAft>
+            </a:pPr>
             <a:r>
               <a:rPr sz="1600" b="0">
                 <a:solidFill>
                   <a:srgbClr val="212427"/>
                 </a:solidFill>
+                <a:latin typeface="Verdana"/>
               </a:rPr>
-              <a:t>Every element of a list is its own claim.</a:t>
+              <a:t>Every action (document, replace) is its own claim.</a:t>
             </a:r>
           </a:p>
         </p:txBody>
       </p:sp>
       <p:sp>
         <p:nvSpPr>
-          <p:cNvPr id="7" name="Rectangle 6"/>
-          <p:cNvSpPr/>
+          <p:cNvPr id="9" name="TextBox 8"/>
+          <p:cNvSpPr txBox="1"/>
           <p:nvPr/>
         </p:nvSpPr>
         <p:spPr>
           <a:xfrm>
-            <a:off x="704088" y="3657600"/>
-            <a:ext cx="457200" cy="548640"/>
+            <a:off x="704088" y="3520439"/>
+            <a:ext cx="457200" cy="640080"/>
           </a:xfrm>
           <a:prstGeom prst="rect">
             <a:avLst/>
           </a:prstGeom>
           <a:noFill/>
-          <a:ln>
-            <a:noFill/>
-          </a:ln>
           <a:effectLst/>
         </p:spPr>
-        <p:style>
-          <a:lnRef idx="1">
-            <a:schemeClr val="accent1"/>
-          </a:lnRef>
-          <a:fillRef idx="3">
-            <a:schemeClr val="accent1"/>
-          </a:fillRef>
-          <a:effectRef idx="2">
-            <a:schemeClr val="accent1"/>
-          </a:effectRef>
-          <a:fontRef idx="minor">
-            <a:schemeClr val="lt1"/>
-          </a:fontRef>
-        </p:style>
         <p:txBody>
-          <a:bodyPr rtlCol="0" anchor="t" wrap="square" lIns="109728" rIns="109728" tIns="73152" bIns="73152"/>
+          <a:bodyPr wrap="square" anchor="ctr" lIns="36576" rIns="36576" tIns="27432" bIns="27432">
+            <a:spAutoFit/>
+          </a:bodyPr>
           <a:lstStyle/>
           <a:p>
-            <a:pPr algn="l"/>
+            <a:pPr algn="l">
+              <a:spcAft>
+                <a:spcPts val="0"/>
+              </a:spcAft>
+            </a:pPr>
             <a:r>
-              <a:rPr sz="1800" b="1">
+              <a:rPr sz="1800" b="0">
                 <a:solidFill>
                   <a:srgbClr val="5A6065"/>
                 </a:solidFill>
+                <a:latin typeface="Verdana"/>
               </a:rPr>
               <a:t>2</a:t>
             </a:r>
@@ -49880,98 +50086,78 @@
       </p:sp>
       <p:sp>
         <p:nvSpPr>
-          <p:cNvPr id="8" name="Rectangle 7"/>
-          <p:cNvSpPr/>
+          <p:cNvPr id="10" name="TextBox 9"/>
+          <p:cNvSpPr txBox="1"/>
           <p:nvPr/>
         </p:nvSpPr>
         <p:spPr>
           <a:xfrm>
-            <a:off x="1188720" y="3657600"/>
-            <a:ext cx="10241280" cy="548640"/>
+            <a:off x="1252728" y="3520439"/>
+            <a:ext cx="10241280" cy="640080"/>
           </a:xfrm>
           <a:prstGeom prst="rect">
             <a:avLst/>
           </a:prstGeom>
           <a:noFill/>
-          <a:ln>
-            <a:noFill/>
-          </a:ln>
           <a:effectLst/>
         </p:spPr>
-        <p:style>
-          <a:lnRef idx="1">
-            <a:schemeClr val="accent1"/>
-          </a:lnRef>
-          <a:fillRef idx="3">
-            <a:schemeClr val="accent1"/>
-          </a:fillRef>
-          <a:effectRef idx="2">
-            <a:schemeClr val="accent1"/>
-          </a:effectRef>
-          <a:fontRef idx="minor">
-            <a:schemeClr val="lt1"/>
-          </a:fontRef>
-        </p:style>
         <p:txBody>
-          <a:bodyPr rtlCol="0" anchor="ctr" wrap="square" lIns="109728" rIns="109728" tIns="73152" bIns="73152"/>
+          <a:bodyPr wrap="square" anchor="ctr" lIns="36576" rIns="36576" tIns="27432" bIns="27432">
+            <a:spAutoFit/>
+          </a:bodyPr>
           <a:lstStyle/>
           <a:p>
-            <a:pPr algn="l"/>
+            <a:pPr algn="l">
+              <a:spcAft>
+                <a:spcPts val="0"/>
+              </a:spcAft>
+            </a:pPr>
             <a:r>
               <a:rPr sz="1600" b="0">
                 <a:solidFill>
                   <a:srgbClr val="212427"/>
                 </a:solidFill>
+                <a:latin typeface="Verdana"/>
               </a:rPr>
-              <a:t>Every reason (because) and every purpose (in order to) is its own claim.</a:t>
+              <a:t>Every reason (because) and every purpose (so that) is its own claim.</a:t>
             </a:r>
           </a:p>
         </p:txBody>
       </p:sp>
       <p:sp>
         <p:nvSpPr>
-          <p:cNvPr id="9" name="Rectangle 8"/>
-          <p:cNvSpPr/>
+          <p:cNvPr id="11" name="TextBox 10"/>
+          <p:cNvSpPr txBox="1"/>
           <p:nvPr/>
         </p:nvSpPr>
         <p:spPr>
           <a:xfrm>
-            <a:off x="704088" y="4389120"/>
-            <a:ext cx="457200" cy="548640"/>
+            <a:off x="704088" y="4251960"/>
+            <a:ext cx="457200" cy="640080"/>
           </a:xfrm>
           <a:prstGeom prst="rect">
             <a:avLst/>
           </a:prstGeom>
           <a:noFill/>
-          <a:ln>
-            <a:noFill/>
-          </a:ln>
           <a:effectLst/>
         </p:spPr>
-        <p:style>
-          <a:lnRef idx="1">
-            <a:schemeClr val="accent1"/>
-          </a:lnRef>
-          <a:fillRef idx="3">
-            <a:schemeClr val="accent1"/>
-          </a:fillRef>
-          <a:effectRef idx="2">
-            <a:schemeClr val="accent1"/>
-          </a:effectRef>
-          <a:fontRef idx="minor">
-            <a:schemeClr val="lt1"/>
-          </a:fontRef>
-        </p:style>
         <p:txBody>
-          <a:bodyPr rtlCol="0" anchor="t" wrap="square" lIns="109728" rIns="109728" tIns="73152" bIns="73152"/>
+          <a:bodyPr wrap="square" anchor="ctr" lIns="36576" rIns="36576" tIns="27432" bIns="27432">
+            <a:spAutoFit/>
+          </a:bodyPr>
           <a:lstStyle/>
           <a:p>
-            <a:pPr algn="l"/>
+            <a:pPr algn="l">
+              <a:spcAft>
+                <a:spcPts val="0"/>
+              </a:spcAft>
+            </a:pPr>
             <a:r>
-              <a:rPr sz="1800" b="1">
+              <a:rPr sz="1800" b="0">
                 <a:solidFill>
                   <a:srgbClr val="5A6065"/>
                 </a:solidFill>
+                <a:latin typeface="Verdana"/>
               </a:rPr>
               <a:t>3</a:t>
             </a:r>
@@ -49980,48 +50166,118 @@
       </p:sp>
       <p:sp>
         <p:nvSpPr>
-          <p:cNvPr id="10" name="Rectangle 9"/>
-          <p:cNvSpPr/>
+          <p:cNvPr id="12" name="TextBox 11"/>
+          <p:cNvSpPr txBox="1"/>
           <p:nvPr/>
         </p:nvSpPr>
         <p:spPr>
           <a:xfrm>
-            <a:off x="1188720" y="4389120"/>
-            <a:ext cx="10241280" cy="548640"/>
+            <a:off x="1252728" y="4251960"/>
+            <a:ext cx="10241280" cy="640080"/>
           </a:xfrm>
           <a:prstGeom prst="rect">
             <a:avLst/>
           </a:prstGeom>
           <a:noFill/>
-          <a:ln>
-            <a:noFill/>
-          </a:ln>
           <a:effectLst/>
         </p:spPr>
-        <p:style>
-          <a:lnRef idx="1">
-            <a:schemeClr val="accent1"/>
-          </a:lnRef>
-          <a:fillRef idx="3">
-            <a:schemeClr val="accent1"/>
-          </a:fillRef>
-          <a:effectRef idx="2">
-            <a:schemeClr val="accent1"/>
-          </a:effectRef>
-          <a:fontRef idx="minor">
-            <a:schemeClr val="lt1"/>
-          </a:fontRef>
-        </p:style>
         <p:txBody>
-          <a:bodyPr rtlCol="0" anchor="ctr" wrap="square" lIns="109728" rIns="109728" tIns="73152" bIns="73152"/>
+          <a:bodyPr wrap="square" anchor="ctr" lIns="36576" rIns="36576" tIns="27432" bIns="27432">
+            <a:spAutoFit/>
+          </a:bodyPr>
           <a:lstStyle/>
           <a:p>
-            <a:pPr algn="l"/>
+            <a:pPr algn="l">
+              <a:spcAft>
+                <a:spcPts val="0"/>
+              </a:spcAft>
+            </a:pPr>
             <a:r>
               <a:rPr sz="1600" b="0">
                 <a:solidFill>
                   <a:srgbClr val="212427"/>
                 </a:solidFill>
+                <a:latin typeface="Verdana"/>
+              </a:rPr>
+              <a:t>A list that the Kompendium states as one list stays one claim.</a:t>
+            </a:r>
+          </a:p>
+        </p:txBody>
+      </p:sp>
+      <p:sp>
+        <p:nvSpPr>
+          <p:cNvPr id="13" name="TextBox 12"/>
+          <p:cNvSpPr txBox="1"/>
+          <p:nvPr/>
+        </p:nvSpPr>
+        <p:spPr>
+          <a:xfrm>
+            <a:off x="704088" y="4983480"/>
+            <a:ext cx="457200" cy="640080"/>
+          </a:xfrm>
+          <a:prstGeom prst="rect">
+            <a:avLst/>
+          </a:prstGeom>
+          <a:noFill/>
+          <a:effectLst/>
+        </p:spPr>
+        <p:txBody>
+          <a:bodyPr wrap="square" anchor="ctr" lIns="36576" rIns="36576" tIns="27432" bIns="27432">
+            <a:spAutoFit/>
+          </a:bodyPr>
+          <a:lstStyle/>
+          <a:p>
+            <a:pPr algn="l">
+              <a:spcAft>
+                <a:spcPts val="0"/>
+              </a:spcAft>
+            </a:pPr>
+            <a:r>
+              <a:rPr sz="1800" b="0">
+                <a:solidFill>
+                  <a:srgbClr val="5A6065"/>
+                </a:solidFill>
+                <a:latin typeface="Verdana"/>
+              </a:rPr>
+              <a:t>4</a:t>
+            </a:r>
+          </a:p>
+        </p:txBody>
+      </p:sp>
+      <p:sp>
+        <p:nvSpPr>
+          <p:cNvPr id="14" name="TextBox 13"/>
+          <p:cNvSpPr txBox="1"/>
+          <p:nvPr/>
+        </p:nvSpPr>
+        <p:spPr>
+          <a:xfrm>
+            <a:off x="1252728" y="4983480"/>
+            <a:ext cx="10241280" cy="640080"/>
+          </a:xfrm>
+          <a:prstGeom prst="rect">
+            <a:avLst/>
+          </a:prstGeom>
+          <a:noFill/>
+          <a:effectLst/>
+        </p:spPr>
+        <p:txBody>
+          <a:bodyPr wrap="square" anchor="ctr" lIns="36576" rIns="36576" tIns="27432" bIns="27432">
+            <a:spAutoFit/>
+          </a:bodyPr>
+          <a:lstStyle/>
+          <a:p>
+            <a:pPr algn="l">
+              <a:spcAft>
+                <a:spcPts val="0"/>
+              </a:spcAft>
+            </a:pPr>
+            <a:r>
+              <a:rPr sz="1600" b="0">
+                <a:solidFill>
+                  <a:srgbClr val="212427"/>
+                </a:solidFill>
+                <a:latin typeface="Verdana"/>
               </a:rPr>
               <a:t>Repetitions and filler do not count.</a:t>
             </a:r>
@@ -50056,13 +50312,21 @@
             <p:ph type="title"/>
           </p:nvPr>
         </p:nvSpPr>
-        <p:spPr/>
+        <p:spPr>
+          <a:effectLst/>
+        </p:spPr>
         <p:txBody>
           <a:bodyPr/>
           <a:lstStyle/>
           <a:p>
             <a:r>
-              <a:t>Example 1: how many claims?</a:t>
+              <a:rPr b="0" sz="2800" cap="none">
+                <a:solidFill>
+                  <a:srgbClr val="212427"/>
+                </a:solidFill>
+                <a:latin typeface="Verdana"/>
+              </a:rPr>
+              <a:t>Example A: how many claims?</a:t>
             </a:r>
           </a:p>
         </p:txBody>
@@ -50075,17 +50339,17 @@
         </p:nvSpPr>
         <p:spPr>
           <a:xfrm>
-            <a:off x="704088" y="1143000"/>
-            <a:ext cx="10789920" cy="960120"/>
+            <a:off x="704088" y="1115568"/>
+            <a:ext cx="609600" cy="38100"/>
           </a:xfrm>
           <a:prstGeom prst="rect">
             <a:avLst/>
           </a:prstGeom>
-          <a:noFill/>
-          <a:ln w="9525">
-            <a:solidFill>
-              <a:srgbClr val="D6D7D8"/>
-            </a:solidFill>
+          <a:solidFill>
+            <a:srgbClr val="B1063A"/>
+          </a:solidFill>
+          <a:ln>
+            <a:noFill/>
           </a:ln>
           <a:effectLst/>
         </p:spPr>
@@ -50104,36 +50368,70 @@
           </a:fontRef>
         </p:style>
         <p:txBody>
-          <a:bodyPr rtlCol="0" anchor="ctr" wrap="square" lIns="109728" rIns="109728" tIns="73152" bIns="73152"/>
+          <a:bodyPr rtlCol="0" anchor="ctr"/>
           <a:lstStyle/>
           <a:p>
-            <a:pPr algn="l"/>
+            <a:pPr algn="ctr"/>
+          </a:p>
+        </p:txBody>
+      </p:sp>
+      <p:sp>
+        <p:nvSpPr>
+          <p:cNvPr id="5" name="TextBox 4"/>
+          <p:cNvSpPr txBox="1"/>
+          <p:nvPr/>
+        </p:nvSpPr>
+        <p:spPr>
+          <a:xfrm>
+            <a:off x="704088" y="1188720"/>
+            <a:ext cx="10789920" cy="685800"/>
+          </a:xfrm>
+          <a:prstGeom prst="rect">
+            <a:avLst/>
+          </a:prstGeom>
+          <a:noFill/>
+          <a:effectLst/>
+        </p:spPr>
+        <p:txBody>
+          <a:bodyPr wrap="square" anchor="ctr" lIns="36576" rIns="36576" tIns="27432" bIns="27432">
+            <a:spAutoFit/>
+          </a:bodyPr>
+          <a:lstStyle/>
+          <a:p>
+            <a:pPr algn="l">
+              <a:spcAft>
+                <a:spcPts val="0"/>
+              </a:spcAft>
+            </a:pPr>
             <a:r>
-              <a:rPr sz="1400" b="0">
+              <a:rPr sz="1500" b="0">
                 <a:solidFill>
                   <a:srgbClr val="212427"/>
                 </a:solidFill>
+                <a:latin typeface="Verdana"/>
               </a:rPr>
-              <a:t>Administrative accounts should be protected by multi-factor authentication, because they have a particularly high potential for damage and represent a preferred attack target.</a:t>
+              <a:t>The requirements must be documented so that they can be identified and taken into account during planning, operation, and procurement.</a:t>
             </a:r>
           </a:p>
         </p:txBody>
       </p:sp>
       <p:sp>
         <p:nvSpPr>
-          <p:cNvPr id="5" name="Rectangle 4"/>
+          <p:cNvPr id="6" name="Rectangle 5"/>
           <p:cNvSpPr/>
           <p:nvPr/>
         </p:nvSpPr>
         <p:spPr>
           <a:xfrm>
-            <a:off x="704088" y="2331720"/>
-            <a:ext cx="1828800" cy="1051560"/>
+            <a:off x="704088" y="1920240"/>
+            <a:ext cx="10789920" cy="9525"/>
           </a:xfrm>
           <a:prstGeom prst="rect">
             <a:avLst/>
           </a:prstGeom>
-          <a:noFill/>
+          <a:solidFill>
+            <a:srgbClr val="D6D7D8"/>
+          </a:solidFill>
           <a:ln>
             <a:noFill/>
           </a:ln>
@@ -50154,40 +50452,152 @@
           </a:fontRef>
         </p:style>
         <p:txBody>
-          <a:bodyPr rtlCol="0" anchor="ctr" wrap="square" lIns="109728" rIns="109728" tIns="73152" bIns="73152"/>
+          <a:bodyPr rtlCol="0" anchor="ctr"/>
           <a:lstStyle/>
           <a:p>
-            <a:pPr algn="l"/>
+            <a:pPr algn="ctr"/>
+          </a:p>
+        </p:txBody>
+      </p:sp>
+      <p:sp>
+        <p:nvSpPr>
+          <p:cNvPr id="7" name="TextBox 6"/>
+          <p:cNvSpPr txBox="1"/>
+          <p:nvPr/>
+        </p:nvSpPr>
+        <p:spPr>
+          <a:xfrm>
+            <a:off x="704088" y="1965960"/>
+            <a:ext cx="2103120" cy="457200"/>
+          </a:xfrm>
+          <a:prstGeom prst="rect">
+            <a:avLst/>
+          </a:prstGeom>
+          <a:noFill/>
+          <a:effectLst/>
+        </p:spPr>
+        <p:txBody>
+          <a:bodyPr wrap="square" anchor="ctr" lIns="36576" rIns="36576" tIns="27432" bIns="27432">
+            <a:spAutoFit/>
+          </a:bodyPr>
+          <a:lstStyle/>
+          <a:p>
+            <a:pPr algn="l">
+              <a:spcAft>
+                <a:spcPts val="0"/>
+              </a:spcAft>
+            </a:pPr>
             <a:r>
-              <a:rPr sz="1200" b="1">
+              <a:rPr sz="1200" b="0">
                 <a:solidFill>
                   <a:srgbClr val="5A6065"/>
                 </a:solidFill>
+                <a:latin typeface="Verdana"/>
               </a:rPr>
-              <a:t>Everyday</a:t>
+              <a:t>Everyday, whole</a:t>
             </a:r>
           </a:p>
         </p:txBody>
       </p:sp>
       <p:sp>
         <p:nvSpPr>
-          <p:cNvPr id="6" name="Rectangle 5"/>
+          <p:cNvPr id="8" name="TextBox 7"/>
+          <p:cNvSpPr txBox="1"/>
+          <p:nvPr/>
+        </p:nvSpPr>
+        <p:spPr>
+          <a:xfrm>
+            <a:off x="2898648" y="1965960"/>
+            <a:ext cx="7589520" cy="457200"/>
+          </a:xfrm>
+          <a:prstGeom prst="rect">
+            <a:avLst/>
+          </a:prstGeom>
+          <a:noFill/>
+          <a:effectLst/>
+        </p:spPr>
+        <p:txBody>
+          <a:bodyPr wrap="square" anchor="ctr" lIns="36576" rIns="36576" tIns="27432" bIns="27432">
+            <a:spAutoFit/>
+          </a:bodyPr>
+          <a:lstStyle/>
+          <a:p>
+            <a:pPr algn="l">
+              <a:spcAft>
+                <a:spcPts val="100"/>
+              </a:spcAft>
+            </a:pPr>
+            <a:r>
+              <a:rPr sz="1100" b="0">
+                <a:solidFill>
+                  <a:srgbClr val="212427"/>
+                </a:solidFill>
+                <a:latin typeface="Verdana"/>
+              </a:rPr>
+              <a:t>the whole sentence</a:t>
+            </a:r>
+          </a:p>
+        </p:txBody>
+      </p:sp>
+      <p:sp>
+        <p:nvSpPr>
+          <p:cNvPr id="9" name="TextBox 8"/>
+          <p:cNvSpPr txBox="1"/>
+          <p:nvPr/>
+        </p:nvSpPr>
+        <p:spPr>
+          <a:xfrm>
+            <a:off x="10579608" y="1965960"/>
+            <a:ext cx="914400" cy="457200"/>
+          </a:xfrm>
+          <a:prstGeom prst="rect">
+            <a:avLst/>
+          </a:prstGeom>
+          <a:noFill/>
+          <a:effectLst/>
+        </p:spPr>
+        <p:txBody>
+          <a:bodyPr wrap="square" anchor="ctr" lIns="36576" rIns="36576" tIns="27432" bIns="27432">
+            <a:spAutoFit/>
+          </a:bodyPr>
+          <a:lstStyle/>
+          <a:p>
+            <a:pPr algn="r">
+              <a:spcAft>
+                <a:spcPts val="0"/>
+              </a:spcAft>
+            </a:pPr>
+            <a:r>
+              <a:rPr sz="2600" b="0">
+                <a:solidFill>
+                  <a:srgbClr val="5A6065"/>
+                </a:solidFill>
+                <a:latin typeface="Verdana"/>
+              </a:rPr>
+              <a:t>1</a:t>
+            </a:r>
+          </a:p>
+        </p:txBody>
+      </p:sp>
+      <p:sp>
+        <p:nvSpPr>
+          <p:cNvPr id="10" name="Rectangle 9"/>
           <p:cNvSpPr/>
           <p:nvPr/>
         </p:nvSpPr>
         <p:spPr>
           <a:xfrm>
-            <a:off x="2514600" y="2441448"/>
-            <a:ext cx="7680960" cy="832103"/>
+            <a:off x="704088" y="2423160"/>
+            <a:ext cx="10789920" cy="9525"/>
           </a:xfrm>
           <a:prstGeom prst="rect">
             <a:avLst/>
           </a:prstGeom>
-          <a:noFill/>
-          <a:ln w="9525">
-            <a:solidFill>
-              <a:srgbClr val="212427"/>
-            </a:solidFill>
+          <a:solidFill>
+            <a:srgbClr val="D6D7D8"/>
+          </a:solidFill>
+          <a:ln>
+            <a:noFill/>
           </a:ln>
           <a:effectLst/>
         </p:spPr>
@@ -50206,36 +50616,166 @@
           </a:fontRef>
         </p:style>
         <p:txBody>
-          <a:bodyPr rtlCol="0" anchor="ctr" wrap="square" lIns="109728" rIns="109728" tIns="73152" bIns="73152"/>
+          <a:bodyPr rtlCol="0" anchor="ctr"/>
           <a:lstStyle/>
           <a:p>
             <a:pPr algn="ctr"/>
+          </a:p>
+        </p:txBody>
+      </p:sp>
+      <p:sp>
+        <p:nvSpPr>
+          <p:cNvPr id="11" name="TextBox 10"/>
+          <p:cNvSpPr txBox="1"/>
+          <p:nvPr/>
+        </p:nvSpPr>
+        <p:spPr>
+          <a:xfrm>
+            <a:off x="704088" y="2423160"/>
+            <a:ext cx="2103120" cy="731520"/>
+          </a:xfrm>
+          <a:prstGeom prst="rect">
+            <a:avLst/>
+          </a:prstGeom>
+          <a:noFill/>
+          <a:effectLst/>
+        </p:spPr>
+        <p:txBody>
+          <a:bodyPr wrap="square" anchor="ctr" lIns="36576" rIns="36576" tIns="27432" bIns="27432">
+            <a:spAutoFit/>
+          </a:bodyPr>
+          <a:lstStyle/>
+          <a:p>
+            <a:pPr algn="l">
+              <a:spcAft>
+                <a:spcPts val="0"/>
+              </a:spcAft>
+            </a:pPr>
             <a:r>
               <a:rPr sz="1200" b="0">
                 <a:solidFill>
-                  <a:srgbClr val="212427"/>
+                  <a:srgbClr val="5A6065"/>
                 </a:solidFill>
+                <a:latin typeface="Verdana"/>
               </a:rPr>
-              <a:t>Administrative accounts should be protected by MFA, because they have a high potential for damage and are a preferred attack target.</a:t>
+              <a:t>Everyday, granular</a:t>
             </a:r>
           </a:p>
         </p:txBody>
       </p:sp>
       <p:sp>
         <p:nvSpPr>
-          <p:cNvPr id="7" name="Rectangle 6"/>
+          <p:cNvPr id="12" name="TextBox 11"/>
+          <p:cNvSpPr txBox="1"/>
+          <p:nvPr/>
+        </p:nvSpPr>
+        <p:spPr>
+          <a:xfrm>
+            <a:off x="2898648" y="2423160"/>
+            <a:ext cx="7589520" cy="731520"/>
+          </a:xfrm>
+          <a:prstGeom prst="rect">
+            <a:avLst/>
+          </a:prstGeom>
+          <a:noFill/>
+          <a:effectLst/>
+        </p:spPr>
+        <p:txBody>
+          <a:bodyPr wrap="square" anchor="ctr" lIns="36576" rIns="36576" tIns="27432" bIns="27432">
+            <a:spAutoFit/>
+          </a:bodyPr>
+          <a:lstStyle/>
+          <a:p>
+            <a:pPr algn="l">
+              <a:spcAft>
+                <a:spcPts val="100"/>
+              </a:spcAft>
+            </a:pPr>
+            <a:r>
+              <a:rPr sz="1100" b="0">
+                <a:solidFill>
+                  <a:srgbClr val="212427"/>
+                </a:solidFill>
+                <a:latin typeface="Verdana"/>
+              </a:rPr>
+              <a:t>1) The requirements must be documented</a:t>
+            </a:r>
+          </a:p>
+          <a:p>
+            <a:pPr algn="l">
+              <a:spcAft>
+                <a:spcPts val="100"/>
+              </a:spcAft>
+            </a:pPr>
+            <a:r>
+              <a:rPr sz="1100" b="0">
+                <a:solidFill>
+                  <a:srgbClr val="212427"/>
+                </a:solidFill>
+                <a:latin typeface="Verdana"/>
+              </a:rPr>
+              <a:t>2) so that they can be identified and taken into account during planning, operation, and procurement</a:t>
+            </a:r>
+          </a:p>
+        </p:txBody>
+      </p:sp>
+      <p:sp>
+        <p:nvSpPr>
+          <p:cNvPr id="13" name="TextBox 12"/>
+          <p:cNvSpPr txBox="1"/>
+          <p:nvPr/>
+        </p:nvSpPr>
+        <p:spPr>
+          <a:xfrm>
+            <a:off x="10579608" y="2423160"/>
+            <a:ext cx="914400" cy="731520"/>
+          </a:xfrm>
+          <a:prstGeom prst="rect">
+            <a:avLst/>
+          </a:prstGeom>
+          <a:noFill/>
+          <a:effectLst/>
+        </p:spPr>
+        <p:txBody>
+          <a:bodyPr wrap="square" anchor="ctr" lIns="36576" rIns="36576" tIns="27432" bIns="27432">
+            <a:spAutoFit/>
+          </a:bodyPr>
+          <a:lstStyle/>
+          <a:p>
+            <a:pPr algn="r">
+              <a:spcAft>
+                <a:spcPts val="0"/>
+              </a:spcAft>
+            </a:pPr>
+            <a:r>
+              <a:rPr sz="2600" b="0">
+                <a:solidFill>
+                  <a:srgbClr val="5A6065"/>
+                </a:solidFill>
+                <a:latin typeface="Verdana"/>
+              </a:rPr>
+              <a:t>2</a:t>
+            </a:r>
+          </a:p>
+        </p:txBody>
+      </p:sp>
+      <p:sp>
+        <p:nvSpPr>
+          <p:cNvPr id="14" name="Rectangle 13"/>
           <p:cNvSpPr/>
           <p:nvPr/>
         </p:nvSpPr>
         <p:spPr>
           <a:xfrm>
-            <a:off x="10332720" y="2331720"/>
-            <a:ext cx="1188720" cy="1051560"/>
+            <a:off x="704088" y="3154680"/>
+            <a:ext cx="10789920" cy="9525"/>
           </a:xfrm>
           <a:prstGeom prst="rect">
             <a:avLst/>
           </a:prstGeom>
-          <a:noFill/>
+          <a:solidFill>
+            <a:srgbClr val="D6D7D8"/>
+          </a:solidFill>
           <a:ln>
             <a:noFill/>
           </a:ln>
@@ -50256,36 +50796,214 @@
           </a:fontRef>
         </p:style>
         <p:txBody>
-          <a:bodyPr rtlCol="0" anchor="ctr" wrap="square" lIns="109728" rIns="109728" tIns="73152" bIns="73152"/>
+          <a:bodyPr rtlCol="0" anchor="ctr"/>
           <a:lstStyle/>
           <a:p>
-            <a:pPr algn="r"/>
+            <a:pPr algn="ctr"/>
+          </a:p>
+        </p:txBody>
+      </p:sp>
+      <p:sp>
+        <p:nvSpPr>
+          <p:cNvPr id="15" name="TextBox 14"/>
+          <p:cNvSpPr txBox="1"/>
+          <p:nvPr/>
+        </p:nvSpPr>
+        <p:spPr>
+          <a:xfrm>
+            <a:off x="704088" y="3154680"/>
+            <a:ext cx="2103120" cy="1554480"/>
+          </a:xfrm>
+          <a:prstGeom prst="rect">
+            <a:avLst/>
+          </a:prstGeom>
+          <a:noFill/>
+          <a:effectLst/>
+        </p:spPr>
+        <p:txBody>
+          <a:bodyPr wrap="square" anchor="ctr" lIns="36576" rIns="36576" tIns="27432" bIns="27432">
+            <a:spAutoFit/>
+          </a:bodyPr>
+          <a:lstStyle/>
+          <a:p>
+            <a:pPr algn="l">
+              <a:spcAft>
+                <a:spcPts val="0"/>
+              </a:spcAft>
+            </a:pPr>
             <a:r>
-              <a:rPr sz="2400" b="1">
+              <a:rPr sz="1200" b="0">
                 <a:solidFill>
-                  <a:srgbClr val="212427"/>
+                  <a:srgbClr val="5A6065"/>
                 </a:solidFill>
+                <a:latin typeface="Verdana"/>
               </a:rPr>
-              <a:t>1 (or 2)</a:t>
+              <a:t>Logic</a:t>
             </a:r>
           </a:p>
         </p:txBody>
       </p:sp>
       <p:sp>
         <p:nvSpPr>
-          <p:cNvPr id="8" name="Rectangle 7"/>
+          <p:cNvPr id="16" name="TextBox 15"/>
+          <p:cNvSpPr txBox="1"/>
+          <p:nvPr/>
+        </p:nvSpPr>
+        <p:spPr>
+          <a:xfrm>
+            <a:off x="2898648" y="3154680"/>
+            <a:ext cx="7589520" cy="1554480"/>
+          </a:xfrm>
+          <a:prstGeom prst="rect">
+            <a:avLst/>
+          </a:prstGeom>
+          <a:noFill/>
+          <a:effectLst/>
+        </p:spPr>
+        <p:txBody>
+          <a:bodyPr wrap="square" anchor="ctr" lIns="36576" rIns="36576" tIns="27432" bIns="27432">
+            <a:spAutoFit/>
+          </a:bodyPr>
+          <a:lstStyle/>
+          <a:p>
+            <a:pPr algn="l">
+              <a:spcAft>
+                <a:spcPts val="100"/>
+              </a:spcAft>
+            </a:pPr>
+            <a:r>
+              <a:rPr sz="1000" b="0">
+                <a:solidFill>
+                  <a:srgbClr val="212427"/>
+                </a:solidFill>
+                <a:latin typeface="Verdana"/>
+              </a:rPr>
+              <a:t>1) The requirements must be documented.</a:t>
+            </a:r>
+          </a:p>
+          <a:p>
+            <a:pPr algn="l">
+              <a:spcAft>
+                <a:spcPts val="100"/>
+              </a:spcAft>
+            </a:pPr>
+            <a:r>
+              <a:rPr sz="1000" b="0">
+                <a:solidFill>
+                  <a:srgbClr val="212427"/>
+                </a:solidFill>
+                <a:latin typeface="Verdana"/>
+              </a:rPr>
+              <a:t>2) Documented requirements can be identified.</a:t>
+            </a:r>
+          </a:p>
+          <a:p>
+            <a:pPr algn="l">
+              <a:spcAft>
+                <a:spcPts val="100"/>
+              </a:spcAft>
+            </a:pPr>
+            <a:r>
+              <a:rPr sz="1000" b="0">
+                <a:solidFill>
+                  <a:srgbClr val="212427"/>
+                </a:solidFill>
+                <a:latin typeface="Verdana"/>
+              </a:rPr>
+              <a:t>3) Documented requirements can be taken into account during planning.</a:t>
+            </a:r>
+          </a:p>
+          <a:p>
+            <a:pPr algn="l">
+              <a:spcAft>
+                <a:spcPts val="100"/>
+              </a:spcAft>
+            </a:pPr>
+            <a:r>
+              <a:rPr sz="1000" b="0">
+                <a:solidFill>
+                  <a:srgbClr val="212427"/>
+                </a:solidFill>
+                <a:latin typeface="Verdana"/>
+              </a:rPr>
+              <a:t>4) ... during operation.</a:t>
+            </a:r>
+          </a:p>
+          <a:p>
+            <a:pPr algn="l">
+              <a:spcAft>
+                <a:spcPts val="100"/>
+              </a:spcAft>
+            </a:pPr>
+            <a:r>
+              <a:rPr sz="1000" b="0">
+                <a:solidFill>
+                  <a:srgbClr val="212427"/>
+                </a:solidFill>
+                <a:latin typeface="Verdana"/>
+              </a:rPr>
+              <a:t>5) ... during procurement.</a:t>
+            </a:r>
+          </a:p>
+        </p:txBody>
+      </p:sp>
+      <p:sp>
+        <p:nvSpPr>
+          <p:cNvPr id="17" name="TextBox 16"/>
+          <p:cNvSpPr txBox="1"/>
+          <p:nvPr/>
+        </p:nvSpPr>
+        <p:spPr>
+          <a:xfrm>
+            <a:off x="10579608" y="3154680"/>
+            <a:ext cx="914400" cy="1554480"/>
+          </a:xfrm>
+          <a:prstGeom prst="rect">
+            <a:avLst/>
+          </a:prstGeom>
+          <a:noFill/>
+          <a:effectLst/>
+        </p:spPr>
+        <p:txBody>
+          <a:bodyPr wrap="square" anchor="ctr" lIns="36576" rIns="36576" tIns="27432" bIns="27432">
+            <a:spAutoFit/>
+          </a:bodyPr>
+          <a:lstStyle/>
+          <a:p>
+            <a:pPr algn="r">
+              <a:spcAft>
+                <a:spcPts val="0"/>
+              </a:spcAft>
+            </a:pPr>
+            <a:r>
+              <a:rPr sz="2600" b="0">
+                <a:solidFill>
+                  <a:srgbClr val="5A6065"/>
+                </a:solidFill>
+                <a:latin typeface="Verdana"/>
+              </a:rPr>
+              <a:t>5</a:t>
+            </a:r>
+          </a:p>
+        </p:txBody>
+      </p:sp>
+      <p:sp>
+        <p:nvSpPr>
+          <p:cNvPr id="18" name="Rectangle 17"/>
           <p:cNvSpPr/>
           <p:nvPr/>
         </p:nvSpPr>
         <p:spPr>
           <a:xfrm>
-            <a:off x="704088" y="3493008"/>
-            <a:ext cx="1828800" cy="1051560"/>
+            <a:off x="704088" y="4709160"/>
+            <a:ext cx="10789920" cy="9525"/>
           </a:xfrm>
           <a:prstGeom prst="rect">
             <a:avLst/>
           </a:prstGeom>
-          <a:noFill/>
+          <a:solidFill>
+            <a:srgbClr val="D6D7D8"/>
+          </a:solidFill>
           <a:ln>
             <a:noFill/>
           </a:ln>
@@ -50306,40 +51024,216 @@
           </a:fontRef>
         </p:style>
         <p:txBody>
-          <a:bodyPr rtlCol="0" anchor="ctr" wrap="square" lIns="109728" rIns="109728" tIns="73152" bIns="73152"/>
+          <a:bodyPr rtlCol="0" anchor="ctr"/>
           <a:lstStyle/>
           <a:p>
-            <a:pPr algn="l"/>
+            <a:pPr algn="ctr"/>
+          </a:p>
+        </p:txBody>
+      </p:sp>
+      <p:sp>
+        <p:nvSpPr>
+          <p:cNvPr id="19" name="TextBox 18"/>
+          <p:cNvSpPr txBox="1"/>
+          <p:nvPr/>
+        </p:nvSpPr>
+        <p:spPr>
+          <a:xfrm>
+            <a:off x="704088" y="4709160"/>
+            <a:ext cx="2103120" cy="960120"/>
+          </a:xfrm>
+          <a:prstGeom prst="rect">
+            <a:avLst/>
+          </a:prstGeom>
+          <a:noFill/>
+          <a:effectLst/>
+        </p:spPr>
+        <p:txBody>
+          <a:bodyPr wrap="square" anchor="ctr" lIns="36576" rIns="36576" tIns="27432" bIns="27432">
+            <a:spAutoFit/>
+          </a:bodyPr>
+          <a:lstStyle/>
+          <a:p>
+            <a:pPr algn="l">
+              <a:spcAft>
+                <a:spcPts val="0"/>
+              </a:spcAft>
+            </a:pPr>
             <a:r>
-              <a:rPr sz="1200" b="1">
+              <a:rPr sz="1200" b="0">
                 <a:solidFill>
                   <a:srgbClr val="5A6065"/>
                 </a:solidFill>
+                <a:latin typeface="Verdana"/>
               </a:rPr>
-              <a:t>Logic</a:t>
+              <a:t>Working definition</a:t>
             </a:r>
           </a:p>
         </p:txBody>
       </p:sp>
       <p:sp>
         <p:nvSpPr>
-          <p:cNvPr id="9" name="Rectangle 8"/>
+          <p:cNvPr id="20" name="TextBox 19"/>
+          <p:cNvSpPr txBox="1"/>
+          <p:nvPr/>
+        </p:nvSpPr>
+        <p:spPr>
+          <a:xfrm>
+            <a:off x="2898648" y="4709160"/>
+            <a:ext cx="7589520" cy="960120"/>
+          </a:xfrm>
+          <a:prstGeom prst="rect">
+            <a:avLst/>
+          </a:prstGeom>
+          <a:noFill/>
+          <a:effectLst/>
+        </p:spPr>
+        <p:txBody>
+          <a:bodyPr wrap="square" anchor="ctr" lIns="36576" rIns="36576" tIns="27432" bIns="27432">
+            <a:spAutoFit/>
+          </a:bodyPr>
+          <a:lstStyle/>
+          <a:p>
+            <a:pPr algn="l">
+              <a:spcAft>
+                <a:spcPts val="100"/>
+              </a:spcAft>
+            </a:pPr>
+            <a:r>
+              <a:rPr sz="1000" b="0">
+                <a:solidFill>
+                  <a:srgbClr val="212427"/>
+                </a:solidFill>
+                <a:latin typeface="Verdana"/>
+              </a:rPr>
+              <a:t>1) Requirements must be documented.</a:t>
+            </a:r>
+          </a:p>
+          <a:p>
+            <a:pPr algn="l">
+              <a:spcAft>
+                <a:spcPts val="100"/>
+              </a:spcAft>
+            </a:pPr>
+            <a:r>
+              <a:rPr sz="1000" b="0">
+                <a:solidFill>
+                  <a:srgbClr val="212427"/>
+                </a:solidFill>
+                <a:latin typeface="Verdana"/>
+              </a:rPr>
+              <a:t>2) Purpose: identify requirements.</a:t>
+            </a:r>
+          </a:p>
+          <a:p>
+            <a:pPr algn="l">
+              <a:spcAft>
+                <a:spcPts val="100"/>
+              </a:spcAft>
+            </a:pPr>
+            <a:r>
+              <a:rPr sz="1000" b="0">
+                <a:solidFill>
+                  <a:srgbClr val="212427"/>
+                </a:solidFill>
+                <a:latin typeface="Verdana"/>
+              </a:rPr>
+              <a:t>3) Purpose: take into account during planning.</a:t>
+            </a:r>
+          </a:p>
+          <a:p>
+            <a:pPr algn="l">
+              <a:spcAft>
+                <a:spcPts val="100"/>
+              </a:spcAft>
+            </a:pPr>
+            <a:r>
+              <a:rPr sz="1000" b="0">
+                <a:solidFill>
+                  <a:srgbClr val="212427"/>
+                </a:solidFill>
+                <a:latin typeface="Verdana"/>
+              </a:rPr>
+              <a:t>4) Purpose: during operation.</a:t>
+            </a:r>
+          </a:p>
+          <a:p>
+            <a:pPr algn="l">
+              <a:spcAft>
+                <a:spcPts val="100"/>
+              </a:spcAft>
+            </a:pPr>
+            <a:r>
+              <a:rPr sz="1000" b="0">
+                <a:solidFill>
+                  <a:srgbClr val="212427"/>
+                </a:solidFill>
+                <a:latin typeface="Verdana"/>
+              </a:rPr>
+              <a:t>5) Purpose: during procurement.</a:t>
+            </a:r>
+          </a:p>
+        </p:txBody>
+      </p:sp>
+      <p:sp>
+        <p:nvSpPr>
+          <p:cNvPr id="21" name="TextBox 20"/>
+          <p:cNvSpPr txBox="1"/>
+          <p:nvPr/>
+        </p:nvSpPr>
+        <p:spPr>
+          <a:xfrm>
+            <a:off x="10579608" y="4709160"/>
+            <a:ext cx="914400" cy="960120"/>
+          </a:xfrm>
+          <a:prstGeom prst="rect">
+            <a:avLst/>
+          </a:prstGeom>
+          <a:noFill/>
+          <a:effectLst/>
+        </p:spPr>
+        <p:txBody>
+          <a:bodyPr wrap="square" anchor="ctr" lIns="36576" rIns="36576" tIns="27432" bIns="27432">
+            <a:spAutoFit/>
+          </a:bodyPr>
+          <a:lstStyle/>
+          <a:p>
+            <a:pPr algn="r">
+              <a:spcAft>
+                <a:spcPts val="0"/>
+              </a:spcAft>
+            </a:pPr>
+            <a:r>
+              <a:rPr sz="2600" b="0">
+                <a:solidFill>
+                  <a:srgbClr val="5A6065"/>
+                </a:solidFill>
+                <a:latin typeface="Verdana"/>
+              </a:rPr>
+              <a:t>5</a:t>
+            </a:r>
+          </a:p>
+        </p:txBody>
+      </p:sp>
+      <p:sp>
+        <p:nvSpPr>
+          <p:cNvPr id="22" name="Rectangle 21"/>
           <p:cNvSpPr/>
           <p:nvPr/>
         </p:nvSpPr>
         <p:spPr>
           <a:xfrm>
-            <a:off x="2514600" y="3602736"/>
-            <a:ext cx="1851660" cy="832103"/>
+            <a:off x="704088" y="5669280"/>
+            <a:ext cx="10789920" cy="9525"/>
           </a:xfrm>
           <a:prstGeom prst="rect">
             <a:avLst/>
           </a:prstGeom>
-          <a:noFill/>
-          <a:ln w="9525">
-            <a:solidFill>
-              <a:srgbClr val="212427"/>
-            </a:solidFill>
+          <a:solidFill>
+            <a:srgbClr val="D6D7D8"/>
+          </a:solidFill>
+          <a:ln>
+            <a:noFill/>
           </a:ln>
           <a:effectLst/>
         </p:spPr>
@@ -50358,480 +51252,10 @@
           </a:fontRef>
         </p:style>
         <p:txBody>
-          <a:bodyPr rtlCol="0" anchor="ctr" wrap="square" lIns="109728" rIns="109728" tIns="73152" bIns="73152"/>
+          <a:bodyPr rtlCol="0" anchor="ctr"/>
           <a:lstStyle/>
           <a:p>
             <a:pPr algn="ctr"/>
-            <a:r>
-              <a:rPr sz="1100" b="0">
-                <a:solidFill>
-                  <a:srgbClr val="212427"/>
-                </a:solidFill>
-              </a:rPr>
-              <a:t>admin accounts should be protected by MFA</a:t>
-            </a:r>
-          </a:p>
-        </p:txBody>
-      </p:sp>
-      <p:sp>
-        <p:nvSpPr>
-          <p:cNvPr id="10" name="Rectangle 9"/>
-          <p:cNvSpPr/>
-          <p:nvPr/>
-        </p:nvSpPr>
-        <p:spPr>
-          <a:xfrm>
-            <a:off x="4457700" y="3602736"/>
-            <a:ext cx="1851660" cy="832103"/>
-          </a:xfrm>
-          <a:prstGeom prst="rect">
-            <a:avLst/>
-          </a:prstGeom>
-          <a:noFill/>
-          <a:ln w="9525">
-            <a:solidFill>
-              <a:srgbClr val="212427"/>
-            </a:solidFill>
-          </a:ln>
-          <a:effectLst/>
-        </p:spPr>
-        <p:style>
-          <a:lnRef idx="1">
-            <a:schemeClr val="accent1"/>
-          </a:lnRef>
-          <a:fillRef idx="3">
-            <a:schemeClr val="accent1"/>
-          </a:fillRef>
-          <a:effectRef idx="2">
-            <a:schemeClr val="accent1"/>
-          </a:effectRef>
-          <a:fontRef idx="minor">
-            <a:schemeClr val="lt1"/>
-          </a:fontRef>
-        </p:style>
-        <p:txBody>
-          <a:bodyPr rtlCol="0" anchor="ctr" wrap="square" lIns="109728" rIns="109728" tIns="73152" bIns="73152"/>
-          <a:lstStyle/>
-          <a:p>
-            <a:pPr algn="ctr"/>
-            <a:r>
-              <a:rPr sz="1100" b="0">
-                <a:solidFill>
-                  <a:srgbClr val="212427"/>
-                </a:solidFill>
-              </a:rPr>
-              <a:t>they have a high potential for damage</a:t>
-            </a:r>
-          </a:p>
-        </p:txBody>
-      </p:sp>
-      <p:sp>
-        <p:nvSpPr>
-          <p:cNvPr id="11" name="Rectangle 10"/>
-          <p:cNvSpPr/>
-          <p:nvPr/>
-        </p:nvSpPr>
-        <p:spPr>
-          <a:xfrm>
-            <a:off x="6400800" y="3602736"/>
-            <a:ext cx="1851660" cy="832103"/>
-          </a:xfrm>
-          <a:prstGeom prst="rect">
-            <a:avLst/>
-          </a:prstGeom>
-          <a:noFill/>
-          <a:ln w="9525">
-            <a:solidFill>
-              <a:srgbClr val="212427"/>
-            </a:solidFill>
-          </a:ln>
-          <a:effectLst/>
-        </p:spPr>
-        <p:style>
-          <a:lnRef idx="1">
-            <a:schemeClr val="accent1"/>
-          </a:lnRef>
-          <a:fillRef idx="3">
-            <a:schemeClr val="accent1"/>
-          </a:fillRef>
-          <a:effectRef idx="2">
-            <a:schemeClr val="accent1"/>
-          </a:effectRef>
-          <a:fontRef idx="minor">
-            <a:schemeClr val="lt1"/>
-          </a:fontRef>
-        </p:style>
-        <p:txBody>
-          <a:bodyPr rtlCol="0" anchor="ctr" wrap="square" lIns="109728" rIns="109728" tIns="73152" bIns="73152"/>
-          <a:lstStyle/>
-          <a:p>
-            <a:pPr algn="ctr"/>
-            <a:r>
-              <a:rPr sz="1100" b="0">
-                <a:solidFill>
-                  <a:srgbClr val="212427"/>
-                </a:solidFill>
-              </a:rPr>
-              <a:t>they are a preferred attack target</a:t>
-            </a:r>
-          </a:p>
-        </p:txBody>
-      </p:sp>
-      <p:sp>
-        <p:nvSpPr>
-          <p:cNvPr id="12" name="Rectangle 11"/>
-          <p:cNvSpPr/>
-          <p:nvPr/>
-        </p:nvSpPr>
-        <p:spPr>
-          <a:xfrm>
-            <a:off x="8343900" y="3602736"/>
-            <a:ext cx="1851660" cy="832103"/>
-          </a:xfrm>
-          <a:prstGeom prst="rect">
-            <a:avLst/>
-          </a:prstGeom>
-          <a:noFill/>
-          <a:ln w="9525">
-            <a:solidFill>
-              <a:srgbClr val="212427"/>
-            </a:solidFill>
-          </a:ln>
-          <a:effectLst/>
-        </p:spPr>
-        <p:style>
-          <a:lnRef idx="1">
-            <a:schemeClr val="accent1"/>
-          </a:lnRef>
-          <a:fillRef idx="3">
-            <a:schemeClr val="accent1"/>
-          </a:fillRef>
-          <a:effectRef idx="2">
-            <a:schemeClr val="accent1"/>
-          </a:effectRef>
-          <a:fontRef idx="minor">
-            <a:schemeClr val="lt1"/>
-          </a:fontRef>
-        </p:style>
-        <p:txBody>
-          <a:bodyPr rtlCol="0" anchor="ctr" wrap="square" lIns="109728" rIns="109728" tIns="73152" bIns="73152"/>
-          <a:lstStyle/>
-          <a:p>
-            <a:pPr algn="ctr"/>
-            <a:r>
-              <a:rPr sz="1100" b="0">
-                <a:solidFill>
-                  <a:srgbClr val="212427"/>
-                </a:solidFill>
-              </a:rPr>
-              <a:t>because: that is the reason</a:t>
-            </a:r>
-          </a:p>
-        </p:txBody>
-      </p:sp>
-      <p:sp>
-        <p:nvSpPr>
-          <p:cNvPr id="13" name="Rectangle 12"/>
-          <p:cNvSpPr/>
-          <p:nvPr/>
-        </p:nvSpPr>
-        <p:spPr>
-          <a:xfrm>
-            <a:off x="10332720" y="3493008"/>
-            <a:ext cx="1188720" cy="1051560"/>
-          </a:xfrm>
-          <a:prstGeom prst="rect">
-            <a:avLst/>
-          </a:prstGeom>
-          <a:noFill/>
-          <a:ln>
-            <a:noFill/>
-          </a:ln>
-          <a:effectLst/>
-        </p:spPr>
-        <p:style>
-          <a:lnRef idx="1">
-            <a:schemeClr val="accent1"/>
-          </a:lnRef>
-          <a:fillRef idx="3">
-            <a:schemeClr val="accent1"/>
-          </a:fillRef>
-          <a:effectRef idx="2">
-            <a:schemeClr val="accent1"/>
-          </a:effectRef>
-          <a:fontRef idx="minor">
-            <a:schemeClr val="lt1"/>
-          </a:fontRef>
-        </p:style>
-        <p:txBody>
-          <a:bodyPr rtlCol="0" anchor="ctr" wrap="square" lIns="109728" rIns="109728" tIns="73152" bIns="73152"/>
-          <a:lstStyle/>
-          <a:p>
-            <a:pPr algn="r"/>
-            <a:r>
-              <a:rPr sz="2400" b="1">
-                <a:solidFill>
-                  <a:srgbClr val="212427"/>
-                </a:solidFill>
-              </a:rPr>
-              <a:t>3 to 4</a:t>
-            </a:r>
-          </a:p>
-        </p:txBody>
-      </p:sp>
-      <p:sp>
-        <p:nvSpPr>
-          <p:cNvPr id="14" name="Rectangle 13"/>
-          <p:cNvSpPr/>
-          <p:nvPr/>
-        </p:nvSpPr>
-        <p:spPr>
-          <a:xfrm>
-            <a:off x="704088" y="4654296"/>
-            <a:ext cx="1828800" cy="1051560"/>
-          </a:xfrm>
-          <a:prstGeom prst="rect">
-            <a:avLst/>
-          </a:prstGeom>
-          <a:noFill/>
-          <a:ln>
-            <a:noFill/>
-          </a:ln>
-          <a:effectLst/>
-        </p:spPr>
-        <p:style>
-          <a:lnRef idx="1">
-            <a:schemeClr val="accent1"/>
-          </a:lnRef>
-          <a:fillRef idx="3">
-            <a:schemeClr val="accent1"/>
-          </a:fillRef>
-          <a:effectRef idx="2">
-            <a:schemeClr val="accent1"/>
-          </a:effectRef>
-          <a:fontRef idx="minor">
-            <a:schemeClr val="lt1"/>
-          </a:fontRef>
-        </p:style>
-        <p:txBody>
-          <a:bodyPr rtlCol="0" anchor="ctr" wrap="square" lIns="109728" rIns="109728" tIns="73152" bIns="73152"/>
-          <a:lstStyle/>
-          <a:p>
-            <a:pPr algn="l"/>
-            <a:r>
-              <a:rPr sz="1200" b="1">
-                <a:solidFill>
-                  <a:srgbClr val="5A6065"/>
-                </a:solidFill>
-              </a:rPr>
-              <a:t>Working definition</a:t>
-            </a:r>
-          </a:p>
-        </p:txBody>
-      </p:sp>
-      <p:sp>
-        <p:nvSpPr>
-          <p:cNvPr id="15" name="Rectangle 14"/>
-          <p:cNvSpPr/>
-          <p:nvPr/>
-        </p:nvSpPr>
-        <p:spPr>
-          <a:xfrm>
-            <a:off x="2514600" y="4764024"/>
-            <a:ext cx="2499360" cy="832103"/>
-          </a:xfrm>
-          <a:prstGeom prst="rect">
-            <a:avLst/>
-          </a:prstGeom>
-          <a:noFill/>
-          <a:ln w="9525">
-            <a:solidFill>
-              <a:srgbClr val="212427"/>
-            </a:solidFill>
-          </a:ln>
-          <a:effectLst/>
-        </p:spPr>
-        <p:style>
-          <a:lnRef idx="1">
-            <a:schemeClr val="accent1"/>
-          </a:lnRef>
-          <a:fillRef idx="3">
-            <a:schemeClr val="accent1"/>
-          </a:fillRef>
-          <a:effectRef idx="2">
-            <a:schemeClr val="accent1"/>
-          </a:effectRef>
-          <a:fontRef idx="minor">
-            <a:schemeClr val="lt1"/>
-          </a:fontRef>
-        </p:style>
-        <p:txBody>
-          <a:bodyPr rtlCol="0" anchor="ctr" wrap="square" lIns="109728" rIns="109728" tIns="73152" bIns="73152"/>
-          <a:lstStyle/>
-          <a:p>
-            <a:pPr algn="ctr"/>
-            <a:r>
-              <a:rPr sz="1200" b="0">
-                <a:solidFill>
-                  <a:srgbClr val="212427"/>
-                </a:solidFill>
-              </a:rPr>
-              <a:t>admin accounts should be protected by MFA</a:t>
-            </a:r>
-          </a:p>
-        </p:txBody>
-      </p:sp>
-      <p:sp>
-        <p:nvSpPr>
-          <p:cNvPr id="16" name="Rectangle 15"/>
-          <p:cNvSpPr/>
-          <p:nvPr/>
-        </p:nvSpPr>
-        <p:spPr>
-          <a:xfrm>
-            <a:off x="5105400" y="4764024"/>
-            <a:ext cx="2499360" cy="832103"/>
-          </a:xfrm>
-          <a:prstGeom prst="rect">
-            <a:avLst/>
-          </a:prstGeom>
-          <a:noFill/>
-          <a:ln w="9525">
-            <a:solidFill>
-              <a:srgbClr val="212427"/>
-            </a:solidFill>
-          </a:ln>
-          <a:effectLst/>
-        </p:spPr>
-        <p:style>
-          <a:lnRef idx="1">
-            <a:schemeClr val="accent1"/>
-          </a:lnRef>
-          <a:fillRef idx="3">
-            <a:schemeClr val="accent1"/>
-          </a:fillRef>
-          <a:effectRef idx="2">
-            <a:schemeClr val="accent1"/>
-          </a:effectRef>
-          <a:fontRef idx="minor">
-            <a:schemeClr val="lt1"/>
-          </a:fontRef>
-        </p:style>
-        <p:txBody>
-          <a:bodyPr rtlCol="0" anchor="ctr" wrap="square" lIns="109728" rIns="109728" tIns="73152" bIns="73152"/>
-          <a:lstStyle/>
-          <a:p>
-            <a:pPr algn="ctr"/>
-            <a:r>
-              <a:rPr sz="1200" b="0">
-                <a:solidFill>
-                  <a:srgbClr val="212427"/>
-                </a:solidFill>
-              </a:rPr>
-              <a:t>reason: high potential for damage</a:t>
-            </a:r>
-          </a:p>
-        </p:txBody>
-      </p:sp>
-      <p:sp>
-        <p:nvSpPr>
-          <p:cNvPr id="17" name="Rectangle 16"/>
-          <p:cNvSpPr/>
-          <p:nvPr/>
-        </p:nvSpPr>
-        <p:spPr>
-          <a:xfrm>
-            <a:off x="7696200" y="4764024"/>
-            <a:ext cx="2499360" cy="832103"/>
-          </a:xfrm>
-          <a:prstGeom prst="rect">
-            <a:avLst/>
-          </a:prstGeom>
-          <a:noFill/>
-          <a:ln w="9525">
-            <a:solidFill>
-              <a:srgbClr val="212427"/>
-            </a:solidFill>
-          </a:ln>
-          <a:effectLst/>
-        </p:spPr>
-        <p:style>
-          <a:lnRef idx="1">
-            <a:schemeClr val="accent1"/>
-          </a:lnRef>
-          <a:fillRef idx="3">
-            <a:schemeClr val="accent1"/>
-          </a:fillRef>
-          <a:effectRef idx="2">
-            <a:schemeClr val="accent1"/>
-          </a:effectRef>
-          <a:fontRef idx="minor">
-            <a:schemeClr val="lt1"/>
-          </a:fontRef>
-        </p:style>
-        <p:txBody>
-          <a:bodyPr rtlCol="0" anchor="ctr" wrap="square" lIns="109728" rIns="109728" tIns="73152" bIns="73152"/>
-          <a:lstStyle/>
-          <a:p>
-            <a:pPr algn="ctr"/>
-            <a:r>
-              <a:rPr sz="1200" b="0">
-                <a:solidFill>
-                  <a:srgbClr val="212427"/>
-                </a:solidFill>
-              </a:rPr>
-              <a:t>reason: preferred attack target</a:t>
-            </a:r>
-          </a:p>
-        </p:txBody>
-      </p:sp>
-      <p:sp>
-        <p:nvSpPr>
-          <p:cNvPr id="18" name="Rectangle 17"/>
-          <p:cNvSpPr/>
-          <p:nvPr/>
-        </p:nvSpPr>
-        <p:spPr>
-          <a:xfrm>
-            <a:off x="10332720" y="4654296"/>
-            <a:ext cx="1188720" cy="1051560"/>
-          </a:xfrm>
-          <a:prstGeom prst="rect">
-            <a:avLst/>
-          </a:prstGeom>
-          <a:noFill/>
-          <a:ln>
-            <a:noFill/>
-          </a:ln>
-          <a:effectLst/>
-        </p:spPr>
-        <p:style>
-          <a:lnRef idx="1">
-            <a:schemeClr val="accent1"/>
-          </a:lnRef>
-          <a:fillRef idx="3">
-            <a:schemeClr val="accent1"/>
-          </a:fillRef>
-          <a:effectRef idx="2">
-            <a:schemeClr val="accent1"/>
-          </a:effectRef>
-          <a:fontRef idx="minor">
-            <a:schemeClr val="lt1"/>
-          </a:fontRef>
-        </p:style>
-        <p:txBody>
-          <a:bodyPr rtlCol="0" anchor="ctr" wrap="square" lIns="109728" rIns="109728" tIns="73152" bIns="73152"/>
-          <a:lstStyle/>
-          <a:p>
-            <a:pPr algn="r"/>
-            <a:r>
-              <a:rPr sz="2400" b="1">
-                <a:solidFill>
-                  <a:srgbClr val="212427"/>
-                </a:solidFill>
-              </a:rPr>
-              <a:t>3</a:t>
-            </a:r>
           </a:p>
         </p:txBody>
       </p:sp>
@@ -50863,13 +51287,21 @@
             <p:ph type="title"/>
           </p:nvPr>
         </p:nvSpPr>
-        <p:spPr/>
+        <p:spPr>
+          <a:effectLst/>
+        </p:spPr>
         <p:txBody>
           <a:bodyPr/>
           <a:lstStyle/>
           <a:p>
             <a:r>
-              <a:t>Example 2: how many claims?</a:t>
+              <a:rPr b="0" sz="2800" cap="none">
+                <a:solidFill>
+                  <a:srgbClr val="212427"/>
+                </a:solidFill>
+                <a:latin typeface="Verdana"/>
+              </a:rPr>
+              <a:t>Example B: how many claims?</a:t>
             </a:r>
           </a:p>
         </p:txBody>
@@ -50882,17 +51314,17 @@
         </p:nvSpPr>
         <p:spPr>
           <a:xfrm>
-            <a:off x="704088" y="1143000"/>
-            <a:ext cx="10789920" cy="960120"/>
+            <a:off x="704088" y="1115568"/>
+            <a:ext cx="609600" cy="38100"/>
           </a:xfrm>
           <a:prstGeom prst="rect">
             <a:avLst/>
           </a:prstGeom>
-          <a:noFill/>
-          <a:ln w="9525">
-            <a:solidFill>
-              <a:srgbClr val="D6D7D8"/>
-            </a:solidFill>
+          <a:solidFill>
+            <a:srgbClr val="B1063A"/>
+          </a:solidFill>
+          <a:ln>
+            <a:noFill/>
           </a:ln>
           <a:effectLst/>
         </p:spPr>
@@ -50911,36 +51343,70 @@
           </a:fontRef>
         </p:style>
         <p:txBody>
-          <a:bodyPr rtlCol="0" anchor="ctr" wrap="square" lIns="109728" rIns="109728" tIns="73152" bIns="73152"/>
+          <a:bodyPr rtlCol="0" anchor="ctr"/>
           <a:lstStyle/>
           <a:p>
-            <a:pPr algn="l"/>
+            <a:pPr algn="ctr"/>
+          </a:p>
+        </p:txBody>
+      </p:sp>
+      <p:sp>
+        <p:nvSpPr>
+          <p:cNvPr id="5" name="TextBox 4"/>
+          <p:cNvSpPr txBox="1"/>
+          <p:nvPr/>
+        </p:nvSpPr>
+        <p:spPr>
+          <a:xfrm>
+            <a:off x="704088" y="1188720"/>
+            <a:ext cx="10789920" cy="685800"/>
+          </a:xfrm>
+          <a:prstGeom prst="rect">
+            <a:avLst/>
+          </a:prstGeom>
+          <a:noFill/>
+          <a:effectLst/>
+        </p:spPr>
+        <p:txBody>
+          <a:bodyPr wrap="square" anchor="ctr" lIns="36576" rIns="36576" tIns="27432" bIns="27432">
+            <a:spAutoFit/>
+          </a:bodyPr>
+          <a:lstStyle/>
+          <a:p>
+            <a:pPr algn="l">
+              <a:spcAft>
+                <a:spcPts val="0"/>
+              </a:spcAft>
+            </a:pPr>
             <a:r>
-              <a:rPr sz="1400" b="0">
+              <a:rPr sz="1500" b="0">
                 <a:solidFill>
                   <a:srgbClr val="212427"/>
                 </a:solidFill>
+                <a:latin typeface="Verdana"/>
               </a:rPr>
-              <a:t>Create a cloud usage strategy (A1), a security policy (A2), service definitions (A3), and define responsibility areas as well as interfaces (A4). These four basic requirements must be met as a priority.</a:t>
+              <a:t>Without binding password rules, there is a risk of weak or reused passwords that can be easily compromised.</a:t>
             </a:r>
           </a:p>
         </p:txBody>
       </p:sp>
       <p:sp>
         <p:nvSpPr>
-          <p:cNvPr id="5" name="Rectangle 4"/>
+          <p:cNvPr id="6" name="Rectangle 5"/>
           <p:cNvSpPr/>
           <p:nvPr/>
         </p:nvSpPr>
         <p:spPr>
           <a:xfrm>
-            <a:off x="704088" y="2331720"/>
-            <a:ext cx="1828800" cy="1051560"/>
+            <a:off x="704088" y="1920240"/>
+            <a:ext cx="10789920" cy="9525"/>
           </a:xfrm>
           <a:prstGeom prst="rect">
             <a:avLst/>
           </a:prstGeom>
-          <a:noFill/>
+          <a:solidFill>
+            <a:srgbClr val="D6D7D8"/>
+          </a:solidFill>
           <a:ln>
             <a:noFill/>
           </a:ln>
@@ -50961,40 +51427,152 @@
           </a:fontRef>
         </p:style>
         <p:txBody>
-          <a:bodyPr rtlCol="0" anchor="ctr" wrap="square" lIns="109728" rIns="109728" tIns="73152" bIns="73152"/>
+          <a:bodyPr rtlCol="0" anchor="ctr"/>
           <a:lstStyle/>
           <a:p>
-            <a:pPr algn="l"/>
+            <a:pPr algn="ctr"/>
+          </a:p>
+        </p:txBody>
+      </p:sp>
+      <p:sp>
+        <p:nvSpPr>
+          <p:cNvPr id="7" name="TextBox 6"/>
+          <p:cNvSpPr txBox="1"/>
+          <p:nvPr/>
+        </p:nvSpPr>
+        <p:spPr>
+          <a:xfrm>
+            <a:off x="704088" y="1965960"/>
+            <a:ext cx="2103120" cy="457200"/>
+          </a:xfrm>
+          <a:prstGeom prst="rect">
+            <a:avLst/>
+          </a:prstGeom>
+          <a:noFill/>
+          <a:effectLst/>
+        </p:spPr>
+        <p:txBody>
+          <a:bodyPr wrap="square" anchor="ctr" lIns="36576" rIns="36576" tIns="27432" bIns="27432">
+            <a:spAutoFit/>
+          </a:bodyPr>
+          <a:lstStyle/>
+          <a:p>
+            <a:pPr algn="l">
+              <a:spcAft>
+                <a:spcPts val="0"/>
+              </a:spcAft>
+            </a:pPr>
             <a:r>
-              <a:rPr sz="1200" b="1">
+              <a:rPr sz="1200" b="0">
                 <a:solidFill>
                   <a:srgbClr val="5A6065"/>
                 </a:solidFill>
+                <a:latin typeface="Verdana"/>
               </a:rPr>
-              <a:t>Everyday</a:t>
+              <a:t>Everyday, whole</a:t>
             </a:r>
           </a:p>
         </p:txBody>
       </p:sp>
       <p:sp>
         <p:nvSpPr>
-          <p:cNvPr id="6" name="Rectangle 5"/>
+          <p:cNvPr id="8" name="TextBox 7"/>
+          <p:cNvSpPr txBox="1"/>
+          <p:nvPr/>
+        </p:nvSpPr>
+        <p:spPr>
+          <a:xfrm>
+            <a:off x="2898648" y="1965960"/>
+            <a:ext cx="7589520" cy="457200"/>
+          </a:xfrm>
+          <a:prstGeom prst="rect">
+            <a:avLst/>
+          </a:prstGeom>
+          <a:noFill/>
+          <a:effectLst/>
+        </p:spPr>
+        <p:txBody>
+          <a:bodyPr wrap="square" anchor="ctr" lIns="36576" rIns="36576" tIns="27432" bIns="27432">
+            <a:spAutoFit/>
+          </a:bodyPr>
+          <a:lstStyle/>
+          <a:p>
+            <a:pPr algn="l">
+              <a:spcAft>
+                <a:spcPts val="100"/>
+              </a:spcAft>
+            </a:pPr>
+            <a:r>
+              <a:rPr sz="1100" b="0">
+                <a:solidFill>
+                  <a:srgbClr val="212427"/>
+                </a:solidFill>
+                <a:latin typeface="Verdana"/>
+              </a:rPr>
+              <a:t>the whole sentence</a:t>
+            </a:r>
+          </a:p>
+        </p:txBody>
+      </p:sp>
+      <p:sp>
+        <p:nvSpPr>
+          <p:cNvPr id="9" name="TextBox 8"/>
+          <p:cNvSpPr txBox="1"/>
+          <p:nvPr/>
+        </p:nvSpPr>
+        <p:spPr>
+          <a:xfrm>
+            <a:off x="10579608" y="1965960"/>
+            <a:ext cx="914400" cy="457200"/>
+          </a:xfrm>
+          <a:prstGeom prst="rect">
+            <a:avLst/>
+          </a:prstGeom>
+          <a:noFill/>
+          <a:effectLst/>
+        </p:spPr>
+        <p:txBody>
+          <a:bodyPr wrap="square" anchor="ctr" lIns="36576" rIns="36576" tIns="27432" bIns="27432">
+            <a:spAutoFit/>
+          </a:bodyPr>
+          <a:lstStyle/>
+          <a:p>
+            <a:pPr algn="r">
+              <a:spcAft>
+                <a:spcPts val="0"/>
+              </a:spcAft>
+            </a:pPr>
+            <a:r>
+              <a:rPr sz="2600" b="0">
+                <a:solidFill>
+                  <a:srgbClr val="5A6065"/>
+                </a:solidFill>
+                <a:latin typeface="Verdana"/>
+              </a:rPr>
+              <a:t>1</a:t>
+            </a:r>
+          </a:p>
+        </p:txBody>
+      </p:sp>
+      <p:sp>
+        <p:nvSpPr>
+          <p:cNvPr id="10" name="Rectangle 9"/>
           <p:cNvSpPr/>
           <p:nvPr/>
         </p:nvSpPr>
         <p:spPr>
           <a:xfrm>
-            <a:off x="2514600" y="2441448"/>
-            <a:ext cx="3794760" cy="832103"/>
+            <a:off x="704088" y="2423160"/>
+            <a:ext cx="10789920" cy="9525"/>
           </a:xfrm>
           <a:prstGeom prst="rect">
             <a:avLst/>
           </a:prstGeom>
-          <a:noFill/>
-          <a:ln w="9525">
-            <a:solidFill>
-              <a:srgbClr val="212427"/>
-            </a:solidFill>
+          <a:solidFill>
+            <a:srgbClr val="D6D7D8"/>
+          </a:solidFill>
+          <a:ln>
+            <a:noFill/>
           </a:ln>
           <a:effectLst/>
         </p:spPr>
@@ -51013,40 +51591,168 @@
           </a:fontRef>
         </p:style>
         <p:txBody>
-          <a:bodyPr rtlCol="0" anchor="ctr" wrap="square" lIns="109728" rIns="109728" tIns="73152" bIns="73152"/>
+          <a:bodyPr rtlCol="0" anchor="ctr"/>
           <a:lstStyle/>
           <a:p>
             <a:pPr algn="ctr"/>
+          </a:p>
+        </p:txBody>
+      </p:sp>
+      <p:sp>
+        <p:nvSpPr>
+          <p:cNvPr id="11" name="TextBox 10"/>
+          <p:cNvSpPr txBox="1"/>
+          <p:nvPr/>
+        </p:nvSpPr>
+        <p:spPr>
+          <a:xfrm>
+            <a:off x="704088" y="2423160"/>
+            <a:ext cx="2103120" cy="731520"/>
+          </a:xfrm>
+          <a:prstGeom prst="rect">
+            <a:avLst/>
+          </a:prstGeom>
+          <a:noFill/>
+          <a:effectLst/>
+        </p:spPr>
+        <p:txBody>
+          <a:bodyPr wrap="square" anchor="ctr" lIns="36576" rIns="36576" tIns="27432" bIns="27432">
+            <a:spAutoFit/>
+          </a:bodyPr>
+          <a:lstStyle/>
+          <a:p>
+            <a:pPr algn="l">
+              <a:spcAft>
+                <a:spcPts val="0"/>
+              </a:spcAft>
+            </a:pPr>
             <a:r>
               <a:rPr sz="1200" b="0">
                 <a:solidFill>
-                  <a:srgbClr val="212427"/>
+                  <a:srgbClr val="5A6065"/>
                 </a:solidFill>
+                <a:latin typeface="Verdana"/>
               </a:rPr>
-              <a:t>Create ... (A4).</a:t>
+              <a:t>Everyday, granular</a:t>
             </a:r>
           </a:p>
         </p:txBody>
       </p:sp>
       <p:sp>
         <p:nvSpPr>
-          <p:cNvPr id="7" name="Rectangle 6"/>
+          <p:cNvPr id="12" name="TextBox 11"/>
+          <p:cNvSpPr txBox="1"/>
+          <p:nvPr/>
+        </p:nvSpPr>
+        <p:spPr>
+          <a:xfrm>
+            <a:off x="2898648" y="2423160"/>
+            <a:ext cx="7589520" cy="731520"/>
+          </a:xfrm>
+          <a:prstGeom prst="rect">
+            <a:avLst/>
+          </a:prstGeom>
+          <a:noFill/>
+          <a:effectLst/>
+        </p:spPr>
+        <p:txBody>
+          <a:bodyPr wrap="square" anchor="ctr" lIns="36576" rIns="36576" tIns="27432" bIns="27432">
+            <a:spAutoFit/>
+          </a:bodyPr>
+          <a:lstStyle/>
+          <a:p>
+            <a:pPr algn="l">
+              <a:spcAft>
+                <a:spcPts val="100"/>
+              </a:spcAft>
+            </a:pPr>
+            <a:r>
+              <a:rPr sz="1100" b="0">
+                <a:solidFill>
+                  <a:srgbClr val="212427"/>
+                </a:solidFill>
+                <a:latin typeface="Verdana"/>
+              </a:rPr>
+              <a:t>1) Without binding password rules, there is a risk of weak or reused passwords</a:t>
+            </a:r>
+          </a:p>
+          <a:p>
+            <a:pPr algn="l">
+              <a:spcAft>
+                <a:spcPts val="100"/>
+              </a:spcAft>
+            </a:pPr>
+            <a:r>
+              <a:rPr sz="1100" b="0">
+                <a:solidFill>
+                  <a:srgbClr val="212427"/>
+                </a:solidFill>
+                <a:latin typeface="Verdana"/>
+              </a:rPr>
+              <a:t>2) that can be easily compromised</a:t>
+            </a:r>
+          </a:p>
+        </p:txBody>
+      </p:sp>
+      <p:sp>
+        <p:nvSpPr>
+          <p:cNvPr id="13" name="TextBox 12"/>
+          <p:cNvSpPr txBox="1"/>
+          <p:nvPr/>
+        </p:nvSpPr>
+        <p:spPr>
+          <a:xfrm>
+            <a:off x="10579608" y="2423160"/>
+            <a:ext cx="914400" cy="731520"/>
+          </a:xfrm>
+          <a:prstGeom prst="rect">
+            <a:avLst/>
+          </a:prstGeom>
+          <a:noFill/>
+          <a:effectLst/>
+        </p:spPr>
+        <p:txBody>
+          <a:bodyPr wrap="square" anchor="ctr" lIns="36576" rIns="36576" tIns="27432" bIns="27432">
+            <a:spAutoFit/>
+          </a:bodyPr>
+          <a:lstStyle/>
+          <a:p>
+            <a:pPr algn="r">
+              <a:spcAft>
+                <a:spcPts val="0"/>
+              </a:spcAft>
+            </a:pPr>
+            <a:r>
+              <a:rPr sz="2600" b="0">
+                <a:solidFill>
+                  <a:srgbClr val="5A6065"/>
+                </a:solidFill>
+                <a:latin typeface="Verdana"/>
+              </a:rPr>
+              <a:t>2</a:t>
+            </a:r>
+          </a:p>
+        </p:txBody>
+      </p:sp>
+      <p:sp>
+        <p:nvSpPr>
+          <p:cNvPr id="14" name="Rectangle 13"/>
           <p:cNvSpPr/>
           <p:nvPr/>
         </p:nvSpPr>
         <p:spPr>
           <a:xfrm>
-            <a:off x="6400800" y="2441448"/>
-            <a:ext cx="3794760" cy="832103"/>
+            <a:off x="704088" y="3154680"/>
+            <a:ext cx="10789920" cy="9525"/>
           </a:xfrm>
           <a:prstGeom prst="rect">
             <a:avLst/>
           </a:prstGeom>
-          <a:noFill/>
-          <a:ln w="9525">
-            <a:solidFill>
-              <a:srgbClr val="212427"/>
-            </a:solidFill>
+          <a:solidFill>
+            <a:srgbClr val="D6D7D8"/>
+          </a:solidFill>
+          <a:ln>
+            <a:noFill/>
           </a:ln>
           <a:effectLst/>
         </p:spPr>
@@ -51065,36 +51771,198 @@
           </a:fontRef>
         </p:style>
         <p:txBody>
-          <a:bodyPr rtlCol="0" anchor="ctr" wrap="square" lIns="109728" rIns="109728" tIns="73152" bIns="73152"/>
+          <a:bodyPr rtlCol="0" anchor="ctr"/>
           <a:lstStyle/>
           <a:p>
             <a:pPr algn="ctr"/>
+          </a:p>
+        </p:txBody>
+      </p:sp>
+      <p:sp>
+        <p:nvSpPr>
+          <p:cNvPr id="15" name="TextBox 14"/>
+          <p:cNvSpPr txBox="1"/>
+          <p:nvPr/>
+        </p:nvSpPr>
+        <p:spPr>
+          <a:xfrm>
+            <a:off x="704088" y="3154680"/>
+            <a:ext cx="2103120" cy="1554480"/>
+          </a:xfrm>
+          <a:prstGeom prst="rect">
+            <a:avLst/>
+          </a:prstGeom>
+          <a:noFill/>
+          <a:effectLst/>
+        </p:spPr>
+        <p:txBody>
+          <a:bodyPr wrap="square" anchor="ctr" lIns="36576" rIns="36576" tIns="27432" bIns="27432">
+            <a:spAutoFit/>
+          </a:bodyPr>
+          <a:lstStyle/>
+          <a:p>
+            <a:pPr algn="l">
+              <a:spcAft>
+                <a:spcPts val="0"/>
+              </a:spcAft>
+            </a:pPr>
             <a:r>
               <a:rPr sz="1200" b="0">
                 <a:solidFill>
-                  <a:srgbClr val="212427"/>
+                  <a:srgbClr val="5A6065"/>
                 </a:solidFill>
+                <a:latin typeface="Verdana"/>
               </a:rPr>
-              <a:t>These four basic requirements must be met as a priority.</a:t>
+              <a:t>Logic</a:t>
             </a:r>
           </a:p>
         </p:txBody>
       </p:sp>
       <p:sp>
         <p:nvSpPr>
-          <p:cNvPr id="8" name="Rectangle 7"/>
+          <p:cNvPr id="16" name="TextBox 15"/>
+          <p:cNvSpPr txBox="1"/>
+          <p:nvPr/>
+        </p:nvSpPr>
+        <p:spPr>
+          <a:xfrm>
+            <a:off x="2898648" y="3154680"/>
+            <a:ext cx="7589520" cy="1554480"/>
+          </a:xfrm>
+          <a:prstGeom prst="rect">
+            <a:avLst/>
+          </a:prstGeom>
+          <a:noFill/>
+          <a:effectLst/>
+        </p:spPr>
+        <p:txBody>
+          <a:bodyPr wrap="square" anchor="ctr" lIns="36576" rIns="36576" tIns="27432" bIns="27432">
+            <a:spAutoFit/>
+          </a:bodyPr>
+          <a:lstStyle/>
+          <a:p>
+            <a:pPr algn="l">
+              <a:spcAft>
+                <a:spcPts val="100"/>
+              </a:spcAft>
+            </a:pPr>
+            <a:r>
+              <a:rPr sz="1000" b="0">
+                <a:solidFill>
+                  <a:srgbClr val="212427"/>
+                </a:solidFill>
+                <a:latin typeface="Verdana"/>
+              </a:rPr>
+              <a:t>1) Without binding password rules, there is a risk of weak passwords.</a:t>
+            </a:r>
+          </a:p>
+          <a:p>
+            <a:pPr algn="l">
+              <a:spcAft>
+                <a:spcPts val="100"/>
+              </a:spcAft>
+            </a:pPr>
+            <a:r>
+              <a:rPr sz="1000" b="0">
+                <a:solidFill>
+                  <a:srgbClr val="212427"/>
+                </a:solidFill>
+                <a:latin typeface="Verdana"/>
+              </a:rPr>
+              <a:t>2) Without binding password rules, there is a risk of reused passwords.</a:t>
+            </a:r>
+          </a:p>
+          <a:p>
+            <a:pPr algn="l">
+              <a:spcAft>
+                <a:spcPts val="100"/>
+              </a:spcAft>
+            </a:pPr>
+            <a:r>
+              <a:rPr sz="1000" b="0">
+                <a:solidFill>
+                  <a:srgbClr val="212427"/>
+                </a:solidFill>
+                <a:latin typeface="Verdana"/>
+              </a:rPr>
+              <a:t>3) Weak passwords can be easily compromised.</a:t>
+            </a:r>
+          </a:p>
+          <a:p>
+            <a:pPr algn="l">
+              <a:spcAft>
+                <a:spcPts val="100"/>
+              </a:spcAft>
+            </a:pPr>
+            <a:r>
+              <a:rPr sz="1000" b="0">
+                <a:solidFill>
+                  <a:srgbClr val="212427"/>
+                </a:solidFill>
+                <a:latin typeface="Verdana"/>
+              </a:rPr>
+              <a:t>4) Reused passwords can be easily compromised.</a:t>
+            </a:r>
+          </a:p>
+        </p:txBody>
+      </p:sp>
+      <p:sp>
+        <p:nvSpPr>
+          <p:cNvPr id="17" name="TextBox 16"/>
+          <p:cNvSpPr txBox="1"/>
+          <p:nvPr/>
+        </p:nvSpPr>
+        <p:spPr>
+          <a:xfrm>
+            <a:off x="10579608" y="3154680"/>
+            <a:ext cx="914400" cy="1554480"/>
+          </a:xfrm>
+          <a:prstGeom prst="rect">
+            <a:avLst/>
+          </a:prstGeom>
+          <a:noFill/>
+          <a:effectLst/>
+        </p:spPr>
+        <p:txBody>
+          <a:bodyPr wrap="square" anchor="ctr" lIns="36576" rIns="36576" tIns="27432" bIns="27432">
+            <a:spAutoFit/>
+          </a:bodyPr>
+          <a:lstStyle/>
+          <a:p>
+            <a:pPr algn="r">
+              <a:spcAft>
+                <a:spcPts val="0"/>
+              </a:spcAft>
+            </a:pPr>
+            <a:r>
+              <a:rPr sz="2600" b="0">
+                <a:solidFill>
+                  <a:srgbClr val="5A6065"/>
+                </a:solidFill>
+                <a:latin typeface="Verdana"/>
+              </a:rPr>
+              <a:t>4</a:t>
+            </a:r>
+          </a:p>
+        </p:txBody>
+      </p:sp>
+      <p:sp>
+        <p:nvSpPr>
+          <p:cNvPr id="18" name="Rectangle 17"/>
           <p:cNvSpPr/>
           <p:nvPr/>
         </p:nvSpPr>
         <p:spPr>
           <a:xfrm>
-            <a:off x="10332720" y="2331720"/>
-            <a:ext cx="1188720" cy="1051560"/>
+            <a:off x="704088" y="4709160"/>
+            <a:ext cx="10789920" cy="9525"/>
           </a:xfrm>
           <a:prstGeom prst="rect">
             <a:avLst/>
           </a:prstGeom>
-          <a:noFill/>
+          <a:solidFill>
+            <a:srgbClr val="D6D7D8"/>
+          </a:solidFill>
           <a:ln>
             <a:noFill/>
           </a:ln>
@@ -51115,36 +51983,182 @@
           </a:fontRef>
         </p:style>
         <p:txBody>
-          <a:bodyPr rtlCol="0" anchor="ctr" wrap="square" lIns="109728" rIns="109728" tIns="73152" bIns="73152"/>
+          <a:bodyPr rtlCol="0" anchor="ctr"/>
           <a:lstStyle/>
           <a:p>
-            <a:pPr algn="r"/>
+            <a:pPr algn="ctr"/>
+          </a:p>
+        </p:txBody>
+      </p:sp>
+      <p:sp>
+        <p:nvSpPr>
+          <p:cNvPr id="19" name="TextBox 18"/>
+          <p:cNvSpPr txBox="1"/>
+          <p:nvPr/>
+        </p:nvSpPr>
+        <p:spPr>
+          <a:xfrm>
+            <a:off x="704088" y="4709160"/>
+            <a:ext cx="2103120" cy="960120"/>
+          </a:xfrm>
+          <a:prstGeom prst="rect">
+            <a:avLst/>
+          </a:prstGeom>
+          <a:noFill/>
+          <a:effectLst/>
+        </p:spPr>
+        <p:txBody>
+          <a:bodyPr wrap="square" anchor="ctr" lIns="36576" rIns="36576" tIns="27432" bIns="27432">
+            <a:spAutoFit/>
+          </a:bodyPr>
+          <a:lstStyle/>
+          <a:p>
+            <a:pPr algn="l">
+              <a:spcAft>
+                <a:spcPts val="0"/>
+              </a:spcAft>
+            </a:pPr>
             <a:r>
-              <a:rPr sz="2400" b="1">
+              <a:rPr sz="1200" b="0">
                 <a:solidFill>
-                  <a:srgbClr val="212427"/>
+                  <a:srgbClr val="5A6065"/>
                 </a:solidFill>
+                <a:latin typeface="Verdana"/>
               </a:rPr>
-              <a:t>2</a:t>
+              <a:t>Working definition</a:t>
             </a:r>
           </a:p>
         </p:txBody>
       </p:sp>
       <p:sp>
         <p:nvSpPr>
-          <p:cNvPr id="9" name="Rectangle 8"/>
+          <p:cNvPr id="20" name="TextBox 19"/>
+          <p:cNvSpPr txBox="1"/>
+          <p:nvPr/>
+        </p:nvSpPr>
+        <p:spPr>
+          <a:xfrm>
+            <a:off x="2898648" y="4709160"/>
+            <a:ext cx="7589520" cy="960120"/>
+          </a:xfrm>
+          <a:prstGeom prst="rect">
+            <a:avLst/>
+          </a:prstGeom>
+          <a:noFill/>
+          <a:effectLst/>
+        </p:spPr>
+        <p:txBody>
+          <a:bodyPr wrap="square" anchor="ctr" lIns="36576" rIns="36576" tIns="27432" bIns="27432">
+            <a:spAutoFit/>
+          </a:bodyPr>
+          <a:lstStyle/>
+          <a:p>
+            <a:pPr algn="l">
+              <a:spcAft>
+                <a:spcPts val="100"/>
+              </a:spcAft>
+            </a:pPr>
+            <a:r>
+              <a:rPr sz="1100" b="0">
+                <a:solidFill>
+                  <a:srgbClr val="212427"/>
+                </a:solidFill>
+                <a:latin typeface="Verdana"/>
+              </a:rPr>
+              <a:t>1) Without password rules: risk of weak passwords.</a:t>
+            </a:r>
+          </a:p>
+          <a:p>
+            <a:pPr algn="l">
+              <a:spcAft>
+                <a:spcPts val="100"/>
+              </a:spcAft>
+            </a:pPr>
+            <a:r>
+              <a:rPr sz="1100" b="0">
+                <a:solidFill>
+                  <a:srgbClr val="212427"/>
+                </a:solidFill>
+                <a:latin typeface="Verdana"/>
+              </a:rPr>
+              <a:t>2) Without password rules: risk of reused passwords.</a:t>
+            </a:r>
+          </a:p>
+          <a:p>
+            <a:pPr algn="l">
+              <a:spcAft>
+                <a:spcPts val="100"/>
+              </a:spcAft>
+            </a:pPr>
+            <a:r>
+              <a:rPr sz="1100" b="0">
+                <a:solidFill>
+                  <a:srgbClr val="212427"/>
+                </a:solidFill>
+                <a:latin typeface="Verdana"/>
+              </a:rPr>
+              <a:t>3) Weak or reused passwords are easy to compromise.</a:t>
+            </a:r>
+          </a:p>
+        </p:txBody>
+      </p:sp>
+      <p:sp>
+        <p:nvSpPr>
+          <p:cNvPr id="21" name="TextBox 20"/>
+          <p:cNvSpPr txBox="1"/>
+          <p:nvPr/>
+        </p:nvSpPr>
+        <p:spPr>
+          <a:xfrm>
+            <a:off x="10579608" y="4709160"/>
+            <a:ext cx="914400" cy="960120"/>
+          </a:xfrm>
+          <a:prstGeom prst="rect">
+            <a:avLst/>
+          </a:prstGeom>
+          <a:noFill/>
+          <a:effectLst/>
+        </p:spPr>
+        <p:txBody>
+          <a:bodyPr wrap="square" anchor="ctr" lIns="36576" rIns="36576" tIns="27432" bIns="27432">
+            <a:spAutoFit/>
+          </a:bodyPr>
+          <a:lstStyle/>
+          <a:p>
+            <a:pPr algn="r">
+              <a:spcAft>
+                <a:spcPts val="0"/>
+              </a:spcAft>
+            </a:pPr>
+            <a:r>
+              <a:rPr sz="2600" b="0">
+                <a:solidFill>
+                  <a:srgbClr val="5A6065"/>
+                </a:solidFill>
+                <a:latin typeface="Verdana"/>
+              </a:rPr>
+              <a:t>3</a:t>
+            </a:r>
+          </a:p>
+        </p:txBody>
+      </p:sp>
+      <p:sp>
+        <p:nvSpPr>
+          <p:cNvPr id="22" name="Rectangle 21"/>
           <p:cNvSpPr/>
           <p:nvPr/>
         </p:nvSpPr>
         <p:spPr>
           <a:xfrm>
-            <a:off x="704088" y="3493008"/>
-            <a:ext cx="1828800" cy="1051560"/>
+            <a:off x="704088" y="5669280"/>
+            <a:ext cx="10789920" cy="9525"/>
           </a:xfrm>
           <a:prstGeom prst="rect">
             <a:avLst/>
           </a:prstGeom>
-          <a:noFill/>
+          <a:solidFill>
+            <a:srgbClr val="D6D7D8"/>
+          </a:solidFill>
           <a:ln>
             <a:noFill/>
           </a:ln>
@@ -51165,740 +52179,10 @@
           </a:fontRef>
         </p:style>
         <p:txBody>
-          <a:bodyPr rtlCol="0" anchor="ctr" wrap="square" lIns="109728" rIns="109728" tIns="73152" bIns="73152"/>
-          <a:lstStyle/>
-          <a:p>
-            <a:pPr algn="l"/>
-            <a:r>
-              <a:rPr sz="1200" b="1">
-                <a:solidFill>
-                  <a:srgbClr val="5A6065"/>
-                </a:solidFill>
-              </a:rPr>
-              <a:t>Logic</a:t>
-            </a:r>
-          </a:p>
-        </p:txBody>
-      </p:sp>
-      <p:sp>
-        <p:nvSpPr>
-          <p:cNvPr id="10" name="Rectangle 9"/>
-          <p:cNvSpPr/>
-          <p:nvPr/>
-        </p:nvSpPr>
-        <p:spPr>
-          <a:xfrm>
-            <a:off x="2514600" y="3602736"/>
-            <a:ext cx="1203960" cy="832103"/>
-          </a:xfrm>
-          <a:prstGeom prst="rect">
-            <a:avLst/>
-          </a:prstGeom>
-          <a:noFill/>
-          <a:ln w="9525">
-            <a:solidFill>
-              <a:srgbClr val="212427"/>
-            </a:solidFill>
-          </a:ln>
-          <a:effectLst/>
-        </p:spPr>
-        <p:style>
-          <a:lnRef idx="1">
-            <a:schemeClr val="accent1"/>
-          </a:lnRef>
-          <a:fillRef idx="3">
-            <a:schemeClr val="accent1"/>
-          </a:fillRef>
-          <a:effectRef idx="2">
-            <a:schemeClr val="accent1"/>
-          </a:effectRef>
-          <a:fontRef idx="minor">
-            <a:schemeClr val="lt1"/>
-          </a:fontRef>
-        </p:style>
-        <p:txBody>
-          <a:bodyPr rtlCol="0" anchor="ctr" wrap="square" lIns="109728" rIns="109728" tIns="73152" bIns="73152"/>
+          <a:bodyPr rtlCol="0" anchor="ctr"/>
           <a:lstStyle/>
           <a:p>
             <a:pPr algn="ctr"/>
-            <a:r>
-              <a:rPr sz="1000" b="0">
-                <a:solidFill>
-                  <a:srgbClr val="212427"/>
-                </a:solidFill>
-              </a:rPr>
-              <a:t>cloud usage strategy (A1)</a:t>
-            </a:r>
-          </a:p>
-        </p:txBody>
-      </p:sp>
-      <p:sp>
-        <p:nvSpPr>
-          <p:cNvPr id="11" name="Rectangle 10"/>
-          <p:cNvSpPr/>
-          <p:nvPr/>
-        </p:nvSpPr>
-        <p:spPr>
-          <a:xfrm>
-            <a:off x="3810000" y="3602736"/>
-            <a:ext cx="1203960" cy="832103"/>
-          </a:xfrm>
-          <a:prstGeom prst="rect">
-            <a:avLst/>
-          </a:prstGeom>
-          <a:noFill/>
-          <a:ln w="9525">
-            <a:solidFill>
-              <a:srgbClr val="212427"/>
-            </a:solidFill>
-          </a:ln>
-          <a:effectLst/>
-        </p:spPr>
-        <p:style>
-          <a:lnRef idx="1">
-            <a:schemeClr val="accent1"/>
-          </a:lnRef>
-          <a:fillRef idx="3">
-            <a:schemeClr val="accent1"/>
-          </a:fillRef>
-          <a:effectRef idx="2">
-            <a:schemeClr val="accent1"/>
-          </a:effectRef>
-          <a:fontRef idx="minor">
-            <a:schemeClr val="lt1"/>
-          </a:fontRef>
-        </p:style>
-        <p:txBody>
-          <a:bodyPr rtlCol="0" anchor="ctr" wrap="square" lIns="109728" rIns="109728" tIns="73152" bIns="73152"/>
-          <a:lstStyle/>
-          <a:p>
-            <a:pPr algn="ctr"/>
-            <a:r>
-              <a:rPr sz="1000" b="0">
-                <a:solidFill>
-                  <a:srgbClr val="212427"/>
-                </a:solidFill>
-              </a:rPr>
-              <a:t>security policy (A2)</a:t>
-            </a:r>
-          </a:p>
-        </p:txBody>
-      </p:sp>
-      <p:sp>
-        <p:nvSpPr>
-          <p:cNvPr id="12" name="Rectangle 11"/>
-          <p:cNvSpPr/>
-          <p:nvPr/>
-        </p:nvSpPr>
-        <p:spPr>
-          <a:xfrm>
-            <a:off x="5105400" y="3602736"/>
-            <a:ext cx="1203960" cy="832103"/>
-          </a:xfrm>
-          <a:prstGeom prst="rect">
-            <a:avLst/>
-          </a:prstGeom>
-          <a:noFill/>
-          <a:ln w="9525">
-            <a:solidFill>
-              <a:srgbClr val="212427"/>
-            </a:solidFill>
-          </a:ln>
-          <a:effectLst/>
-        </p:spPr>
-        <p:style>
-          <a:lnRef idx="1">
-            <a:schemeClr val="accent1"/>
-          </a:lnRef>
-          <a:fillRef idx="3">
-            <a:schemeClr val="accent1"/>
-          </a:fillRef>
-          <a:effectRef idx="2">
-            <a:schemeClr val="accent1"/>
-          </a:effectRef>
-          <a:fontRef idx="minor">
-            <a:schemeClr val="lt1"/>
-          </a:fontRef>
-        </p:style>
-        <p:txBody>
-          <a:bodyPr rtlCol="0" anchor="ctr" wrap="square" lIns="109728" rIns="109728" tIns="73152" bIns="73152"/>
-          <a:lstStyle/>
-          <a:p>
-            <a:pPr algn="ctr"/>
-            <a:r>
-              <a:rPr sz="1000" b="0">
-                <a:solidFill>
-                  <a:srgbClr val="212427"/>
-                </a:solidFill>
-              </a:rPr>
-              <a:t>service definitions (A3)</a:t>
-            </a:r>
-          </a:p>
-        </p:txBody>
-      </p:sp>
-      <p:sp>
-        <p:nvSpPr>
-          <p:cNvPr id="13" name="Rectangle 12"/>
-          <p:cNvSpPr/>
-          <p:nvPr/>
-        </p:nvSpPr>
-        <p:spPr>
-          <a:xfrm>
-            <a:off x="6400800" y="3602736"/>
-            <a:ext cx="1203960" cy="832103"/>
-          </a:xfrm>
-          <a:prstGeom prst="rect">
-            <a:avLst/>
-          </a:prstGeom>
-          <a:noFill/>
-          <a:ln w="9525">
-            <a:solidFill>
-              <a:srgbClr val="212427"/>
-            </a:solidFill>
-          </a:ln>
-          <a:effectLst/>
-        </p:spPr>
-        <p:style>
-          <a:lnRef idx="1">
-            <a:schemeClr val="accent1"/>
-          </a:lnRef>
-          <a:fillRef idx="3">
-            <a:schemeClr val="accent1"/>
-          </a:fillRef>
-          <a:effectRef idx="2">
-            <a:schemeClr val="accent1"/>
-          </a:effectRef>
-          <a:fontRef idx="minor">
-            <a:schemeClr val="lt1"/>
-          </a:fontRef>
-        </p:style>
-        <p:txBody>
-          <a:bodyPr rtlCol="0" anchor="ctr" wrap="square" lIns="109728" rIns="109728" tIns="73152" bIns="73152"/>
-          <a:lstStyle/>
-          <a:p>
-            <a:pPr algn="ctr"/>
-            <a:r>
-              <a:rPr sz="1000" b="0">
-                <a:solidFill>
-                  <a:srgbClr val="212427"/>
-                </a:solidFill>
-              </a:rPr>
-              <a:t>responsibilities (A4)</a:t>
-            </a:r>
-          </a:p>
-        </p:txBody>
-      </p:sp>
-      <p:sp>
-        <p:nvSpPr>
-          <p:cNvPr id="14" name="Rectangle 13"/>
-          <p:cNvSpPr/>
-          <p:nvPr/>
-        </p:nvSpPr>
-        <p:spPr>
-          <a:xfrm>
-            <a:off x="7696200" y="3602736"/>
-            <a:ext cx="1203960" cy="832103"/>
-          </a:xfrm>
-          <a:prstGeom prst="rect">
-            <a:avLst/>
-          </a:prstGeom>
-          <a:noFill/>
-          <a:ln w="9525">
-            <a:solidFill>
-              <a:srgbClr val="212427"/>
-            </a:solidFill>
-          </a:ln>
-          <a:effectLst/>
-        </p:spPr>
-        <p:style>
-          <a:lnRef idx="1">
-            <a:schemeClr val="accent1"/>
-          </a:lnRef>
-          <a:fillRef idx="3">
-            <a:schemeClr val="accent1"/>
-          </a:fillRef>
-          <a:effectRef idx="2">
-            <a:schemeClr val="accent1"/>
-          </a:effectRef>
-          <a:fontRef idx="minor">
-            <a:schemeClr val="lt1"/>
-          </a:fontRef>
-        </p:style>
-        <p:txBody>
-          <a:bodyPr rtlCol="0" anchor="ctr" wrap="square" lIns="109728" rIns="109728" tIns="73152" bIns="73152"/>
-          <a:lstStyle/>
-          <a:p>
-            <a:pPr algn="ctr"/>
-            <a:r>
-              <a:rPr sz="1000" b="0">
-                <a:solidFill>
-                  <a:srgbClr val="212427"/>
-                </a:solidFill>
-              </a:rPr>
-              <a:t>meet as a priority</a:t>
-            </a:r>
-          </a:p>
-        </p:txBody>
-      </p:sp>
-      <p:sp>
-        <p:nvSpPr>
-          <p:cNvPr id="15" name="Rectangle 14"/>
-          <p:cNvSpPr/>
-          <p:nvPr/>
-        </p:nvSpPr>
-        <p:spPr>
-          <a:xfrm>
-            <a:off x="8991600" y="3602736"/>
-            <a:ext cx="1203960" cy="832103"/>
-          </a:xfrm>
-          <a:prstGeom prst="rect">
-            <a:avLst/>
-          </a:prstGeom>
-          <a:noFill/>
-          <a:ln w="9525">
-            <a:solidFill>
-              <a:srgbClr val="212427"/>
-            </a:solidFill>
-          </a:ln>
-          <a:effectLst/>
-        </p:spPr>
-        <p:style>
-          <a:lnRef idx="1">
-            <a:schemeClr val="accent1"/>
-          </a:lnRef>
-          <a:fillRef idx="3">
-            <a:schemeClr val="accent1"/>
-          </a:fillRef>
-          <a:effectRef idx="2">
-            <a:schemeClr val="accent1"/>
-          </a:effectRef>
-          <a:fontRef idx="minor">
-            <a:schemeClr val="lt1"/>
-          </a:fontRef>
-        </p:style>
-        <p:txBody>
-          <a:bodyPr rtlCol="0" anchor="ctr" wrap="square" lIns="109728" rIns="109728" tIns="73152" bIns="73152"/>
-          <a:lstStyle/>
-          <a:p>
-            <a:pPr algn="ctr"/>
-            <a:r>
-              <a:rPr sz="1000" b="0">
-                <a:solidFill>
-                  <a:srgbClr val="212427"/>
-                </a:solidFill>
-              </a:rPr>
-              <a:t>there are four</a:t>
-            </a:r>
-          </a:p>
-        </p:txBody>
-      </p:sp>
-      <p:sp>
-        <p:nvSpPr>
-          <p:cNvPr id="16" name="Rectangle 15"/>
-          <p:cNvSpPr/>
-          <p:nvPr/>
-        </p:nvSpPr>
-        <p:spPr>
-          <a:xfrm>
-            <a:off x="10332720" y="3493008"/>
-            <a:ext cx="1188720" cy="1051560"/>
-          </a:xfrm>
-          <a:prstGeom prst="rect">
-            <a:avLst/>
-          </a:prstGeom>
-          <a:noFill/>
-          <a:ln>
-            <a:noFill/>
-          </a:ln>
-          <a:effectLst/>
-        </p:spPr>
-        <p:style>
-          <a:lnRef idx="1">
-            <a:schemeClr val="accent1"/>
-          </a:lnRef>
-          <a:fillRef idx="3">
-            <a:schemeClr val="accent1"/>
-          </a:fillRef>
-          <a:effectRef idx="2">
-            <a:schemeClr val="accent1"/>
-          </a:effectRef>
-          <a:fontRef idx="minor">
-            <a:schemeClr val="lt1"/>
-          </a:fontRef>
-        </p:style>
-        <p:txBody>
-          <a:bodyPr rtlCol="0" anchor="ctr" wrap="square" lIns="109728" rIns="109728" tIns="73152" bIns="73152"/>
-          <a:lstStyle/>
-          <a:p>
-            <a:pPr algn="r"/>
-            <a:r>
-              <a:rPr sz="2400" b="1">
-                <a:solidFill>
-                  <a:srgbClr val="212427"/>
-                </a:solidFill>
-              </a:rPr>
-              <a:t>5 to 6</a:t>
-            </a:r>
-          </a:p>
-        </p:txBody>
-      </p:sp>
-      <p:sp>
-        <p:nvSpPr>
-          <p:cNvPr id="17" name="Rectangle 16"/>
-          <p:cNvSpPr/>
-          <p:nvPr/>
-        </p:nvSpPr>
-        <p:spPr>
-          <a:xfrm>
-            <a:off x="704088" y="4654296"/>
-            <a:ext cx="1828800" cy="1051560"/>
-          </a:xfrm>
-          <a:prstGeom prst="rect">
-            <a:avLst/>
-          </a:prstGeom>
-          <a:noFill/>
-          <a:ln>
-            <a:noFill/>
-          </a:ln>
-          <a:effectLst/>
-        </p:spPr>
-        <p:style>
-          <a:lnRef idx="1">
-            <a:schemeClr val="accent1"/>
-          </a:lnRef>
-          <a:fillRef idx="3">
-            <a:schemeClr val="accent1"/>
-          </a:fillRef>
-          <a:effectRef idx="2">
-            <a:schemeClr val="accent1"/>
-          </a:effectRef>
-          <a:fontRef idx="minor">
-            <a:schemeClr val="lt1"/>
-          </a:fontRef>
-        </p:style>
-        <p:txBody>
-          <a:bodyPr rtlCol="0" anchor="ctr" wrap="square" lIns="109728" rIns="109728" tIns="73152" bIns="73152"/>
-          <a:lstStyle/>
-          <a:p>
-            <a:pPr algn="l"/>
-            <a:r>
-              <a:rPr sz="1200" b="1">
-                <a:solidFill>
-                  <a:srgbClr val="5A6065"/>
-                </a:solidFill>
-              </a:rPr>
-              <a:t>Working definition</a:t>
-            </a:r>
-          </a:p>
-        </p:txBody>
-      </p:sp>
-      <p:sp>
-        <p:nvSpPr>
-          <p:cNvPr id="18" name="Rectangle 17"/>
-          <p:cNvSpPr/>
-          <p:nvPr/>
-        </p:nvSpPr>
-        <p:spPr>
-          <a:xfrm>
-            <a:off x="2514600" y="4764024"/>
-            <a:ext cx="1463040" cy="832103"/>
-          </a:xfrm>
-          <a:prstGeom prst="rect">
-            <a:avLst/>
-          </a:prstGeom>
-          <a:noFill/>
-          <a:ln w="9525">
-            <a:solidFill>
-              <a:srgbClr val="212427"/>
-            </a:solidFill>
-          </a:ln>
-          <a:effectLst/>
-        </p:spPr>
-        <p:style>
-          <a:lnRef idx="1">
-            <a:schemeClr val="accent1"/>
-          </a:lnRef>
-          <a:fillRef idx="3">
-            <a:schemeClr val="accent1"/>
-          </a:fillRef>
-          <a:effectRef idx="2">
-            <a:schemeClr val="accent1"/>
-          </a:effectRef>
-          <a:fontRef idx="minor">
-            <a:schemeClr val="lt1"/>
-          </a:fontRef>
-        </p:style>
-        <p:txBody>
-          <a:bodyPr rtlCol="0" anchor="ctr" wrap="square" lIns="109728" rIns="109728" tIns="73152" bIns="73152"/>
-          <a:lstStyle/>
-          <a:p>
-            <a:pPr algn="ctr"/>
-            <a:r>
-              <a:rPr sz="1000" b="0">
-                <a:solidFill>
-                  <a:srgbClr val="212427"/>
-                </a:solidFill>
-              </a:rPr>
-              <a:t>cloud usage strategy (A1)</a:t>
-            </a:r>
-          </a:p>
-        </p:txBody>
-      </p:sp>
-      <p:sp>
-        <p:nvSpPr>
-          <p:cNvPr id="19" name="Rectangle 18"/>
-          <p:cNvSpPr/>
-          <p:nvPr/>
-        </p:nvSpPr>
-        <p:spPr>
-          <a:xfrm>
-            <a:off x="4069080" y="4764024"/>
-            <a:ext cx="1463040" cy="832103"/>
-          </a:xfrm>
-          <a:prstGeom prst="rect">
-            <a:avLst/>
-          </a:prstGeom>
-          <a:noFill/>
-          <a:ln w="9525">
-            <a:solidFill>
-              <a:srgbClr val="212427"/>
-            </a:solidFill>
-          </a:ln>
-          <a:effectLst/>
-        </p:spPr>
-        <p:style>
-          <a:lnRef idx="1">
-            <a:schemeClr val="accent1"/>
-          </a:lnRef>
-          <a:fillRef idx="3">
-            <a:schemeClr val="accent1"/>
-          </a:fillRef>
-          <a:effectRef idx="2">
-            <a:schemeClr val="accent1"/>
-          </a:effectRef>
-          <a:fontRef idx="minor">
-            <a:schemeClr val="lt1"/>
-          </a:fontRef>
-        </p:style>
-        <p:txBody>
-          <a:bodyPr rtlCol="0" anchor="ctr" wrap="square" lIns="109728" rIns="109728" tIns="73152" bIns="73152"/>
-          <a:lstStyle/>
-          <a:p>
-            <a:pPr algn="ctr"/>
-            <a:r>
-              <a:rPr sz="1000" b="0">
-                <a:solidFill>
-                  <a:srgbClr val="212427"/>
-                </a:solidFill>
-              </a:rPr>
-              <a:t>security policy (A2)</a:t>
-            </a:r>
-          </a:p>
-        </p:txBody>
-      </p:sp>
-      <p:sp>
-        <p:nvSpPr>
-          <p:cNvPr id="20" name="Rectangle 19"/>
-          <p:cNvSpPr/>
-          <p:nvPr/>
-        </p:nvSpPr>
-        <p:spPr>
-          <a:xfrm>
-            <a:off x="5623560" y="4764024"/>
-            <a:ext cx="1463040" cy="832103"/>
-          </a:xfrm>
-          <a:prstGeom prst="rect">
-            <a:avLst/>
-          </a:prstGeom>
-          <a:noFill/>
-          <a:ln w="9525">
-            <a:solidFill>
-              <a:srgbClr val="212427"/>
-            </a:solidFill>
-          </a:ln>
-          <a:effectLst/>
-        </p:spPr>
-        <p:style>
-          <a:lnRef idx="1">
-            <a:schemeClr val="accent1"/>
-          </a:lnRef>
-          <a:fillRef idx="3">
-            <a:schemeClr val="accent1"/>
-          </a:fillRef>
-          <a:effectRef idx="2">
-            <a:schemeClr val="accent1"/>
-          </a:effectRef>
-          <a:fontRef idx="minor">
-            <a:schemeClr val="lt1"/>
-          </a:fontRef>
-        </p:style>
-        <p:txBody>
-          <a:bodyPr rtlCol="0" anchor="ctr" wrap="square" lIns="109728" rIns="109728" tIns="73152" bIns="73152"/>
-          <a:lstStyle/>
-          <a:p>
-            <a:pPr algn="ctr"/>
-            <a:r>
-              <a:rPr sz="1000" b="0">
-                <a:solidFill>
-                  <a:srgbClr val="212427"/>
-                </a:solidFill>
-              </a:rPr>
-              <a:t>service definitions (A3)</a:t>
-            </a:r>
-          </a:p>
-        </p:txBody>
-      </p:sp>
-      <p:sp>
-        <p:nvSpPr>
-          <p:cNvPr id="21" name="Rectangle 20"/>
-          <p:cNvSpPr/>
-          <p:nvPr/>
-        </p:nvSpPr>
-        <p:spPr>
-          <a:xfrm>
-            <a:off x="7178040" y="4764024"/>
-            <a:ext cx="1463040" cy="832103"/>
-          </a:xfrm>
-          <a:prstGeom prst="rect">
-            <a:avLst/>
-          </a:prstGeom>
-          <a:noFill/>
-          <a:ln w="9525">
-            <a:solidFill>
-              <a:srgbClr val="212427"/>
-            </a:solidFill>
-          </a:ln>
-          <a:effectLst/>
-        </p:spPr>
-        <p:style>
-          <a:lnRef idx="1">
-            <a:schemeClr val="accent1"/>
-          </a:lnRef>
-          <a:fillRef idx="3">
-            <a:schemeClr val="accent1"/>
-          </a:fillRef>
-          <a:effectRef idx="2">
-            <a:schemeClr val="accent1"/>
-          </a:effectRef>
-          <a:fontRef idx="minor">
-            <a:schemeClr val="lt1"/>
-          </a:fontRef>
-        </p:style>
-        <p:txBody>
-          <a:bodyPr rtlCol="0" anchor="ctr" wrap="square" lIns="109728" rIns="109728" tIns="73152" bIns="73152"/>
-          <a:lstStyle/>
-          <a:p>
-            <a:pPr algn="ctr"/>
-            <a:r>
-              <a:rPr sz="1000" b="0">
-                <a:solidFill>
-                  <a:srgbClr val="212427"/>
-                </a:solidFill>
-              </a:rPr>
-              <a:t>responsibilities (A4)</a:t>
-            </a:r>
-          </a:p>
-        </p:txBody>
-      </p:sp>
-      <p:sp>
-        <p:nvSpPr>
-          <p:cNvPr id="22" name="Rectangle 21"/>
-          <p:cNvSpPr/>
-          <p:nvPr/>
-        </p:nvSpPr>
-        <p:spPr>
-          <a:xfrm>
-            <a:off x="8732520" y="4764024"/>
-            <a:ext cx="1463040" cy="832103"/>
-          </a:xfrm>
-          <a:prstGeom prst="rect">
-            <a:avLst/>
-          </a:prstGeom>
-          <a:noFill/>
-          <a:ln w="9525">
-            <a:solidFill>
-              <a:srgbClr val="212427"/>
-            </a:solidFill>
-          </a:ln>
-          <a:effectLst/>
-        </p:spPr>
-        <p:style>
-          <a:lnRef idx="1">
-            <a:schemeClr val="accent1"/>
-          </a:lnRef>
-          <a:fillRef idx="3">
-            <a:schemeClr val="accent1"/>
-          </a:fillRef>
-          <a:effectRef idx="2">
-            <a:schemeClr val="accent1"/>
-          </a:effectRef>
-          <a:fontRef idx="minor">
-            <a:schemeClr val="lt1"/>
-          </a:fontRef>
-        </p:style>
-        <p:txBody>
-          <a:bodyPr rtlCol="0" anchor="ctr" wrap="square" lIns="109728" rIns="109728" tIns="73152" bIns="73152"/>
-          <a:lstStyle/>
-          <a:p>
-            <a:pPr algn="ctr"/>
-            <a:r>
-              <a:rPr sz="1000" b="0">
-                <a:solidFill>
-                  <a:srgbClr val="212427"/>
-                </a:solidFill>
-              </a:rPr>
-              <a:t>meet as a priority</a:t>
-            </a:r>
-          </a:p>
-        </p:txBody>
-      </p:sp>
-      <p:sp>
-        <p:nvSpPr>
-          <p:cNvPr id="23" name="Rectangle 22"/>
-          <p:cNvSpPr/>
-          <p:nvPr/>
-        </p:nvSpPr>
-        <p:spPr>
-          <a:xfrm>
-            <a:off x="10332720" y="4654296"/>
-            <a:ext cx="1188720" cy="1051560"/>
-          </a:xfrm>
-          <a:prstGeom prst="rect">
-            <a:avLst/>
-          </a:prstGeom>
-          <a:noFill/>
-          <a:ln>
-            <a:noFill/>
-          </a:ln>
-          <a:effectLst/>
-        </p:spPr>
-        <p:style>
-          <a:lnRef idx="1">
-            <a:schemeClr val="accent1"/>
-          </a:lnRef>
-          <a:fillRef idx="3">
-            <a:schemeClr val="accent1"/>
-          </a:fillRef>
-          <a:effectRef idx="2">
-            <a:schemeClr val="accent1"/>
-          </a:effectRef>
-          <a:fontRef idx="minor">
-            <a:schemeClr val="lt1"/>
-          </a:fontRef>
-        </p:style>
-        <p:txBody>
-          <a:bodyPr rtlCol="0" anchor="ctr" wrap="square" lIns="109728" rIns="109728" tIns="73152" bIns="73152"/>
-          <a:lstStyle/>
-          <a:p>
-            <a:pPr algn="r"/>
-            <a:r>
-              <a:rPr sz="2400" b="1">
-                <a:solidFill>
-                  <a:srgbClr val="212427"/>
-                </a:solidFill>
-              </a:rPr>
-              <a:t>5</a:t>
-            </a:r>
           </a:p>
         </p:txBody>
       </p:sp>
@@ -51930,13 +52214,21 @@
             <p:ph type="title"/>
           </p:nvPr>
         </p:nvSpPr>
-        <p:spPr/>
+        <p:spPr>
+          <a:effectLst/>
+        </p:spPr>
         <p:txBody>
           <a:bodyPr/>
           <a:lstStyle/>
           <a:p>
             <a:r>
-              <a:t>Example 3: how many claims?</a:t>
+              <a:rPr b="0" sz="2800" cap="none">
+                <a:solidFill>
+                  <a:srgbClr val="212427"/>
+                </a:solidFill>
+                <a:latin typeface="Verdana"/>
+              </a:rPr>
+              <a:t>Example C: how many claims?</a:t>
             </a:r>
           </a:p>
         </p:txBody>
@@ -51949,17 +52241,17 @@
         </p:nvSpPr>
         <p:spPr>
           <a:xfrm>
-            <a:off x="704088" y="1143000"/>
-            <a:ext cx="10789920" cy="960120"/>
+            <a:off x="704088" y="1115568"/>
+            <a:ext cx="609600" cy="38100"/>
           </a:xfrm>
           <a:prstGeom prst="rect">
             <a:avLst/>
           </a:prstGeom>
-          <a:noFill/>
-          <a:ln w="9525">
-            <a:solidFill>
-              <a:srgbClr val="D6D7D8"/>
-            </a:solidFill>
+          <a:solidFill>
+            <a:srgbClr val="B1063A"/>
+          </a:solidFill>
+          <a:ln>
+            <a:noFill/>
           </a:ln>
           <a:effectLst/>
         </p:spPr>
@@ -51978,36 +52270,70 @@
           </a:fontRef>
         </p:style>
         <p:txBody>
-          <a:bodyPr rtlCol="0" anchor="ctr" wrap="square" lIns="109728" rIns="109728" tIns="73152" bIns="73152"/>
+          <a:bodyPr rtlCol="0" anchor="ctr"/>
           <a:lstStyle/>
           <a:p>
-            <a:pPr algn="l"/>
+            <a:pPr algn="ctr"/>
+          </a:p>
+        </p:txBody>
+      </p:sp>
+      <p:sp>
+        <p:nvSpPr>
+          <p:cNvPr id="5" name="TextBox 4"/>
+          <p:cNvSpPr txBox="1"/>
+          <p:nvPr/>
+        </p:nvSpPr>
+        <p:spPr>
+          <a:xfrm>
+            <a:off x="704088" y="1188720"/>
+            <a:ext cx="10789920" cy="685800"/>
+          </a:xfrm>
+          <a:prstGeom prst="rect">
+            <a:avLst/>
+          </a:prstGeom>
+          <a:noFill/>
+          <a:effectLst/>
+        </p:spPr>
+        <p:txBody>
+          <a:bodyPr wrap="square" anchor="ctr" lIns="36576" rIns="36576" tIns="27432" bIns="27432">
+            <a:spAutoFit/>
+          </a:bodyPr>
+          <a:lstStyle/>
+          <a:p>
+            <a:pPr algn="l">
+              <a:spcAft>
+                <a:spcPts val="0"/>
+              </a:spcAft>
+            </a:pPr>
             <a:r>
-              <a:rPr sz="1400" b="0">
+              <a:rPr sz="1500" b="0">
                 <a:solidFill>
                   <a:srgbClr val="212427"/>
                 </a:solidFill>
+                <a:latin typeface="Verdana"/>
               </a:rPr>
-              <a:t>When personnel changes occur, user IDs and permissions that are no longer needed must be removed promptly to avoid unauthorized access by former or transferred employees. Permissions may only be granted based on the actual need for task fulfillment.</a:t>
+              <a:t>Issuance and revocation of entry, access, and usage media must be documented and replaced immediately if compromised.</a:t>
             </a:r>
           </a:p>
         </p:txBody>
       </p:sp>
       <p:sp>
         <p:nvSpPr>
-          <p:cNvPr id="5" name="Rectangle 4"/>
+          <p:cNvPr id="6" name="Rectangle 5"/>
           <p:cNvSpPr/>
           <p:nvPr/>
         </p:nvSpPr>
         <p:spPr>
           <a:xfrm>
-            <a:off x="704088" y="2331720"/>
-            <a:ext cx="1828800" cy="1051560"/>
+            <a:off x="704088" y="1920240"/>
+            <a:ext cx="10789920" cy="9525"/>
           </a:xfrm>
           <a:prstGeom prst="rect">
             <a:avLst/>
           </a:prstGeom>
-          <a:noFill/>
+          <a:solidFill>
+            <a:srgbClr val="D6D7D8"/>
+          </a:solidFill>
           <a:ln>
             <a:noFill/>
           </a:ln>
@@ -52028,40 +52354,152 @@
           </a:fontRef>
         </p:style>
         <p:txBody>
-          <a:bodyPr rtlCol="0" anchor="ctr" wrap="square" lIns="109728" rIns="109728" tIns="73152" bIns="73152"/>
+          <a:bodyPr rtlCol="0" anchor="ctr"/>
           <a:lstStyle/>
           <a:p>
-            <a:pPr algn="l"/>
+            <a:pPr algn="ctr"/>
+          </a:p>
+        </p:txBody>
+      </p:sp>
+      <p:sp>
+        <p:nvSpPr>
+          <p:cNvPr id="7" name="TextBox 6"/>
+          <p:cNvSpPr txBox="1"/>
+          <p:nvPr/>
+        </p:nvSpPr>
+        <p:spPr>
+          <a:xfrm>
+            <a:off x="704088" y="1965960"/>
+            <a:ext cx="2103120" cy="457200"/>
+          </a:xfrm>
+          <a:prstGeom prst="rect">
+            <a:avLst/>
+          </a:prstGeom>
+          <a:noFill/>
+          <a:effectLst/>
+        </p:spPr>
+        <p:txBody>
+          <a:bodyPr wrap="square" anchor="ctr" lIns="36576" rIns="36576" tIns="27432" bIns="27432">
+            <a:spAutoFit/>
+          </a:bodyPr>
+          <a:lstStyle/>
+          <a:p>
+            <a:pPr algn="l">
+              <a:spcAft>
+                <a:spcPts val="0"/>
+              </a:spcAft>
+            </a:pPr>
             <a:r>
-              <a:rPr sz="1200" b="1">
+              <a:rPr sz="1200" b="0">
                 <a:solidFill>
                   <a:srgbClr val="5A6065"/>
                 </a:solidFill>
+                <a:latin typeface="Verdana"/>
               </a:rPr>
-              <a:t>Everyday</a:t>
+              <a:t>Everyday, whole</a:t>
             </a:r>
           </a:p>
         </p:txBody>
       </p:sp>
       <p:sp>
         <p:nvSpPr>
-          <p:cNvPr id="6" name="Rectangle 5"/>
+          <p:cNvPr id="8" name="TextBox 7"/>
+          <p:cNvSpPr txBox="1"/>
+          <p:nvPr/>
+        </p:nvSpPr>
+        <p:spPr>
+          <a:xfrm>
+            <a:off x="2898648" y="1965960"/>
+            <a:ext cx="7589520" cy="457200"/>
+          </a:xfrm>
+          <a:prstGeom prst="rect">
+            <a:avLst/>
+          </a:prstGeom>
+          <a:noFill/>
+          <a:effectLst/>
+        </p:spPr>
+        <p:txBody>
+          <a:bodyPr wrap="square" anchor="ctr" lIns="36576" rIns="36576" tIns="27432" bIns="27432">
+            <a:spAutoFit/>
+          </a:bodyPr>
+          <a:lstStyle/>
+          <a:p>
+            <a:pPr algn="l">
+              <a:spcAft>
+                <a:spcPts val="100"/>
+              </a:spcAft>
+            </a:pPr>
+            <a:r>
+              <a:rPr sz="1100" b="0">
+                <a:solidFill>
+                  <a:srgbClr val="212427"/>
+                </a:solidFill>
+                <a:latin typeface="Verdana"/>
+              </a:rPr>
+              <a:t>the whole sentence</a:t>
+            </a:r>
+          </a:p>
+        </p:txBody>
+      </p:sp>
+      <p:sp>
+        <p:nvSpPr>
+          <p:cNvPr id="9" name="TextBox 8"/>
+          <p:cNvSpPr txBox="1"/>
+          <p:nvPr/>
+        </p:nvSpPr>
+        <p:spPr>
+          <a:xfrm>
+            <a:off x="10579608" y="1965960"/>
+            <a:ext cx="914400" cy="457200"/>
+          </a:xfrm>
+          <a:prstGeom prst="rect">
+            <a:avLst/>
+          </a:prstGeom>
+          <a:noFill/>
+          <a:effectLst/>
+        </p:spPr>
+        <p:txBody>
+          <a:bodyPr wrap="square" anchor="ctr" lIns="36576" rIns="36576" tIns="27432" bIns="27432">
+            <a:spAutoFit/>
+          </a:bodyPr>
+          <a:lstStyle/>
+          <a:p>
+            <a:pPr algn="r">
+              <a:spcAft>
+                <a:spcPts val="0"/>
+              </a:spcAft>
+            </a:pPr>
+            <a:r>
+              <a:rPr sz="2600" b="0">
+                <a:solidFill>
+                  <a:srgbClr val="5A6065"/>
+                </a:solidFill>
+                <a:latin typeface="Verdana"/>
+              </a:rPr>
+              <a:t>1</a:t>
+            </a:r>
+          </a:p>
+        </p:txBody>
+      </p:sp>
+      <p:sp>
+        <p:nvSpPr>
+          <p:cNvPr id="10" name="Rectangle 9"/>
           <p:cNvSpPr/>
           <p:nvPr/>
         </p:nvSpPr>
         <p:spPr>
           <a:xfrm>
-            <a:off x="2514600" y="2441448"/>
-            <a:ext cx="3794760" cy="832103"/>
+            <a:off x="704088" y="2423160"/>
+            <a:ext cx="10789920" cy="9525"/>
           </a:xfrm>
           <a:prstGeom prst="rect">
             <a:avLst/>
           </a:prstGeom>
-          <a:noFill/>
-          <a:ln w="9525">
-            <a:solidFill>
-              <a:srgbClr val="212427"/>
-            </a:solidFill>
+          <a:solidFill>
+            <a:srgbClr val="D6D7D8"/>
+          </a:solidFill>
+          <a:ln>
+            <a:noFill/>
           </a:ln>
           <a:effectLst/>
         </p:spPr>
@@ -52080,40 +52518,168 @@
           </a:fontRef>
         </p:style>
         <p:txBody>
-          <a:bodyPr rtlCol="0" anchor="ctr" wrap="square" lIns="109728" rIns="109728" tIns="73152" bIns="73152"/>
+          <a:bodyPr rtlCol="0" anchor="ctr"/>
           <a:lstStyle/>
           <a:p>
             <a:pPr algn="ctr"/>
+          </a:p>
+        </p:txBody>
+      </p:sp>
+      <p:sp>
+        <p:nvSpPr>
+          <p:cNvPr id="11" name="TextBox 10"/>
+          <p:cNvSpPr txBox="1"/>
+          <p:nvPr/>
+        </p:nvSpPr>
+        <p:spPr>
+          <a:xfrm>
+            <a:off x="704088" y="2423160"/>
+            <a:ext cx="2103120" cy="731520"/>
+          </a:xfrm>
+          <a:prstGeom prst="rect">
+            <a:avLst/>
+          </a:prstGeom>
+          <a:noFill/>
+          <a:effectLst/>
+        </p:spPr>
+        <p:txBody>
+          <a:bodyPr wrap="square" anchor="ctr" lIns="36576" rIns="36576" tIns="27432" bIns="27432">
+            <a:spAutoFit/>
+          </a:bodyPr>
+          <a:lstStyle/>
+          <a:p>
+            <a:pPr algn="l">
+              <a:spcAft>
+                <a:spcPts val="0"/>
+              </a:spcAft>
+            </a:pPr>
             <a:r>
               <a:rPr sz="1200" b="0">
                 <a:solidFill>
-                  <a:srgbClr val="212427"/>
+                  <a:srgbClr val="5A6065"/>
                 </a:solidFill>
+                <a:latin typeface="Verdana"/>
               </a:rPr>
-              <a:t>When personnel changes occur ... employees.</a:t>
+              <a:t>Everyday, granular</a:t>
             </a:r>
           </a:p>
         </p:txBody>
       </p:sp>
       <p:sp>
         <p:nvSpPr>
-          <p:cNvPr id="7" name="Rectangle 6"/>
+          <p:cNvPr id="12" name="TextBox 11"/>
+          <p:cNvSpPr txBox="1"/>
+          <p:nvPr/>
+        </p:nvSpPr>
+        <p:spPr>
+          <a:xfrm>
+            <a:off x="2898648" y="2423160"/>
+            <a:ext cx="7589520" cy="731520"/>
+          </a:xfrm>
+          <a:prstGeom prst="rect">
+            <a:avLst/>
+          </a:prstGeom>
+          <a:noFill/>
+          <a:effectLst/>
+        </p:spPr>
+        <p:txBody>
+          <a:bodyPr wrap="square" anchor="ctr" lIns="36576" rIns="36576" tIns="27432" bIns="27432">
+            <a:spAutoFit/>
+          </a:bodyPr>
+          <a:lstStyle/>
+          <a:p>
+            <a:pPr algn="l">
+              <a:spcAft>
+                <a:spcPts val="100"/>
+              </a:spcAft>
+            </a:pPr>
+            <a:r>
+              <a:rPr sz="1100" b="0">
+                <a:solidFill>
+                  <a:srgbClr val="212427"/>
+                </a:solidFill>
+                <a:latin typeface="Verdana"/>
+              </a:rPr>
+              <a:t>1) Issuance and revocation of entry, access, and usage media must be documented</a:t>
+            </a:r>
+          </a:p>
+          <a:p>
+            <a:pPr algn="l">
+              <a:spcAft>
+                <a:spcPts val="100"/>
+              </a:spcAft>
+            </a:pPr>
+            <a:r>
+              <a:rPr sz="1100" b="0">
+                <a:solidFill>
+                  <a:srgbClr val="212427"/>
+                </a:solidFill>
+                <a:latin typeface="Verdana"/>
+              </a:rPr>
+              <a:t>2) and replaced immediately if compromised</a:t>
+            </a:r>
+          </a:p>
+        </p:txBody>
+      </p:sp>
+      <p:sp>
+        <p:nvSpPr>
+          <p:cNvPr id="13" name="TextBox 12"/>
+          <p:cNvSpPr txBox="1"/>
+          <p:nvPr/>
+        </p:nvSpPr>
+        <p:spPr>
+          <a:xfrm>
+            <a:off x="10579608" y="2423160"/>
+            <a:ext cx="914400" cy="731520"/>
+          </a:xfrm>
+          <a:prstGeom prst="rect">
+            <a:avLst/>
+          </a:prstGeom>
+          <a:noFill/>
+          <a:effectLst/>
+        </p:spPr>
+        <p:txBody>
+          <a:bodyPr wrap="square" anchor="ctr" lIns="36576" rIns="36576" tIns="27432" bIns="27432">
+            <a:spAutoFit/>
+          </a:bodyPr>
+          <a:lstStyle/>
+          <a:p>
+            <a:pPr algn="r">
+              <a:spcAft>
+                <a:spcPts val="0"/>
+              </a:spcAft>
+            </a:pPr>
+            <a:r>
+              <a:rPr sz="2600" b="0">
+                <a:solidFill>
+                  <a:srgbClr val="5A6065"/>
+                </a:solidFill>
+                <a:latin typeface="Verdana"/>
+              </a:rPr>
+              <a:t>2</a:t>
+            </a:r>
+          </a:p>
+        </p:txBody>
+      </p:sp>
+      <p:sp>
+        <p:nvSpPr>
+          <p:cNvPr id="14" name="Rectangle 13"/>
           <p:cNvSpPr/>
           <p:nvPr/>
         </p:nvSpPr>
         <p:spPr>
           <a:xfrm>
-            <a:off x="6400800" y="2441448"/>
-            <a:ext cx="3794760" cy="832103"/>
+            <a:off x="704088" y="3154680"/>
+            <a:ext cx="10789920" cy="9525"/>
           </a:xfrm>
           <a:prstGeom prst="rect">
             <a:avLst/>
           </a:prstGeom>
-          <a:noFill/>
-          <a:ln w="9525">
-            <a:solidFill>
-              <a:srgbClr val="212427"/>
-            </a:solidFill>
+          <a:solidFill>
+            <a:srgbClr val="D6D7D8"/>
+          </a:solidFill>
+          <a:ln>
+            <a:noFill/>
           </a:ln>
           <a:effectLst/>
         </p:spPr>
@@ -52132,36 +52698,278 @@
           </a:fontRef>
         </p:style>
         <p:txBody>
-          <a:bodyPr rtlCol="0" anchor="ctr" wrap="square" lIns="109728" rIns="109728" tIns="73152" bIns="73152"/>
+          <a:bodyPr rtlCol="0" anchor="ctr"/>
           <a:lstStyle/>
           <a:p>
             <a:pPr algn="ctr"/>
+          </a:p>
+        </p:txBody>
+      </p:sp>
+      <p:sp>
+        <p:nvSpPr>
+          <p:cNvPr id="15" name="TextBox 14"/>
+          <p:cNvSpPr txBox="1"/>
+          <p:nvPr/>
+        </p:nvSpPr>
+        <p:spPr>
+          <a:xfrm>
+            <a:off x="704088" y="3154680"/>
+            <a:ext cx="2103120" cy="1554480"/>
+          </a:xfrm>
+          <a:prstGeom prst="rect">
+            <a:avLst/>
+          </a:prstGeom>
+          <a:noFill/>
+          <a:effectLst/>
+        </p:spPr>
+        <p:txBody>
+          <a:bodyPr wrap="square" anchor="ctr" lIns="36576" rIns="36576" tIns="27432" bIns="27432">
+            <a:spAutoFit/>
+          </a:bodyPr>
+          <a:lstStyle/>
+          <a:p>
+            <a:pPr algn="l">
+              <a:spcAft>
+                <a:spcPts val="0"/>
+              </a:spcAft>
+            </a:pPr>
             <a:r>
               <a:rPr sz="1200" b="0">
                 <a:solidFill>
-                  <a:srgbClr val="212427"/>
+                  <a:srgbClr val="5A6065"/>
                 </a:solidFill>
+                <a:latin typeface="Verdana"/>
               </a:rPr>
-              <a:t>Permissions may only be granted ... fulfillment.</a:t>
+              <a:t>Logic</a:t>
             </a:r>
           </a:p>
         </p:txBody>
       </p:sp>
       <p:sp>
         <p:nvSpPr>
-          <p:cNvPr id="8" name="Rectangle 7"/>
+          <p:cNvPr id="16" name="TextBox 15"/>
+          <p:cNvSpPr txBox="1"/>
+          <p:nvPr/>
+        </p:nvSpPr>
+        <p:spPr>
+          <a:xfrm>
+            <a:off x="2898648" y="3154680"/>
+            <a:ext cx="7589520" cy="1554480"/>
+          </a:xfrm>
+          <a:prstGeom prst="rect">
+            <a:avLst/>
+          </a:prstGeom>
+          <a:noFill/>
+          <a:effectLst/>
+        </p:spPr>
+        <p:txBody>
+          <a:bodyPr wrap="square" anchor="ctr" lIns="36576" rIns="36576" tIns="27432" bIns="27432">
+            <a:spAutoFit/>
+          </a:bodyPr>
+          <a:lstStyle/>
+          <a:p>
+            <a:pPr algn="l">
+              <a:spcAft>
+                <a:spcPts val="100"/>
+              </a:spcAft>
+            </a:pPr>
+            <a:r>
+              <a:rPr sz="900" b="0">
+                <a:solidFill>
+                  <a:srgbClr val="212427"/>
+                </a:solidFill>
+                <a:latin typeface="Verdana"/>
+              </a:rPr>
+              <a:t>1) Issuance of entry media must be documented.</a:t>
+            </a:r>
+          </a:p>
+          <a:p>
+            <a:pPr algn="l">
+              <a:spcAft>
+                <a:spcPts val="100"/>
+              </a:spcAft>
+            </a:pPr>
+            <a:r>
+              <a:rPr sz="900" b="0">
+                <a:solidFill>
+                  <a:srgbClr val="212427"/>
+                </a:solidFill>
+                <a:latin typeface="Verdana"/>
+              </a:rPr>
+              <a:t>2) ... access media ...</a:t>
+            </a:r>
+          </a:p>
+          <a:p>
+            <a:pPr algn="l">
+              <a:spcAft>
+                <a:spcPts val="100"/>
+              </a:spcAft>
+            </a:pPr>
+            <a:r>
+              <a:rPr sz="900" b="0">
+                <a:solidFill>
+                  <a:srgbClr val="212427"/>
+                </a:solidFill>
+                <a:latin typeface="Verdana"/>
+              </a:rPr>
+              <a:t>3) ... usage media ...</a:t>
+            </a:r>
+          </a:p>
+          <a:p>
+            <a:pPr algn="l">
+              <a:spcAft>
+                <a:spcPts val="100"/>
+              </a:spcAft>
+            </a:pPr>
+            <a:r>
+              <a:rPr sz="900" b="0">
+                <a:solidFill>
+                  <a:srgbClr val="212427"/>
+                </a:solidFill>
+                <a:latin typeface="Verdana"/>
+              </a:rPr>
+              <a:t>4) Revocation of entry media must be documented.</a:t>
+            </a:r>
+          </a:p>
+          <a:p>
+            <a:pPr algn="l">
+              <a:spcAft>
+                <a:spcPts val="100"/>
+              </a:spcAft>
+            </a:pPr>
+            <a:r>
+              <a:rPr sz="900" b="0">
+                <a:solidFill>
+                  <a:srgbClr val="212427"/>
+                </a:solidFill>
+                <a:latin typeface="Verdana"/>
+              </a:rPr>
+              <a:t>5) ... access media ...</a:t>
+            </a:r>
+          </a:p>
+          <a:p>
+            <a:pPr algn="l">
+              <a:spcAft>
+                <a:spcPts val="100"/>
+              </a:spcAft>
+            </a:pPr>
+            <a:r>
+              <a:rPr sz="900" b="0">
+                <a:solidFill>
+                  <a:srgbClr val="212427"/>
+                </a:solidFill>
+                <a:latin typeface="Verdana"/>
+              </a:rPr>
+              <a:t>6) ... usage media ...</a:t>
+            </a:r>
+          </a:p>
+          <a:p>
+            <a:pPr algn="l">
+              <a:spcAft>
+                <a:spcPts val="100"/>
+              </a:spcAft>
+            </a:pPr>
+            <a:r>
+              <a:rPr sz="900" b="0">
+                <a:solidFill>
+                  <a:srgbClr val="212427"/>
+                </a:solidFill>
+                <a:latin typeface="Verdana"/>
+              </a:rPr>
+              <a:t>7) Entry media must be replaced immediately if compromised.</a:t>
+            </a:r>
+          </a:p>
+          <a:p>
+            <a:pPr algn="l">
+              <a:spcAft>
+                <a:spcPts val="100"/>
+              </a:spcAft>
+            </a:pPr>
+            <a:r>
+              <a:rPr sz="900" b="0">
+                <a:solidFill>
+                  <a:srgbClr val="212427"/>
+                </a:solidFill>
+                <a:latin typeface="Verdana"/>
+              </a:rPr>
+              <a:t>8) Access media ...</a:t>
+            </a:r>
+          </a:p>
+          <a:p>
+            <a:pPr algn="l">
+              <a:spcAft>
+                <a:spcPts val="100"/>
+              </a:spcAft>
+            </a:pPr>
+            <a:r>
+              <a:rPr sz="900" b="0">
+                <a:solidFill>
+                  <a:srgbClr val="212427"/>
+                </a:solidFill>
+                <a:latin typeface="Verdana"/>
+              </a:rPr>
+              <a:t>9) Usage media ...</a:t>
+            </a:r>
+          </a:p>
+        </p:txBody>
+      </p:sp>
+      <p:sp>
+        <p:nvSpPr>
+          <p:cNvPr id="17" name="TextBox 16"/>
+          <p:cNvSpPr txBox="1"/>
+          <p:nvPr/>
+        </p:nvSpPr>
+        <p:spPr>
+          <a:xfrm>
+            <a:off x="10579608" y="3154680"/>
+            <a:ext cx="914400" cy="1554480"/>
+          </a:xfrm>
+          <a:prstGeom prst="rect">
+            <a:avLst/>
+          </a:prstGeom>
+          <a:noFill/>
+          <a:effectLst/>
+        </p:spPr>
+        <p:txBody>
+          <a:bodyPr wrap="square" anchor="ctr" lIns="36576" rIns="36576" tIns="27432" bIns="27432">
+            <a:spAutoFit/>
+          </a:bodyPr>
+          <a:lstStyle/>
+          <a:p>
+            <a:pPr algn="r">
+              <a:spcAft>
+                <a:spcPts val="0"/>
+              </a:spcAft>
+            </a:pPr>
+            <a:r>
+              <a:rPr sz="2600" b="0">
+                <a:solidFill>
+                  <a:srgbClr val="5A6065"/>
+                </a:solidFill>
+                <a:latin typeface="Verdana"/>
+              </a:rPr>
+              <a:t>9</a:t>
+            </a:r>
+          </a:p>
+        </p:txBody>
+      </p:sp>
+      <p:sp>
+        <p:nvSpPr>
+          <p:cNvPr id="18" name="Rectangle 17"/>
           <p:cNvSpPr/>
           <p:nvPr/>
         </p:nvSpPr>
         <p:spPr>
           <a:xfrm>
-            <a:off x="10332720" y="2331720"/>
-            <a:ext cx="1188720" cy="1051560"/>
+            <a:off x="704088" y="4709160"/>
+            <a:ext cx="10789920" cy="9525"/>
           </a:xfrm>
           <a:prstGeom prst="rect">
             <a:avLst/>
           </a:prstGeom>
-          <a:noFill/>
+          <a:solidFill>
+            <a:srgbClr val="D6D7D8"/>
+          </a:solidFill>
           <a:ln>
             <a:noFill/>
           </a:ln>
@@ -52182,36 +52990,182 @@
           </a:fontRef>
         </p:style>
         <p:txBody>
-          <a:bodyPr rtlCol="0" anchor="ctr" wrap="square" lIns="109728" rIns="109728" tIns="73152" bIns="73152"/>
+          <a:bodyPr rtlCol="0" anchor="ctr"/>
           <a:lstStyle/>
           <a:p>
-            <a:pPr algn="r"/>
+            <a:pPr algn="ctr"/>
+          </a:p>
+        </p:txBody>
+      </p:sp>
+      <p:sp>
+        <p:nvSpPr>
+          <p:cNvPr id="19" name="TextBox 18"/>
+          <p:cNvSpPr txBox="1"/>
+          <p:nvPr/>
+        </p:nvSpPr>
+        <p:spPr>
+          <a:xfrm>
+            <a:off x="704088" y="4709160"/>
+            <a:ext cx="2103120" cy="960120"/>
+          </a:xfrm>
+          <a:prstGeom prst="rect">
+            <a:avLst/>
+          </a:prstGeom>
+          <a:noFill/>
+          <a:effectLst/>
+        </p:spPr>
+        <p:txBody>
+          <a:bodyPr wrap="square" anchor="ctr" lIns="36576" rIns="36576" tIns="27432" bIns="27432">
+            <a:spAutoFit/>
+          </a:bodyPr>
+          <a:lstStyle/>
+          <a:p>
+            <a:pPr algn="l">
+              <a:spcAft>
+                <a:spcPts val="0"/>
+              </a:spcAft>
+            </a:pPr>
             <a:r>
-              <a:rPr sz="2400" b="1">
+              <a:rPr sz="1200" b="0">
                 <a:solidFill>
-                  <a:srgbClr val="212427"/>
+                  <a:srgbClr val="5A6065"/>
                 </a:solidFill>
+                <a:latin typeface="Verdana"/>
               </a:rPr>
-              <a:t>2</a:t>
+              <a:t>Working definition</a:t>
             </a:r>
           </a:p>
         </p:txBody>
       </p:sp>
       <p:sp>
         <p:nvSpPr>
-          <p:cNvPr id="9" name="Rectangle 8"/>
+          <p:cNvPr id="20" name="TextBox 19"/>
+          <p:cNvSpPr txBox="1"/>
+          <p:nvPr/>
+        </p:nvSpPr>
+        <p:spPr>
+          <a:xfrm>
+            <a:off x="2898648" y="4709160"/>
+            <a:ext cx="7589520" cy="960120"/>
+          </a:xfrm>
+          <a:prstGeom prst="rect">
+            <a:avLst/>
+          </a:prstGeom>
+          <a:noFill/>
+          <a:effectLst/>
+        </p:spPr>
+        <p:txBody>
+          <a:bodyPr wrap="square" anchor="ctr" lIns="36576" rIns="36576" tIns="27432" bIns="27432">
+            <a:spAutoFit/>
+          </a:bodyPr>
+          <a:lstStyle/>
+          <a:p>
+            <a:pPr algn="l">
+              <a:spcAft>
+                <a:spcPts val="100"/>
+              </a:spcAft>
+            </a:pPr>
+            <a:r>
+              <a:rPr sz="1100" b="0">
+                <a:solidFill>
+                  <a:srgbClr val="212427"/>
+                </a:solidFill>
+                <a:latin typeface="Verdana"/>
+              </a:rPr>
+              <a:t>1) Issuance of entry, access and usage media must be documented.</a:t>
+            </a:r>
+          </a:p>
+          <a:p>
+            <a:pPr algn="l">
+              <a:spcAft>
+                <a:spcPts val="100"/>
+              </a:spcAft>
+            </a:pPr>
+            <a:r>
+              <a:rPr sz="1100" b="0">
+                <a:solidFill>
+                  <a:srgbClr val="212427"/>
+                </a:solidFill>
+                <a:latin typeface="Verdana"/>
+              </a:rPr>
+              <a:t>2) Revocation of entry, access and usage media must be documented.</a:t>
+            </a:r>
+          </a:p>
+          <a:p>
+            <a:pPr algn="l">
+              <a:spcAft>
+                <a:spcPts val="100"/>
+              </a:spcAft>
+            </a:pPr>
+            <a:r>
+              <a:rPr sz="1100" b="0">
+                <a:solidFill>
+                  <a:srgbClr val="212427"/>
+                </a:solidFill>
+                <a:latin typeface="Verdana"/>
+              </a:rPr>
+              <a:t>3) Entry, access and usage media must be replaced immediately if compromised.</a:t>
+            </a:r>
+          </a:p>
+        </p:txBody>
+      </p:sp>
+      <p:sp>
+        <p:nvSpPr>
+          <p:cNvPr id="21" name="TextBox 20"/>
+          <p:cNvSpPr txBox="1"/>
+          <p:nvPr/>
+        </p:nvSpPr>
+        <p:spPr>
+          <a:xfrm>
+            <a:off x="10579608" y="4709160"/>
+            <a:ext cx="914400" cy="960120"/>
+          </a:xfrm>
+          <a:prstGeom prst="rect">
+            <a:avLst/>
+          </a:prstGeom>
+          <a:noFill/>
+          <a:effectLst/>
+        </p:spPr>
+        <p:txBody>
+          <a:bodyPr wrap="square" anchor="ctr" lIns="36576" rIns="36576" tIns="27432" bIns="27432">
+            <a:spAutoFit/>
+          </a:bodyPr>
+          <a:lstStyle/>
+          <a:p>
+            <a:pPr algn="r">
+              <a:spcAft>
+                <a:spcPts val="0"/>
+              </a:spcAft>
+            </a:pPr>
+            <a:r>
+              <a:rPr sz="2600" b="0">
+                <a:solidFill>
+                  <a:srgbClr val="5A6065"/>
+                </a:solidFill>
+                <a:latin typeface="Verdana"/>
+              </a:rPr>
+              <a:t>3</a:t>
+            </a:r>
+          </a:p>
+        </p:txBody>
+      </p:sp>
+      <p:sp>
+        <p:nvSpPr>
+          <p:cNvPr id="22" name="Rectangle 21"/>
           <p:cNvSpPr/>
           <p:nvPr/>
         </p:nvSpPr>
         <p:spPr>
           <a:xfrm>
-            <a:off x="704088" y="3493008"/>
-            <a:ext cx="1828800" cy="1051560"/>
+            <a:off x="704088" y="5669280"/>
+            <a:ext cx="10789920" cy="9525"/>
           </a:xfrm>
           <a:prstGeom prst="rect">
             <a:avLst/>
           </a:prstGeom>
-          <a:noFill/>
+          <a:solidFill>
+            <a:srgbClr val="D6D7D8"/>
+          </a:solidFill>
           <a:ln>
             <a:noFill/>
           </a:ln>
@@ -52232,636 +53186,10 @@
           </a:fontRef>
         </p:style>
         <p:txBody>
-          <a:bodyPr rtlCol="0" anchor="ctr" wrap="square" lIns="109728" rIns="109728" tIns="73152" bIns="73152"/>
-          <a:lstStyle/>
-          <a:p>
-            <a:pPr algn="l"/>
-            <a:r>
-              <a:rPr sz="1200" b="1">
-                <a:solidFill>
-                  <a:srgbClr val="5A6065"/>
-                </a:solidFill>
-              </a:rPr>
-              <a:t>Logic</a:t>
-            </a:r>
-          </a:p>
-        </p:txBody>
-      </p:sp>
-      <p:sp>
-        <p:nvSpPr>
-          <p:cNvPr id="10" name="Rectangle 9"/>
-          <p:cNvSpPr/>
-          <p:nvPr/>
-        </p:nvSpPr>
-        <p:spPr>
-          <a:xfrm>
-            <a:off x="2514600" y="3602736"/>
-            <a:ext cx="1463040" cy="832103"/>
-          </a:xfrm>
-          <a:prstGeom prst="rect">
-            <a:avLst/>
-          </a:prstGeom>
-          <a:noFill/>
-          <a:ln w="9525">
-            <a:solidFill>
-              <a:srgbClr val="212427"/>
-            </a:solidFill>
-          </a:ln>
-          <a:effectLst/>
-        </p:spPr>
-        <p:style>
-          <a:lnRef idx="1">
-            <a:schemeClr val="accent1"/>
-          </a:lnRef>
-          <a:fillRef idx="3">
-            <a:schemeClr val="accent1"/>
-          </a:fillRef>
-          <a:effectRef idx="2">
-            <a:schemeClr val="accent1"/>
-          </a:effectRef>
-          <a:fontRef idx="minor">
-            <a:schemeClr val="lt1"/>
-          </a:fontRef>
-        </p:style>
-        <p:txBody>
-          <a:bodyPr rtlCol="0" anchor="ctr" wrap="square" lIns="109728" rIns="109728" tIns="73152" bIns="73152"/>
+          <a:bodyPr rtlCol="0" anchor="ctr"/>
           <a:lstStyle/>
           <a:p>
             <a:pPr algn="ctr"/>
-            <a:r>
-              <a:rPr sz="1000" b="0">
-                <a:solidFill>
-                  <a:srgbClr val="212427"/>
-                </a:solidFill>
-              </a:rPr>
-              <a:t>remove user IDs</a:t>
-            </a:r>
-          </a:p>
-        </p:txBody>
-      </p:sp>
-      <p:sp>
-        <p:nvSpPr>
-          <p:cNvPr id="11" name="Rectangle 10"/>
-          <p:cNvSpPr/>
-          <p:nvPr/>
-        </p:nvSpPr>
-        <p:spPr>
-          <a:xfrm>
-            <a:off x="4069080" y="3602736"/>
-            <a:ext cx="1463040" cy="832103"/>
-          </a:xfrm>
-          <a:prstGeom prst="rect">
-            <a:avLst/>
-          </a:prstGeom>
-          <a:noFill/>
-          <a:ln w="9525">
-            <a:solidFill>
-              <a:srgbClr val="212427"/>
-            </a:solidFill>
-          </a:ln>
-          <a:effectLst/>
-        </p:spPr>
-        <p:style>
-          <a:lnRef idx="1">
-            <a:schemeClr val="accent1"/>
-          </a:lnRef>
-          <a:fillRef idx="3">
-            <a:schemeClr val="accent1"/>
-          </a:fillRef>
-          <a:effectRef idx="2">
-            <a:schemeClr val="accent1"/>
-          </a:effectRef>
-          <a:fontRef idx="minor">
-            <a:schemeClr val="lt1"/>
-          </a:fontRef>
-        </p:style>
-        <p:txBody>
-          <a:bodyPr rtlCol="0" anchor="ctr" wrap="square" lIns="109728" rIns="109728" tIns="73152" bIns="73152"/>
-          <a:lstStyle/>
-          <a:p>
-            <a:pPr algn="ctr"/>
-            <a:r>
-              <a:rPr sz="1000" b="0">
-                <a:solidFill>
-                  <a:srgbClr val="212427"/>
-                </a:solidFill>
-              </a:rPr>
-              <a:t>remove permissions</a:t>
-            </a:r>
-          </a:p>
-        </p:txBody>
-      </p:sp>
-      <p:sp>
-        <p:nvSpPr>
-          <p:cNvPr id="12" name="Rectangle 11"/>
-          <p:cNvSpPr/>
-          <p:nvPr/>
-        </p:nvSpPr>
-        <p:spPr>
-          <a:xfrm>
-            <a:off x="5623560" y="3602736"/>
-            <a:ext cx="1463040" cy="832103"/>
-          </a:xfrm>
-          <a:prstGeom prst="rect">
-            <a:avLst/>
-          </a:prstGeom>
-          <a:noFill/>
-          <a:ln w="9525">
-            <a:solidFill>
-              <a:srgbClr val="212427"/>
-            </a:solidFill>
-          </a:ln>
-          <a:effectLst/>
-        </p:spPr>
-        <p:style>
-          <a:lnRef idx="1">
-            <a:schemeClr val="accent1"/>
-          </a:lnRef>
-          <a:fillRef idx="3">
-            <a:schemeClr val="accent1"/>
-          </a:fillRef>
-          <a:effectRef idx="2">
-            <a:schemeClr val="accent1"/>
-          </a:effectRef>
-          <a:fontRef idx="minor">
-            <a:schemeClr val="lt1"/>
-          </a:fontRef>
-        </p:style>
-        <p:txBody>
-          <a:bodyPr rtlCol="0" anchor="ctr" wrap="square" lIns="109728" rIns="109728" tIns="73152" bIns="73152"/>
-          <a:lstStyle/>
-          <a:p>
-            <a:pPr algn="ctr"/>
-            <a:r>
-              <a:rPr sz="1000" b="0">
-                <a:solidFill>
-                  <a:srgbClr val="212427"/>
-                </a:solidFill>
-              </a:rPr>
-              <a:t>promptly</a:t>
-            </a:r>
-          </a:p>
-        </p:txBody>
-      </p:sp>
-      <p:sp>
-        <p:nvSpPr>
-          <p:cNvPr id="13" name="Rectangle 12"/>
-          <p:cNvSpPr/>
-          <p:nvPr/>
-        </p:nvSpPr>
-        <p:spPr>
-          <a:xfrm>
-            <a:off x="7178040" y="3602736"/>
-            <a:ext cx="1463040" cy="832103"/>
-          </a:xfrm>
-          <a:prstGeom prst="rect">
-            <a:avLst/>
-          </a:prstGeom>
-          <a:noFill/>
-          <a:ln w="9525">
-            <a:solidFill>
-              <a:srgbClr val="212427"/>
-            </a:solidFill>
-          </a:ln>
-          <a:effectLst/>
-        </p:spPr>
-        <p:style>
-          <a:lnRef idx="1">
-            <a:schemeClr val="accent1"/>
-          </a:lnRef>
-          <a:fillRef idx="3">
-            <a:schemeClr val="accent1"/>
-          </a:fillRef>
-          <a:effectRef idx="2">
-            <a:schemeClr val="accent1"/>
-          </a:effectRef>
-          <a:fontRef idx="minor">
-            <a:schemeClr val="lt1"/>
-          </a:fontRef>
-        </p:style>
-        <p:txBody>
-          <a:bodyPr rtlCol="0" anchor="ctr" wrap="square" lIns="109728" rIns="109728" tIns="73152" bIns="73152"/>
-          <a:lstStyle/>
-          <a:p>
-            <a:pPr algn="ctr"/>
-            <a:r>
-              <a:rPr sz="1000" b="0">
-                <a:solidFill>
-                  <a:srgbClr val="212427"/>
-                </a:solidFill>
-              </a:rPr>
-              <a:t>purpose: avoid unauthorized access</a:t>
-            </a:r>
-          </a:p>
-        </p:txBody>
-      </p:sp>
-      <p:sp>
-        <p:nvSpPr>
-          <p:cNvPr id="14" name="Rectangle 13"/>
-          <p:cNvSpPr/>
-          <p:nvPr/>
-        </p:nvSpPr>
-        <p:spPr>
-          <a:xfrm>
-            <a:off x="8732520" y="3602736"/>
-            <a:ext cx="1463040" cy="832103"/>
-          </a:xfrm>
-          <a:prstGeom prst="rect">
-            <a:avLst/>
-          </a:prstGeom>
-          <a:noFill/>
-          <a:ln w="9525">
-            <a:solidFill>
-              <a:srgbClr val="212427"/>
-            </a:solidFill>
-          </a:ln>
-          <a:effectLst/>
-        </p:spPr>
-        <p:style>
-          <a:lnRef idx="1">
-            <a:schemeClr val="accent1"/>
-          </a:lnRef>
-          <a:fillRef idx="3">
-            <a:schemeClr val="accent1"/>
-          </a:fillRef>
-          <a:effectRef idx="2">
-            <a:schemeClr val="accent1"/>
-          </a:effectRef>
-          <a:fontRef idx="minor">
-            <a:schemeClr val="lt1"/>
-          </a:fontRef>
-        </p:style>
-        <p:txBody>
-          <a:bodyPr rtlCol="0" anchor="ctr" wrap="square" lIns="109728" rIns="109728" tIns="73152" bIns="73152"/>
-          <a:lstStyle/>
-          <a:p>
-            <a:pPr algn="ctr"/>
-            <a:r>
-              <a:rPr sz="1000" b="0">
-                <a:solidFill>
-                  <a:srgbClr val="212427"/>
-                </a:solidFill>
-              </a:rPr>
-              <a:t>permissions only as needed</a:t>
-            </a:r>
-          </a:p>
-        </p:txBody>
-      </p:sp>
-      <p:sp>
-        <p:nvSpPr>
-          <p:cNvPr id="15" name="Rectangle 14"/>
-          <p:cNvSpPr/>
-          <p:nvPr/>
-        </p:nvSpPr>
-        <p:spPr>
-          <a:xfrm>
-            <a:off x="10332720" y="3493008"/>
-            <a:ext cx="1188720" cy="1051560"/>
-          </a:xfrm>
-          <a:prstGeom prst="rect">
-            <a:avLst/>
-          </a:prstGeom>
-          <a:noFill/>
-          <a:ln>
-            <a:noFill/>
-          </a:ln>
-          <a:effectLst/>
-        </p:spPr>
-        <p:style>
-          <a:lnRef idx="1">
-            <a:schemeClr val="accent1"/>
-          </a:lnRef>
-          <a:fillRef idx="3">
-            <a:schemeClr val="accent1"/>
-          </a:fillRef>
-          <a:effectRef idx="2">
-            <a:schemeClr val="accent1"/>
-          </a:effectRef>
-          <a:fontRef idx="minor">
-            <a:schemeClr val="lt1"/>
-          </a:fontRef>
-        </p:style>
-        <p:txBody>
-          <a:bodyPr rtlCol="0" anchor="ctr" wrap="square" lIns="109728" rIns="109728" tIns="73152" bIns="73152"/>
-          <a:lstStyle/>
-          <a:p>
-            <a:pPr algn="r"/>
-            <a:r>
-              <a:rPr sz="2400" b="1">
-                <a:solidFill>
-                  <a:srgbClr val="212427"/>
-                </a:solidFill>
-              </a:rPr>
-              <a:t>4 to 5</a:t>
-            </a:r>
-          </a:p>
-        </p:txBody>
-      </p:sp>
-      <p:sp>
-        <p:nvSpPr>
-          <p:cNvPr id="16" name="Rectangle 15"/>
-          <p:cNvSpPr/>
-          <p:nvPr/>
-        </p:nvSpPr>
-        <p:spPr>
-          <a:xfrm>
-            <a:off x="704088" y="4654296"/>
-            <a:ext cx="1828800" cy="1051560"/>
-          </a:xfrm>
-          <a:prstGeom prst="rect">
-            <a:avLst/>
-          </a:prstGeom>
-          <a:noFill/>
-          <a:ln>
-            <a:noFill/>
-          </a:ln>
-          <a:effectLst/>
-        </p:spPr>
-        <p:style>
-          <a:lnRef idx="1">
-            <a:schemeClr val="accent1"/>
-          </a:lnRef>
-          <a:fillRef idx="3">
-            <a:schemeClr val="accent1"/>
-          </a:fillRef>
-          <a:effectRef idx="2">
-            <a:schemeClr val="accent1"/>
-          </a:effectRef>
-          <a:fontRef idx="minor">
-            <a:schemeClr val="lt1"/>
-          </a:fontRef>
-        </p:style>
-        <p:txBody>
-          <a:bodyPr rtlCol="0" anchor="ctr" wrap="square" lIns="109728" rIns="109728" tIns="73152" bIns="73152"/>
-          <a:lstStyle/>
-          <a:p>
-            <a:pPr algn="l"/>
-            <a:r>
-              <a:rPr sz="1200" b="1">
-                <a:solidFill>
-                  <a:srgbClr val="5A6065"/>
-                </a:solidFill>
-              </a:rPr>
-              <a:t>Working definition</a:t>
-            </a:r>
-          </a:p>
-        </p:txBody>
-      </p:sp>
-      <p:sp>
-        <p:nvSpPr>
-          <p:cNvPr id="17" name="Rectangle 16"/>
-          <p:cNvSpPr/>
-          <p:nvPr/>
-        </p:nvSpPr>
-        <p:spPr>
-          <a:xfrm>
-            <a:off x="2514600" y="4764024"/>
-            <a:ext cx="1851660" cy="832103"/>
-          </a:xfrm>
-          <a:prstGeom prst="rect">
-            <a:avLst/>
-          </a:prstGeom>
-          <a:noFill/>
-          <a:ln w="9525">
-            <a:solidFill>
-              <a:srgbClr val="212427"/>
-            </a:solidFill>
-          </a:ln>
-          <a:effectLst/>
-        </p:spPr>
-        <p:style>
-          <a:lnRef idx="1">
-            <a:schemeClr val="accent1"/>
-          </a:lnRef>
-          <a:fillRef idx="3">
-            <a:schemeClr val="accent1"/>
-          </a:fillRef>
-          <a:effectRef idx="2">
-            <a:schemeClr val="accent1"/>
-          </a:effectRef>
-          <a:fontRef idx="minor">
-            <a:schemeClr val="lt1"/>
-          </a:fontRef>
-        </p:style>
-        <p:txBody>
-          <a:bodyPr rtlCol="0" anchor="ctr" wrap="square" lIns="109728" rIns="109728" tIns="73152" bIns="73152"/>
-          <a:lstStyle/>
-          <a:p>
-            <a:pPr algn="ctr"/>
-            <a:r>
-              <a:rPr sz="1100" b="0">
-                <a:solidFill>
-                  <a:srgbClr val="212427"/>
-                </a:solidFill>
-              </a:rPr>
-              <a:t>remove user IDs and permissions</a:t>
-            </a:r>
-          </a:p>
-        </p:txBody>
-      </p:sp>
-      <p:sp>
-        <p:nvSpPr>
-          <p:cNvPr id="18" name="Rectangle 17"/>
-          <p:cNvSpPr/>
-          <p:nvPr/>
-        </p:nvSpPr>
-        <p:spPr>
-          <a:xfrm>
-            <a:off x="4457700" y="4764024"/>
-            <a:ext cx="1851660" cy="832103"/>
-          </a:xfrm>
-          <a:prstGeom prst="rect">
-            <a:avLst/>
-          </a:prstGeom>
-          <a:noFill/>
-          <a:ln w="9525">
-            <a:solidFill>
-              <a:srgbClr val="212427"/>
-            </a:solidFill>
-          </a:ln>
-          <a:effectLst/>
-        </p:spPr>
-        <p:style>
-          <a:lnRef idx="1">
-            <a:schemeClr val="accent1"/>
-          </a:lnRef>
-          <a:fillRef idx="3">
-            <a:schemeClr val="accent1"/>
-          </a:fillRef>
-          <a:effectRef idx="2">
-            <a:schemeClr val="accent1"/>
-          </a:effectRef>
-          <a:fontRef idx="minor">
-            <a:schemeClr val="lt1"/>
-          </a:fontRef>
-        </p:style>
-        <p:txBody>
-          <a:bodyPr rtlCol="0" anchor="ctr" wrap="square" lIns="109728" rIns="109728" tIns="73152" bIns="73152"/>
-          <a:lstStyle/>
-          <a:p>
-            <a:pPr algn="ctr"/>
-            <a:r>
-              <a:rPr sz="1100" b="0">
-                <a:solidFill>
-                  <a:srgbClr val="212427"/>
-                </a:solidFill>
-              </a:rPr>
-              <a:t>promptly</a:t>
-            </a:r>
-          </a:p>
-        </p:txBody>
-      </p:sp>
-      <p:sp>
-        <p:nvSpPr>
-          <p:cNvPr id="19" name="Rectangle 18"/>
-          <p:cNvSpPr/>
-          <p:nvPr/>
-        </p:nvSpPr>
-        <p:spPr>
-          <a:xfrm>
-            <a:off x="6400800" y="4764024"/>
-            <a:ext cx="1851660" cy="832103"/>
-          </a:xfrm>
-          <a:prstGeom prst="rect">
-            <a:avLst/>
-          </a:prstGeom>
-          <a:noFill/>
-          <a:ln w="9525">
-            <a:solidFill>
-              <a:srgbClr val="212427"/>
-            </a:solidFill>
-          </a:ln>
-          <a:effectLst/>
-        </p:spPr>
-        <p:style>
-          <a:lnRef idx="1">
-            <a:schemeClr val="accent1"/>
-          </a:lnRef>
-          <a:fillRef idx="3">
-            <a:schemeClr val="accent1"/>
-          </a:fillRef>
-          <a:effectRef idx="2">
-            <a:schemeClr val="accent1"/>
-          </a:effectRef>
-          <a:fontRef idx="minor">
-            <a:schemeClr val="lt1"/>
-          </a:fontRef>
-        </p:style>
-        <p:txBody>
-          <a:bodyPr rtlCol="0" anchor="ctr" wrap="square" lIns="109728" rIns="109728" tIns="73152" bIns="73152"/>
-          <a:lstStyle/>
-          <a:p>
-            <a:pPr algn="ctr"/>
-            <a:r>
-              <a:rPr sz="1100" b="0">
-                <a:solidFill>
-                  <a:srgbClr val="212427"/>
-                </a:solidFill>
-              </a:rPr>
-              <a:t>purpose: avoid unauthorized access</a:t>
-            </a:r>
-          </a:p>
-        </p:txBody>
-      </p:sp>
-      <p:sp>
-        <p:nvSpPr>
-          <p:cNvPr id="20" name="Rectangle 19"/>
-          <p:cNvSpPr/>
-          <p:nvPr/>
-        </p:nvSpPr>
-        <p:spPr>
-          <a:xfrm>
-            <a:off x="8343900" y="4764024"/>
-            <a:ext cx="1851660" cy="832103"/>
-          </a:xfrm>
-          <a:prstGeom prst="rect">
-            <a:avLst/>
-          </a:prstGeom>
-          <a:noFill/>
-          <a:ln w="9525">
-            <a:solidFill>
-              <a:srgbClr val="212427"/>
-            </a:solidFill>
-          </a:ln>
-          <a:effectLst/>
-        </p:spPr>
-        <p:style>
-          <a:lnRef idx="1">
-            <a:schemeClr val="accent1"/>
-          </a:lnRef>
-          <a:fillRef idx="3">
-            <a:schemeClr val="accent1"/>
-          </a:fillRef>
-          <a:effectRef idx="2">
-            <a:schemeClr val="accent1"/>
-          </a:effectRef>
-          <a:fontRef idx="minor">
-            <a:schemeClr val="lt1"/>
-          </a:fontRef>
-        </p:style>
-        <p:txBody>
-          <a:bodyPr rtlCol="0" anchor="ctr" wrap="square" lIns="109728" rIns="109728" tIns="73152" bIns="73152"/>
-          <a:lstStyle/>
-          <a:p>
-            <a:pPr algn="ctr"/>
-            <a:r>
-              <a:rPr sz="1100" b="0">
-                <a:solidFill>
-                  <a:srgbClr val="212427"/>
-                </a:solidFill>
-              </a:rPr>
-              <a:t>permissions only as needed</a:t>
-            </a:r>
-          </a:p>
-        </p:txBody>
-      </p:sp>
-      <p:sp>
-        <p:nvSpPr>
-          <p:cNvPr id="21" name="Rectangle 20"/>
-          <p:cNvSpPr/>
-          <p:nvPr/>
-        </p:nvSpPr>
-        <p:spPr>
-          <a:xfrm>
-            <a:off x="10332720" y="4654296"/>
-            <a:ext cx="1188720" cy="1051560"/>
-          </a:xfrm>
-          <a:prstGeom prst="rect">
-            <a:avLst/>
-          </a:prstGeom>
-          <a:noFill/>
-          <a:ln>
-            <a:noFill/>
-          </a:ln>
-          <a:effectLst/>
-        </p:spPr>
-        <p:style>
-          <a:lnRef idx="1">
-            <a:schemeClr val="accent1"/>
-          </a:lnRef>
-          <a:fillRef idx="3">
-            <a:schemeClr val="accent1"/>
-          </a:fillRef>
-          <a:effectRef idx="2">
-            <a:schemeClr val="accent1"/>
-          </a:effectRef>
-          <a:fontRef idx="minor">
-            <a:schemeClr val="lt1"/>
-          </a:fontRef>
-        </p:style>
-        <p:txBody>
-          <a:bodyPr rtlCol="0" anchor="ctr" wrap="square" lIns="109728" rIns="109728" tIns="73152" bIns="73152"/>
-          <a:lstStyle/>
-          <a:p>
-            <a:pPr algn="r"/>
-            <a:r>
-              <a:rPr sz="2400" b="1">
-                <a:solidFill>
-                  <a:srgbClr val="212427"/>
-                </a:solidFill>
-              </a:rPr>
-              <a:t>4</a:t>
-            </a:r>
           </a:p>
         </p:txBody>
       </p:sp>
@@ -52893,12 +53221,20 @@
             <p:ph type="title"/>
           </p:nvPr>
         </p:nvSpPr>
-        <p:spPr/>
+        <p:spPr>
+          <a:effectLst/>
+        </p:spPr>
         <p:txBody>
           <a:bodyPr/>
           <a:lstStyle/>
           <a:p>
             <a:r>
+              <a:rPr b="0" sz="2800" cap="none">
+                <a:solidFill>
+                  <a:srgbClr val="212427"/>
+                </a:solidFill>
+                <a:latin typeface="Verdana"/>
+              </a:rPr>
               <a:t>Guess the number, round 2</a:t>
             </a:r>
           </a:p>
@@ -52912,14 +53248,14 @@
         </p:nvSpPr>
         <p:spPr>
           <a:xfrm>
-            <a:off x="704088" y="1188720"/>
-            <a:ext cx="10789920" cy="868680"/>
+            <a:off x="704088" y="1115568"/>
+            <a:ext cx="609600" cy="38100"/>
           </a:xfrm>
           <a:prstGeom prst="rect">
             <a:avLst/>
           </a:prstGeom>
           <a:solidFill>
-            <a:srgbClr val="FDE9BF"/>
+            <a:srgbClr val="B1063A"/>
           </a:solidFill>
           <a:ln>
             <a:noFill/>
@@ -52941,36 +53277,158 @@
           </a:fontRef>
         </p:style>
         <p:txBody>
-          <a:bodyPr rtlCol="0" anchor="ctr" wrap="square" lIns="109728" rIns="109728" tIns="73152" bIns="73152"/>
+          <a:bodyPr rtlCol="0" anchor="ctr"/>
           <a:lstStyle/>
           <a:p>
-            <a:pPr algn="l"/>
+            <a:pPr algn="ctr"/>
+          </a:p>
+        </p:txBody>
+      </p:sp>
+      <p:sp>
+        <p:nvSpPr>
+          <p:cNvPr id="5" name="TextBox 4"/>
+          <p:cNvSpPr txBox="1"/>
+          <p:nvPr/>
+        </p:nvSpPr>
+        <p:spPr>
+          <a:xfrm>
+            <a:off x="704088" y="1234440"/>
+            <a:ext cx="10789920" cy="457200"/>
+          </a:xfrm>
+          <a:prstGeom prst="rect">
+            <a:avLst/>
+          </a:prstGeom>
+          <a:noFill/>
+          <a:effectLst/>
+        </p:spPr>
+        <p:txBody>
+          <a:bodyPr wrap="square" anchor="t" lIns="36576" rIns="36576" tIns="27432" bIns="27432">
+            <a:spAutoFit/>
+          </a:bodyPr>
+          <a:lstStyle/>
+          <a:p>
+            <a:pPr algn="l">
+              <a:spcAft>
+                <a:spcPts val="0"/>
+              </a:spcAft>
+            </a:pPr>
             <a:r>
-              <a:rPr sz="1500" b="0">
+              <a:rPr sz="1400" b="0">
                 <a:solidFill>
                   <a:srgbClr val="212427"/>
                 </a:solidFill>
+                <a:latin typeface="Verdana"/>
               </a:rPr>
-              <a:t>A claim is the smallest part of the reference answer that can be checked against the Kompendium on its own.</a:t>
+              <a:t>A claim is the smallest part of the reference answer that can be checked at one place in the Kompendium.</a:t>
             </a:r>
           </a:p>
         </p:txBody>
       </p:sp>
       <p:sp>
         <p:nvSpPr>
-          <p:cNvPr id="5" name="Rectangle 4"/>
+          <p:cNvPr id="6" name="TextBox 5"/>
+          <p:cNvSpPr txBox="1"/>
+          <p:nvPr/>
+        </p:nvSpPr>
+        <p:spPr>
+          <a:xfrm>
+            <a:off x="704088" y="1691640"/>
+            <a:ext cx="10789920" cy="1143000"/>
+          </a:xfrm>
+          <a:prstGeom prst="rect">
+            <a:avLst/>
+          </a:prstGeom>
+          <a:noFill/>
+          <a:effectLst/>
+        </p:spPr>
+        <p:txBody>
+          <a:bodyPr wrap="square" anchor="t" lIns="36576" rIns="36576" tIns="27432" bIns="27432">
+            <a:spAutoFit/>
+          </a:bodyPr>
+          <a:lstStyle/>
+          <a:p>
+            <a:pPr algn="l">
+              <a:spcAft>
+                <a:spcPts val="200"/>
+              </a:spcAft>
+            </a:pPr>
+            <a:r>
+              <a:rPr sz="1100" b="0">
+                <a:solidFill>
+                  <a:srgbClr val="5A6065"/>
+                </a:solidFill>
+                <a:latin typeface="Verdana"/>
+              </a:rPr>
+              <a:t>1. Every action (document, replace) is its own claim.</a:t>
+            </a:r>
+          </a:p>
+          <a:p>
+            <a:pPr algn="l">
+              <a:spcAft>
+                <a:spcPts val="200"/>
+              </a:spcAft>
+            </a:pPr>
+            <a:r>
+              <a:rPr sz="1100" b="0">
+                <a:solidFill>
+                  <a:srgbClr val="5A6065"/>
+                </a:solidFill>
+                <a:latin typeface="Verdana"/>
+              </a:rPr>
+              <a:t>2. Every reason (because) and every purpose (so that) is its own claim.</a:t>
+            </a:r>
+          </a:p>
+          <a:p>
+            <a:pPr algn="l">
+              <a:spcAft>
+                <a:spcPts val="200"/>
+              </a:spcAft>
+            </a:pPr>
+            <a:r>
+              <a:rPr sz="1100" b="0">
+                <a:solidFill>
+                  <a:srgbClr val="5A6065"/>
+                </a:solidFill>
+                <a:latin typeface="Verdana"/>
+              </a:rPr>
+              <a:t>3. A list that the Kompendium states as one list stays one claim.</a:t>
+            </a:r>
+          </a:p>
+          <a:p>
+            <a:pPr algn="l">
+              <a:spcAft>
+                <a:spcPts val="200"/>
+              </a:spcAft>
+            </a:pPr>
+            <a:r>
+              <a:rPr sz="1100" b="0">
+                <a:solidFill>
+                  <a:srgbClr val="5A6065"/>
+                </a:solidFill>
+                <a:latin typeface="Verdana"/>
+              </a:rPr>
+              <a:t>4. Repetitions and filler do not count.</a:t>
+            </a:r>
+          </a:p>
+        </p:txBody>
+      </p:sp>
+      <p:sp>
+        <p:nvSpPr>
+          <p:cNvPr id="7" name="Rectangle 6"/>
           <p:cNvSpPr/>
           <p:nvPr/>
         </p:nvSpPr>
         <p:spPr>
           <a:xfrm>
-            <a:off x="704088" y="2240280"/>
-            <a:ext cx="1097280" cy="1005840"/>
+            <a:off x="704088" y="2926080"/>
+            <a:ext cx="10789920" cy="9525"/>
           </a:xfrm>
           <a:prstGeom prst="rect">
             <a:avLst/>
           </a:prstGeom>
-          <a:noFill/>
+          <a:solidFill>
+            <a:srgbClr val="D6D7D8"/>
+          </a:solidFill>
           <a:ln>
             <a:noFill/>
           </a:ln>
@@ -52991,40 +53449,112 @@
           </a:fontRef>
         </p:style>
         <p:txBody>
-          <a:bodyPr rtlCol="0" anchor="t" wrap="square" lIns="109728" rIns="109728" tIns="73152" bIns="73152"/>
+          <a:bodyPr rtlCol="0" anchor="ctr"/>
           <a:lstStyle/>
           <a:p>
-            <a:pPr algn="l"/>
+            <a:pPr algn="ctr"/>
+          </a:p>
+        </p:txBody>
+      </p:sp>
+      <p:sp>
+        <p:nvSpPr>
+          <p:cNvPr id="8" name="TextBox 7"/>
+          <p:cNvSpPr txBox="1"/>
+          <p:nvPr/>
+        </p:nvSpPr>
+        <p:spPr>
+          <a:xfrm>
+            <a:off x="704088" y="3063240"/>
+            <a:ext cx="548640" cy="899160"/>
+          </a:xfrm>
+          <a:prstGeom prst="rect">
+            <a:avLst/>
+          </a:prstGeom>
+          <a:noFill/>
+          <a:effectLst/>
+        </p:spPr>
+        <p:txBody>
+          <a:bodyPr wrap="square" anchor="ctr" lIns="36576" rIns="36576" tIns="27432" bIns="27432">
+            <a:spAutoFit/>
+          </a:bodyPr>
+          <a:lstStyle/>
+          <a:p>
+            <a:pPr algn="l">
+              <a:spcAft>
+                <a:spcPts val="0"/>
+              </a:spcAft>
+            </a:pPr>
             <a:r>
-              <a:rPr sz="1400" b="1">
+              <a:rPr sz="2000" b="0">
                 <a:solidFill>
                   <a:srgbClr val="5A6065"/>
                 </a:solidFill>
+                <a:latin typeface="Verdana"/>
               </a:rPr>
-              <a:t>Text 1</a:t>
+              <a:t>A</a:t>
             </a:r>
           </a:p>
         </p:txBody>
       </p:sp>
       <p:sp>
         <p:nvSpPr>
-          <p:cNvPr id="6" name="Rectangle 5"/>
+          <p:cNvPr id="9" name="TextBox 8"/>
+          <p:cNvSpPr txBox="1"/>
+          <p:nvPr/>
+        </p:nvSpPr>
+        <p:spPr>
+          <a:xfrm>
+            <a:off x="1344168" y="3063240"/>
+            <a:ext cx="10149840" cy="899160"/>
+          </a:xfrm>
+          <a:prstGeom prst="rect">
+            <a:avLst/>
+          </a:prstGeom>
+          <a:noFill/>
+          <a:effectLst/>
+        </p:spPr>
+        <p:txBody>
+          <a:bodyPr wrap="square" anchor="ctr" lIns="36576" rIns="36576" tIns="27432" bIns="27432">
+            <a:spAutoFit/>
+          </a:bodyPr>
+          <a:lstStyle/>
+          <a:p>
+            <a:pPr algn="l">
+              <a:spcAft>
+                <a:spcPts val="0"/>
+              </a:spcAft>
+            </a:pPr>
+            <a:r>
+              <a:rPr sz="1400" b="0">
+                <a:solidFill>
+                  <a:srgbClr val="212427"/>
+                </a:solidFill>
+                <a:latin typeface="Verdana"/>
+              </a:rPr>
+              <a:t>The requirements must be documented so that they can be identified and taken into account during planning, operation, and procurement.</a:t>
+            </a:r>
+          </a:p>
+        </p:txBody>
+      </p:sp>
+      <p:sp>
+        <p:nvSpPr>
+          <p:cNvPr id="10" name="Rectangle 9"/>
           <p:cNvSpPr/>
           <p:nvPr/>
         </p:nvSpPr>
         <p:spPr>
           <a:xfrm>
-            <a:off x="1828800" y="2240280"/>
-            <a:ext cx="9692640" cy="1005840"/>
+            <a:off x="704088" y="3962399"/>
+            <a:ext cx="10789920" cy="9525"/>
           </a:xfrm>
           <a:prstGeom prst="rect">
             <a:avLst/>
           </a:prstGeom>
-          <a:noFill/>
-          <a:ln w="9525">
-            <a:solidFill>
-              <a:srgbClr val="D6D7D8"/>
-            </a:solidFill>
+          <a:solidFill>
+            <a:srgbClr val="D6D7D8"/>
+          </a:solidFill>
+          <a:ln>
+            <a:noFill/>
           </a:ln>
           <a:effectLst/>
         </p:spPr>
@@ -53043,36 +53573,110 @@
           </a:fontRef>
         </p:style>
         <p:txBody>
-          <a:bodyPr rtlCol="0" anchor="ctr" wrap="square" lIns="109728" rIns="109728" tIns="73152" bIns="73152"/>
+          <a:bodyPr rtlCol="0" anchor="ctr"/>
           <a:lstStyle/>
           <a:p>
-            <a:pPr algn="l"/>
+            <a:pPr algn="ctr"/>
+          </a:p>
+        </p:txBody>
+      </p:sp>
+      <p:sp>
+        <p:nvSpPr>
+          <p:cNvPr id="11" name="TextBox 10"/>
+          <p:cNvSpPr txBox="1"/>
+          <p:nvPr/>
+        </p:nvSpPr>
+        <p:spPr>
+          <a:xfrm>
+            <a:off x="704088" y="3962399"/>
+            <a:ext cx="548640" cy="899160"/>
+          </a:xfrm>
+          <a:prstGeom prst="rect">
+            <a:avLst/>
+          </a:prstGeom>
+          <a:noFill/>
+          <a:effectLst/>
+        </p:spPr>
+        <p:txBody>
+          <a:bodyPr wrap="square" anchor="ctr" lIns="36576" rIns="36576" tIns="27432" bIns="27432">
+            <a:spAutoFit/>
+          </a:bodyPr>
+          <a:lstStyle/>
+          <a:p>
+            <a:pPr algn="l">
+              <a:spcAft>
+                <a:spcPts val="0"/>
+              </a:spcAft>
+            </a:pPr>
             <a:r>
-              <a:rPr sz="1400" b="0">
+              <a:rPr sz="2000" b="0">
                 <a:solidFill>
-                  <a:srgbClr val="212427"/>
+                  <a:srgbClr val="5A6065"/>
                 </a:solidFill>
+                <a:latin typeface="Verdana"/>
               </a:rPr>
-              <a:t>Administrative accounts should be protected by multi-factor authentication, because they have a particularly high potential for damage and represent a preferred attack target.</a:t>
+              <a:t>B</a:t>
             </a:r>
           </a:p>
         </p:txBody>
       </p:sp>
       <p:sp>
         <p:nvSpPr>
-          <p:cNvPr id="7" name="Rectangle 6"/>
+          <p:cNvPr id="12" name="TextBox 11"/>
+          <p:cNvSpPr txBox="1"/>
+          <p:nvPr/>
+        </p:nvSpPr>
+        <p:spPr>
+          <a:xfrm>
+            <a:off x="1344168" y="3962399"/>
+            <a:ext cx="10149840" cy="899160"/>
+          </a:xfrm>
+          <a:prstGeom prst="rect">
+            <a:avLst/>
+          </a:prstGeom>
+          <a:noFill/>
+          <a:effectLst/>
+        </p:spPr>
+        <p:txBody>
+          <a:bodyPr wrap="square" anchor="ctr" lIns="36576" rIns="36576" tIns="27432" bIns="27432">
+            <a:spAutoFit/>
+          </a:bodyPr>
+          <a:lstStyle/>
+          <a:p>
+            <a:pPr algn="l">
+              <a:spcAft>
+                <a:spcPts val="0"/>
+              </a:spcAft>
+            </a:pPr>
+            <a:r>
+              <a:rPr sz="1400" b="0">
+                <a:solidFill>
+                  <a:srgbClr val="212427"/>
+                </a:solidFill>
+                <a:latin typeface="Verdana"/>
+              </a:rPr>
+              <a:t>Without binding password rules, there is a risk of weak or reused passwords that can be easily compromised.</a:t>
+            </a:r>
+          </a:p>
+        </p:txBody>
+      </p:sp>
+      <p:sp>
+        <p:nvSpPr>
+          <p:cNvPr id="13" name="Rectangle 12"/>
           <p:cNvSpPr/>
           <p:nvPr/>
         </p:nvSpPr>
         <p:spPr>
           <a:xfrm>
-            <a:off x="704088" y="3383280"/>
-            <a:ext cx="1097280" cy="1005840"/>
+            <a:off x="704088" y="4861560"/>
+            <a:ext cx="10789920" cy="9525"/>
           </a:xfrm>
           <a:prstGeom prst="rect">
             <a:avLst/>
           </a:prstGeom>
-          <a:noFill/>
+          <a:solidFill>
+            <a:srgbClr val="D6D7D8"/>
+          </a:solidFill>
           <a:ln>
             <a:noFill/>
           </a:ln>
@@ -53093,219 +53697,127 @@
           </a:fontRef>
         </p:style>
         <p:txBody>
-          <a:bodyPr rtlCol="0" anchor="t" wrap="square" lIns="109728" rIns="109728" tIns="73152" bIns="73152"/>
+          <a:bodyPr rtlCol="0" anchor="ctr"/>
           <a:lstStyle/>
           <a:p>
-            <a:pPr algn="l"/>
+            <a:pPr algn="ctr"/>
+          </a:p>
+        </p:txBody>
+      </p:sp>
+      <p:sp>
+        <p:nvSpPr>
+          <p:cNvPr id="14" name="TextBox 13"/>
+          <p:cNvSpPr txBox="1"/>
+          <p:nvPr/>
+        </p:nvSpPr>
+        <p:spPr>
+          <a:xfrm>
+            <a:off x="704088" y="4861560"/>
+            <a:ext cx="548640" cy="899160"/>
+          </a:xfrm>
+          <a:prstGeom prst="rect">
+            <a:avLst/>
+          </a:prstGeom>
+          <a:noFill/>
+          <a:effectLst/>
+        </p:spPr>
+        <p:txBody>
+          <a:bodyPr wrap="square" anchor="ctr" lIns="36576" rIns="36576" tIns="27432" bIns="27432">
+            <a:spAutoFit/>
+          </a:bodyPr>
+          <a:lstStyle/>
+          <a:p>
+            <a:pPr algn="l">
+              <a:spcAft>
+                <a:spcPts val="0"/>
+              </a:spcAft>
+            </a:pPr>
             <a:r>
-              <a:rPr sz="1400" b="1">
+              <a:rPr sz="2000" b="0">
                 <a:solidFill>
                   <a:srgbClr val="5A6065"/>
                 </a:solidFill>
+                <a:latin typeface="Verdana"/>
               </a:rPr>
-              <a:t>Text 2</a:t>
+              <a:t>C</a:t>
             </a:r>
           </a:p>
         </p:txBody>
       </p:sp>
       <p:sp>
         <p:nvSpPr>
-          <p:cNvPr id="8" name="Rectangle 7"/>
-          <p:cNvSpPr/>
+          <p:cNvPr id="15" name="TextBox 14"/>
+          <p:cNvSpPr txBox="1"/>
           <p:nvPr/>
         </p:nvSpPr>
         <p:spPr>
           <a:xfrm>
-            <a:off x="1828800" y="3383280"/>
-            <a:ext cx="9692640" cy="1005840"/>
+            <a:off x="1344168" y="4861560"/>
+            <a:ext cx="10149840" cy="899160"/>
           </a:xfrm>
           <a:prstGeom prst="rect">
             <a:avLst/>
           </a:prstGeom>
           <a:noFill/>
-          <a:ln w="9525">
-            <a:solidFill>
-              <a:srgbClr val="D6D7D8"/>
-            </a:solidFill>
-          </a:ln>
           <a:effectLst/>
         </p:spPr>
-        <p:style>
-          <a:lnRef idx="1">
-            <a:schemeClr val="accent1"/>
-          </a:lnRef>
-          <a:fillRef idx="3">
-            <a:schemeClr val="accent1"/>
-          </a:fillRef>
-          <a:effectRef idx="2">
-            <a:schemeClr val="accent1"/>
-          </a:effectRef>
-          <a:fontRef idx="minor">
-            <a:schemeClr val="lt1"/>
-          </a:fontRef>
-        </p:style>
         <p:txBody>
-          <a:bodyPr rtlCol="0" anchor="ctr" wrap="square" lIns="109728" rIns="109728" tIns="73152" bIns="73152"/>
+          <a:bodyPr wrap="square" anchor="ctr" lIns="36576" rIns="36576" tIns="27432" bIns="27432">
+            <a:spAutoFit/>
+          </a:bodyPr>
           <a:lstStyle/>
           <a:p>
-            <a:pPr algn="l"/>
+            <a:pPr algn="l">
+              <a:spcAft>
+                <a:spcPts val="0"/>
+              </a:spcAft>
+            </a:pPr>
             <a:r>
               <a:rPr sz="1400" b="0">
                 <a:solidFill>
                   <a:srgbClr val="212427"/>
                 </a:solidFill>
+                <a:latin typeface="Verdana"/>
               </a:rPr>
-              <a:t>Create a cloud usage strategy (A1), a security policy (A2), service definitions (A3), and define responsibility areas as well as interfaces (A4). These four basic requirements must be met as a priority.</a:t>
+              <a:t>Issuance and revocation of entry, access, and usage media must be documented and replaced immediately if compromised.</a:t>
             </a:r>
           </a:p>
         </p:txBody>
       </p:sp>
       <p:sp>
         <p:nvSpPr>
-          <p:cNvPr id="9" name="Rectangle 8"/>
-          <p:cNvSpPr/>
+          <p:cNvPr id="16" name="TextBox 15"/>
+          <p:cNvSpPr txBox="1"/>
           <p:nvPr/>
         </p:nvSpPr>
         <p:spPr>
           <a:xfrm>
-            <a:off x="704088" y="4526280"/>
-            <a:ext cx="1097280" cy="1005840"/>
+            <a:off x="7836408" y="5897880"/>
+            <a:ext cx="3657600" cy="365760"/>
           </a:xfrm>
           <a:prstGeom prst="rect">
             <a:avLst/>
           </a:prstGeom>
           <a:noFill/>
-          <a:ln>
-            <a:noFill/>
-          </a:ln>
           <a:effectLst/>
         </p:spPr>
-        <p:style>
-          <a:lnRef idx="1">
-            <a:schemeClr val="accent1"/>
-          </a:lnRef>
-          <a:fillRef idx="3">
-            <a:schemeClr val="accent1"/>
-          </a:fillRef>
-          <a:effectRef idx="2">
-            <a:schemeClr val="accent1"/>
-          </a:effectRef>
-          <a:fontRef idx="minor">
-            <a:schemeClr val="lt1"/>
-          </a:fontRef>
-        </p:style>
         <p:txBody>
-          <a:bodyPr rtlCol="0" anchor="t" wrap="square" lIns="109728" rIns="109728" tIns="73152" bIns="73152"/>
+          <a:bodyPr wrap="square" anchor="t" lIns="36576" rIns="36576" tIns="27432" bIns="27432">
+            <a:spAutoFit/>
+          </a:bodyPr>
           <a:lstStyle/>
           <a:p>
-            <a:pPr algn="l"/>
+            <a:pPr algn="r">
+              <a:spcAft>
+                <a:spcPts val="0"/>
+              </a:spcAft>
+            </a:pPr>
             <a:r>
-              <a:rPr sz="1400" b="1">
+              <a:rPr sz="1400" b="0">
                 <a:solidFill>
                   <a:srgbClr val="5A6065"/>
                 </a:solidFill>
-              </a:rPr>
-              <a:t>Text 3</a:t>
-            </a:r>
-          </a:p>
-        </p:txBody>
-      </p:sp>
-      <p:sp>
-        <p:nvSpPr>
-          <p:cNvPr id="10" name="Rectangle 9"/>
-          <p:cNvSpPr/>
-          <p:nvPr/>
-        </p:nvSpPr>
-        <p:spPr>
-          <a:xfrm>
-            <a:off x="1828800" y="4526280"/>
-            <a:ext cx="9692640" cy="1005840"/>
-          </a:xfrm>
-          <a:prstGeom prst="rect">
-            <a:avLst/>
-          </a:prstGeom>
-          <a:noFill/>
-          <a:ln w="9525">
-            <a:solidFill>
-              <a:srgbClr val="D6D7D8"/>
-            </a:solidFill>
-          </a:ln>
-          <a:effectLst/>
-        </p:spPr>
-        <p:style>
-          <a:lnRef idx="1">
-            <a:schemeClr val="accent1"/>
-          </a:lnRef>
-          <a:fillRef idx="3">
-            <a:schemeClr val="accent1"/>
-          </a:fillRef>
-          <a:effectRef idx="2">
-            <a:schemeClr val="accent1"/>
-          </a:effectRef>
-          <a:fontRef idx="minor">
-            <a:schemeClr val="lt1"/>
-          </a:fontRef>
-        </p:style>
-        <p:txBody>
-          <a:bodyPr rtlCol="0" anchor="ctr" wrap="square" lIns="109728" rIns="109728" tIns="73152" bIns="73152"/>
-          <a:lstStyle/>
-          <a:p>
-            <a:pPr algn="l"/>
-            <a:r>
-              <a:rPr sz="1400" b="0">
-                <a:solidFill>
-                  <a:srgbClr val="212427"/>
-                </a:solidFill>
-              </a:rPr>
-              <a:t>When personnel changes occur, user IDs and permissions that are no longer needed must be removed promptly to avoid unauthorized access by former or transferred employees. Permissions may only be granted based on the actual need for task fulfillment.</a:t>
-            </a:r>
-          </a:p>
-        </p:txBody>
-      </p:sp>
-      <p:sp>
-        <p:nvSpPr>
-          <p:cNvPr id="11" name="Rectangle 10"/>
-          <p:cNvSpPr/>
-          <p:nvPr/>
-        </p:nvSpPr>
-        <p:spPr>
-          <a:xfrm>
-            <a:off x="7863840" y="5806440"/>
-            <a:ext cx="3657600" cy="411480"/>
-          </a:xfrm>
-          <a:prstGeom prst="rect">
-            <a:avLst/>
-          </a:prstGeom>
-          <a:noFill/>
-          <a:ln>
-            <a:noFill/>
-          </a:ln>
-          <a:effectLst/>
-        </p:spPr>
-        <p:style>
-          <a:lnRef idx="1">
-            <a:schemeClr val="accent1"/>
-          </a:lnRef>
-          <a:fillRef idx="3">
-            <a:schemeClr val="accent1"/>
-          </a:fillRef>
-          <a:effectRef idx="2">
-            <a:schemeClr val="accent1"/>
-          </a:effectRef>
-          <a:fontRef idx="minor">
-            <a:schemeClr val="lt1"/>
-          </a:fontRef>
-        </p:style>
-        <p:txBody>
-          <a:bodyPr rtlCol="0" anchor="t" wrap="square" lIns="109728" rIns="109728" tIns="73152" bIns="73152"/>
-          <a:lstStyle/>
-          <a:p>
-            <a:pPr algn="r"/>
-            <a:r>
-              <a:rPr sz="1400" b="1">
-                <a:solidFill>
-                  <a:srgbClr val="B1063A"/>
-                </a:solidFill>
+                <a:latin typeface="Verdana"/>
               </a:rPr>
               <a:t>Mentimeter code: ____</a:t>
             </a:r>
@@ -53340,12 +53852,20 @@
             <p:ph type="title"/>
           </p:nvPr>
         </p:nvSpPr>
-        <p:spPr/>
+        <p:spPr>
+          <a:effectLst/>
+        </p:spPr>
         <p:txBody>
           <a:bodyPr/>
           <a:lstStyle/>
           <a:p>
             <a:r>
+              <a:rPr b="0" sz="2800" cap="none">
+                <a:solidFill>
+                  <a:srgbClr val="212427"/>
+                </a:solidFill>
+                <a:latin typeface="Verdana"/>
+              </a:rPr>
               <a:t>What RAGAS tells the judge</a:t>
             </a:r>
           </a:p>
@@ -53359,13 +53879,15 @@
         </p:nvSpPr>
         <p:spPr>
           <a:xfrm>
-            <a:off x="704088" y="1188720"/>
-            <a:ext cx="10789920" cy="365760"/>
+            <a:off x="704088" y="1115568"/>
+            <a:ext cx="609600" cy="38100"/>
           </a:xfrm>
           <a:prstGeom prst="rect">
             <a:avLst/>
           </a:prstGeom>
-          <a:noFill/>
+          <a:solidFill>
+            <a:srgbClr val="B1063A"/>
+          </a:solidFill>
           <a:ln>
             <a:noFill/>
           </a:ln>
@@ -53386,15 +53908,47 @@
           </a:fontRef>
         </p:style>
         <p:txBody>
-          <a:bodyPr rtlCol="0" anchor="t" wrap="square" lIns="109728" rIns="109728" tIns="73152" bIns="73152"/>
+          <a:bodyPr rtlCol="0" anchor="ctr"/>
           <a:lstStyle/>
           <a:p>
-            <a:pPr algn="l"/>
+            <a:pPr algn="ctr"/>
+          </a:p>
+        </p:txBody>
+      </p:sp>
+      <p:sp>
+        <p:nvSpPr>
+          <p:cNvPr id="5" name="TextBox 4"/>
+          <p:cNvSpPr txBox="1"/>
+          <p:nvPr/>
+        </p:nvSpPr>
+        <p:spPr>
+          <a:xfrm>
+            <a:off x="704088" y="1280160"/>
+            <a:ext cx="10789920" cy="365760"/>
+          </a:xfrm>
+          <a:prstGeom prst="rect">
+            <a:avLst/>
+          </a:prstGeom>
+          <a:noFill/>
+          <a:effectLst/>
+        </p:spPr>
+        <p:txBody>
+          <a:bodyPr wrap="square" anchor="t" lIns="36576" rIns="36576" tIns="27432" bIns="27432">
+            <a:spAutoFit/>
+          </a:bodyPr>
+          <a:lstStyle/>
+          <a:p>
+            <a:pPr algn="l">
+              <a:spcAft>
+                <a:spcPts val="0"/>
+              </a:spcAft>
+            </a:pPr>
             <a:r>
               <a:rPr sz="1400" b="0">
                 <a:solidFill>
                   <a:srgbClr val="5A6065"/>
                 </a:solidFill>
+                <a:latin typeface="Verdana"/>
               </a:rPr>
               <a:t>The instruction to the judge, verbatim:</a:t>
             </a:r>
@@ -53403,23 +53957,63 @@
       </p:sp>
       <p:sp>
         <p:nvSpPr>
-          <p:cNvPr id="5" name="Rectangle 4"/>
+          <p:cNvPr id="6" name="TextBox 5"/>
+          <p:cNvSpPr txBox="1"/>
+          <p:nvPr/>
+        </p:nvSpPr>
+        <p:spPr>
+          <a:xfrm>
+            <a:off x="704088" y="1645920"/>
+            <a:ext cx="10789920" cy="731520"/>
+          </a:xfrm>
+          <a:prstGeom prst="rect">
+            <a:avLst/>
+          </a:prstGeom>
+          <a:noFill/>
+          <a:effectLst/>
+        </p:spPr>
+        <p:txBody>
+          <a:bodyPr wrap="square" anchor="ctr" lIns="36576" rIns="36576" tIns="27432" bIns="27432">
+            <a:spAutoFit/>
+          </a:bodyPr>
+          <a:lstStyle/>
+          <a:p>
+            <a:pPr algn="l">
+              <a:spcAft>
+                <a:spcPts val="0"/>
+              </a:spcAft>
+            </a:pPr>
+            <a:r>
+              <a:rPr sz="1600" b="0">
+                <a:solidFill>
+                  <a:srgbClr val="212427"/>
+                </a:solidFill>
+                <a:latin typeface="Verdana"/>
+              </a:rPr>
+              <a:t>Given a context, and an answer, analyze each statement in the answer and classify if the statement can be attributed to the given context or not.</a:t>
+            </a:r>
+          </a:p>
+        </p:txBody>
+      </p:sp>
+      <p:sp>
+        <p:nvSpPr>
+          <p:cNvPr id="7" name="Rectangle 6"/>
           <p:cNvSpPr/>
           <p:nvPr/>
         </p:nvSpPr>
         <p:spPr>
           <a:xfrm>
-            <a:off x="704088" y="1600200"/>
-            <a:ext cx="10789920" cy="914400"/>
+            <a:off x="704088" y="2468880"/>
+            <a:ext cx="10789920" cy="9525"/>
           </a:xfrm>
           <a:prstGeom prst="rect">
             <a:avLst/>
           </a:prstGeom>
-          <a:noFill/>
-          <a:ln w="9525">
-            <a:solidFill>
-              <a:srgbClr val="D6D7D8"/>
-            </a:solidFill>
+          <a:solidFill>
+            <a:srgbClr val="D6D7D8"/>
+          </a:solidFill>
+          <a:ln>
+            <a:noFill/>
           </a:ln>
           <a:effectLst/>
         </p:spPr>
@@ -53438,36 +54032,110 @@
           </a:fontRef>
         </p:style>
         <p:txBody>
-          <a:bodyPr rtlCol="0" anchor="ctr" wrap="square" lIns="109728" rIns="109728" tIns="73152" bIns="73152"/>
+          <a:bodyPr rtlCol="0" anchor="ctr"/>
           <a:lstStyle/>
           <a:p>
-            <a:pPr algn="l"/>
+            <a:pPr algn="ctr"/>
+          </a:p>
+        </p:txBody>
+      </p:sp>
+      <p:sp>
+        <p:nvSpPr>
+          <p:cNvPr id="8" name="TextBox 7"/>
+          <p:cNvSpPr txBox="1"/>
+          <p:nvPr/>
+        </p:nvSpPr>
+        <p:spPr>
+          <a:xfrm>
+            <a:off x="704088" y="2560320"/>
+            <a:ext cx="10789920" cy="411480"/>
+          </a:xfrm>
+          <a:prstGeom prst="rect">
+            <a:avLst/>
+          </a:prstGeom>
+          <a:noFill/>
+          <a:effectLst/>
+        </p:spPr>
+        <p:txBody>
+          <a:bodyPr wrap="square" anchor="t" lIns="36576" rIns="36576" tIns="27432" bIns="27432">
+            <a:spAutoFit/>
+          </a:bodyPr>
+          <a:lstStyle/>
+          <a:p>
+            <a:pPr algn="l">
+              <a:spcAft>
+                <a:spcPts val="0"/>
+              </a:spcAft>
+            </a:pPr>
             <a:r>
-              <a:rPr sz="1500" b="0">
+              <a:rPr sz="1600" b="0">
                 <a:solidFill>
                   <a:srgbClr val="212427"/>
                 </a:solidFill>
+                <a:latin typeface="Verdana"/>
               </a:rPr>
-              <a:t>Given a context, and an answer, analyze each statement in the answer and classify if the statement can be attributed to the given context or not.</a:t>
+              <a:t>No definition. The judge decides for itself what a claim is.</a:t>
             </a:r>
           </a:p>
         </p:txBody>
       </p:sp>
       <p:sp>
         <p:nvSpPr>
-          <p:cNvPr id="6" name="Rectangle 5"/>
+          <p:cNvPr id="9" name="TextBox 8"/>
+          <p:cNvSpPr txBox="1"/>
+          <p:nvPr/>
+        </p:nvSpPr>
+        <p:spPr>
+          <a:xfrm>
+            <a:off x="704088" y="3017520"/>
+            <a:ext cx="10789920" cy="640080"/>
+          </a:xfrm>
+          <a:prstGeom prst="rect">
+            <a:avLst/>
+          </a:prstGeom>
+          <a:noFill/>
+          <a:effectLst/>
+        </p:spPr>
+        <p:txBody>
+          <a:bodyPr wrap="square" anchor="ctr" lIns="36576" rIns="36576" tIns="27432" bIns="27432">
+            <a:spAutoFit/>
+          </a:bodyPr>
+          <a:lstStyle/>
+          <a:p>
+            <a:pPr algn="l">
+              <a:spcAft>
+                <a:spcPts val="0"/>
+              </a:spcAft>
+            </a:pPr>
+            <a:r>
+              <a:rPr sz="1300" b="0">
+                <a:solidFill>
+                  <a:srgbClr val="5A6065"/>
+                </a:solidFill>
+                <a:latin typeface="Verdana"/>
+              </a:rPr>
+              <a:t>Companies can apply for pilot projects and receive 2 to 3 days per week of active project support to develop a prototype together. They can also use the computing infrastructure.</a:t>
+            </a:r>
+          </a:p>
+        </p:txBody>
+      </p:sp>
+      <p:sp>
+        <p:nvSpPr>
+          <p:cNvPr id="10" name="Rectangle 9"/>
           <p:cNvSpPr/>
           <p:nvPr/>
         </p:nvSpPr>
         <p:spPr>
           <a:xfrm>
-            <a:off x="704088" y="2651760"/>
-            <a:ext cx="10789920" cy="457200"/>
+            <a:off x="704088" y="3749039"/>
+            <a:ext cx="10789920" cy="9525"/>
           </a:xfrm>
           <a:prstGeom prst="rect">
             <a:avLst/>
           </a:prstGeom>
-          <a:noFill/>
+          <a:solidFill>
+            <a:srgbClr val="D6D7D8"/>
+          </a:solidFill>
           <a:ln>
             <a:noFill/>
           </a:ln>
@@ -53488,117 +54156,47 @@
           </a:fontRef>
         </p:style>
         <p:txBody>
-          <a:bodyPr rtlCol="0" anchor="t" wrap="square" lIns="109728" rIns="109728" tIns="73152" bIns="73152"/>
+          <a:bodyPr rtlCol="0" anchor="ctr"/>
           <a:lstStyle/>
           <a:p>
-            <a:pPr algn="l"/>
-            <a:r>
-              <a:rPr sz="1600" b="1">
-                <a:solidFill>
-                  <a:srgbClr val="212427"/>
-                </a:solidFill>
-              </a:rPr>
-              <a:t>No definition. The judge decides for itself what a claim is.</a:t>
-            </a:r>
+            <a:pPr algn="ctr"/>
           </a:p>
         </p:txBody>
       </p:sp>
       <p:sp>
         <p:nvSpPr>
-          <p:cNvPr id="7" name="Rectangle 6"/>
-          <p:cNvSpPr/>
+          <p:cNvPr id="11" name="TextBox 10"/>
+          <p:cNvSpPr txBox="1"/>
           <p:nvPr/>
         </p:nvSpPr>
         <p:spPr>
           <a:xfrm>
-            <a:off x="704088" y="3200400"/>
-            <a:ext cx="10789920" cy="822960"/>
+            <a:off x="704088" y="3840480"/>
+            <a:ext cx="5303520" cy="411480"/>
           </a:xfrm>
           <a:prstGeom prst="rect">
             <a:avLst/>
           </a:prstGeom>
           <a:noFill/>
-          <a:ln w="9525">
-            <a:solidFill>
-              <a:srgbClr val="D6D7D8"/>
-            </a:solidFill>
-          </a:ln>
           <a:effectLst/>
         </p:spPr>
-        <p:style>
-          <a:lnRef idx="1">
-            <a:schemeClr val="accent1"/>
-          </a:lnRef>
-          <a:fillRef idx="3">
-            <a:schemeClr val="accent1"/>
-          </a:fillRef>
-          <a:effectRef idx="2">
-            <a:schemeClr val="accent1"/>
-          </a:effectRef>
-          <a:fontRef idx="minor">
-            <a:schemeClr val="lt1"/>
-          </a:fontRef>
-        </p:style>
         <p:txBody>
-          <a:bodyPr rtlCol="0" anchor="ctr" wrap="square" lIns="109728" rIns="109728" tIns="73152" bIns="73152"/>
+          <a:bodyPr wrap="square" anchor="t" lIns="36576" rIns="36576" tIns="27432" bIns="27432">
+            <a:spAutoFit/>
+          </a:bodyPr>
           <a:lstStyle/>
           <a:p>
-            <a:pPr algn="l"/>
+            <a:pPr algn="l">
+              <a:spcAft>
+                <a:spcPts val="0"/>
+              </a:spcAft>
+            </a:pPr>
             <a:r>
-              <a:rPr sz="1300" b="0">
-                <a:solidFill>
-                  <a:srgbClr val="5A6065"/>
-                </a:solidFill>
-              </a:rPr>
-              <a:t>Companies can apply for pilot projects and receive 2 to 3 days per week of active project support to develop a prototype together. They can also use the computing infrastructure.</a:t>
-            </a:r>
-          </a:p>
-        </p:txBody>
-      </p:sp>
-      <p:sp>
-        <p:nvSpPr>
-          <p:cNvPr id="8" name="Rectangle 7"/>
-          <p:cNvSpPr/>
-          <p:nvPr/>
-        </p:nvSpPr>
-        <p:spPr>
-          <a:xfrm>
-            <a:off x="704088" y="4023360"/>
-            <a:ext cx="5303520" cy="411480"/>
-          </a:xfrm>
-          <a:prstGeom prst="rect">
-            <a:avLst/>
-          </a:prstGeom>
-          <a:noFill/>
-          <a:ln>
-            <a:noFill/>
-          </a:ln>
-          <a:effectLst/>
-        </p:spPr>
-        <p:style>
-          <a:lnRef idx="1">
-            <a:schemeClr val="accent1"/>
-          </a:lnRef>
-          <a:fillRef idx="3">
-            <a:schemeClr val="accent1"/>
-          </a:fillRef>
-          <a:effectRef idx="2">
-            <a:schemeClr val="accent1"/>
-          </a:effectRef>
-          <a:fontRef idx="minor">
-            <a:schemeClr val="lt1"/>
-          </a:fontRef>
-        </p:style>
-        <p:txBody>
-          <a:bodyPr rtlCol="0" anchor="t" wrap="square" lIns="109728" rIns="109728" tIns="73152" bIns="73152"/>
-          <a:lstStyle/>
-          <a:p>
-            <a:pPr algn="l"/>
-            <a:r>
-              <a:rPr sz="1600" b="1">
+              <a:rPr sz="1600" b="0">
                 <a:solidFill>
                   <a:srgbClr val="212427"/>
                 </a:solidFill>
+                <a:latin typeface="Verdana"/>
               </a:rPr>
               <a:t>gpt-oss-120b</a:t>
             </a:r>
@@ -53607,48 +54205,38 @@
       </p:sp>
       <p:sp>
         <p:nvSpPr>
-          <p:cNvPr id="9" name="Rectangle 8"/>
-          <p:cNvSpPr/>
+          <p:cNvPr id="12" name="TextBox 11"/>
+          <p:cNvSpPr txBox="1"/>
           <p:nvPr/>
         </p:nvSpPr>
         <p:spPr>
           <a:xfrm>
-            <a:off x="704088" y="4434840"/>
-            <a:ext cx="5303520" cy="594360"/>
+            <a:off x="704088" y="4251960"/>
+            <a:ext cx="5303520" cy="548640"/>
           </a:xfrm>
           <a:prstGeom prst="rect">
             <a:avLst/>
           </a:prstGeom>
           <a:noFill/>
-          <a:ln>
-            <a:noFill/>
-          </a:ln>
           <a:effectLst/>
         </p:spPr>
-        <p:style>
-          <a:lnRef idx="1">
-            <a:schemeClr val="accent1"/>
-          </a:lnRef>
-          <a:fillRef idx="3">
-            <a:schemeClr val="accent1"/>
-          </a:fillRef>
-          <a:effectRef idx="2">
-            <a:schemeClr val="accent1"/>
-          </a:effectRef>
-          <a:fontRef idx="minor">
-            <a:schemeClr val="lt1"/>
-          </a:fontRef>
-        </p:style>
         <p:txBody>
-          <a:bodyPr rtlCol="0" anchor="t" wrap="square" lIns="109728" rIns="109728" tIns="73152" bIns="73152"/>
+          <a:bodyPr wrap="square" anchor="t" lIns="36576" rIns="36576" tIns="27432" bIns="27432">
+            <a:spAutoFit/>
+          </a:bodyPr>
           <a:lstStyle/>
           <a:p>
-            <a:pPr algn="l"/>
+            <a:pPr algn="l">
+              <a:spcAft>
+                <a:spcPts val="0"/>
+              </a:spcAft>
+            </a:pPr>
             <a:r>
-              <a:rPr sz="2800" b="1">
+              <a:rPr sz="2800" b="0">
                 <a:solidFill>
-                  <a:srgbClr val="212427"/>
+                  <a:srgbClr val="5A6065"/>
                 </a:solidFill>
+                <a:latin typeface="Verdana"/>
               </a:rPr>
               <a:t>2 claims</a:t>
             </a:r>
@@ -53657,48 +54245,38 @@
       </p:sp>
       <p:sp>
         <p:nvSpPr>
-          <p:cNvPr id="10" name="Rectangle 9"/>
-          <p:cNvSpPr/>
+          <p:cNvPr id="13" name="TextBox 12"/>
+          <p:cNvSpPr txBox="1"/>
           <p:nvPr/>
         </p:nvSpPr>
         <p:spPr>
           <a:xfrm>
-            <a:off x="704088" y="4983480"/>
+            <a:off x="704088" y="4800600"/>
             <a:ext cx="5303520" cy="365760"/>
           </a:xfrm>
           <a:prstGeom prst="rect">
             <a:avLst/>
           </a:prstGeom>
           <a:noFill/>
-          <a:ln>
-            <a:noFill/>
-          </a:ln>
           <a:effectLst/>
         </p:spPr>
-        <p:style>
-          <a:lnRef idx="1">
-            <a:schemeClr val="accent1"/>
-          </a:lnRef>
-          <a:fillRef idx="3">
-            <a:schemeClr val="accent1"/>
-          </a:fillRef>
-          <a:effectRef idx="2">
-            <a:schemeClr val="accent1"/>
-          </a:effectRef>
-          <a:fontRef idx="minor">
-            <a:schemeClr val="lt1"/>
-          </a:fontRef>
-        </p:style>
         <p:txBody>
-          <a:bodyPr rtlCol="0" anchor="t" wrap="square" lIns="109728" rIns="109728" tIns="73152" bIns="73152"/>
+          <a:bodyPr wrap="square" anchor="t" lIns="36576" rIns="36576" tIns="27432" bIns="27432">
+            <a:spAutoFit/>
+          </a:bodyPr>
           <a:lstStyle/>
           <a:p>
-            <a:pPr algn="l"/>
+            <a:pPr algn="l">
+              <a:spcAft>
+                <a:spcPts val="0"/>
+              </a:spcAft>
+            </a:pPr>
             <a:r>
               <a:rPr sz="1300" b="0">
                 <a:solidFill>
                   <a:srgbClr val="5A6065"/>
                 </a:solidFill>
+                <a:latin typeface="Verdana"/>
               </a:rPr>
               <a:t>mostly splits per sentence</a:t>
             </a:r>
@@ -53707,48 +54285,38 @@
       </p:sp>
       <p:sp>
         <p:nvSpPr>
-          <p:cNvPr id="11" name="Rectangle 10"/>
-          <p:cNvSpPr/>
+          <p:cNvPr id="14" name="TextBox 13"/>
+          <p:cNvSpPr txBox="1"/>
           <p:nvPr/>
         </p:nvSpPr>
         <p:spPr>
           <a:xfrm>
-            <a:off x="6190488" y="4023360"/>
+            <a:off x="6190488" y="3840480"/>
             <a:ext cx="5303520" cy="411480"/>
           </a:xfrm>
           <a:prstGeom prst="rect">
             <a:avLst/>
           </a:prstGeom>
           <a:noFill/>
-          <a:ln>
-            <a:noFill/>
-          </a:ln>
           <a:effectLst/>
         </p:spPr>
-        <p:style>
-          <a:lnRef idx="1">
-            <a:schemeClr val="accent1"/>
-          </a:lnRef>
-          <a:fillRef idx="3">
-            <a:schemeClr val="accent1"/>
-          </a:fillRef>
-          <a:effectRef idx="2">
-            <a:schemeClr val="accent1"/>
-          </a:effectRef>
-          <a:fontRef idx="minor">
-            <a:schemeClr val="lt1"/>
-          </a:fontRef>
-        </p:style>
         <p:txBody>
-          <a:bodyPr rtlCol="0" anchor="t" wrap="square" lIns="109728" rIns="109728" tIns="73152" bIns="73152"/>
+          <a:bodyPr wrap="square" anchor="t" lIns="36576" rIns="36576" tIns="27432" bIns="27432">
+            <a:spAutoFit/>
+          </a:bodyPr>
           <a:lstStyle/>
           <a:p>
-            <a:pPr algn="l"/>
+            <a:pPr algn="l">
+              <a:spcAft>
+                <a:spcPts val="0"/>
+              </a:spcAft>
+            </a:pPr>
             <a:r>
-              <a:rPr sz="1600" b="1">
+              <a:rPr sz="1600" b="0">
                 <a:solidFill>
                   <a:srgbClr val="212427"/>
                 </a:solidFill>
+                <a:latin typeface="Verdana"/>
               </a:rPr>
               <a:t>llama-3-3-70b</a:t>
             </a:r>
@@ -53757,48 +54325,38 @@
       </p:sp>
       <p:sp>
         <p:nvSpPr>
-          <p:cNvPr id="12" name="Rectangle 11"/>
-          <p:cNvSpPr/>
+          <p:cNvPr id="15" name="TextBox 14"/>
+          <p:cNvSpPr txBox="1"/>
           <p:nvPr/>
         </p:nvSpPr>
         <p:spPr>
           <a:xfrm>
-            <a:off x="6190488" y="4434840"/>
-            <a:ext cx="5303520" cy="594360"/>
+            <a:off x="6190488" y="4251960"/>
+            <a:ext cx="5303520" cy="548640"/>
           </a:xfrm>
           <a:prstGeom prst="rect">
             <a:avLst/>
           </a:prstGeom>
           <a:noFill/>
-          <a:ln>
-            <a:noFill/>
-          </a:ln>
           <a:effectLst/>
         </p:spPr>
-        <p:style>
-          <a:lnRef idx="1">
-            <a:schemeClr val="accent1"/>
-          </a:lnRef>
-          <a:fillRef idx="3">
-            <a:schemeClr val="accent1"/>
-          </a:fillRef>
-          <a:effectRef idx="2">
-            <a:schemeClr val="accent1"/>
-          </a:effectRef>
-          <a:fontRef idx="minor">
-            <a:schemeClr val="lt1"/>
-          </a:fontRef>
-        </p:style>
         <p:txBody>
-          <a:bodyPr rtlCol="0" anchor="t" wrap="square" lIns="109728" rIns="109728" tIns="73152" bIns="73152"/>
+          <a:bodyPr wrap="square" anchor="t" lIns="36576" rIns="36576" tIns="27432" bIns="27432">
+            <a:spAutoFit/>
+          </a:bodyPr>
           <a:lstStyle/>
           <a:p>
-            <a:pPr algn="l"/>
+            <a:pPr algn="l">
+              <a:spcAft>
+                <a:spcPts val="0"/>
+              </a:spcAft>
+            </a:pPr>
             <a:r>
-              <a:rPr sz="2800" b="1">
+              <a:rPr sz="2800" b="0">
                 <a:solidFill>
-                  <a:srgbClr val="212427"/>
+                  <a:srgbClr val="5A6065"/>
                 </a:solidFill>
+                <a:latin typeface="Verdana"/>
               </a:rPr>
               <a:t>4 claims</a:t>
             </a:r>
@@ -53807,48 +54365,38 @@
       </p:sp>
       <p:sp>
         <p:nvSpPr>
-          <p:cNvPr id="13" name="Rectangle 12"/>
-          <p:cNvSpPr/>
+          <p:cNvPr id="16" name="TextBox 15"/>
+          <p:cNvSpPr txBox="1"/>
           <p:nvPr/>
         </p:nvSpPr>
         <p:spPr>
           <a:xfrm>
-            <a:off x="6190488" y="4983480"/>
+            <a:off x="6190488" y="4800600"/>
             <a:ext cx="5303520" cy="365760"/>
           </a:xfrm>
           <a:prstGeom prst="rect">
             <a:avLst/>
           </a:prstGeom>
           <a:noFill/>
-          <a:ln>
-            <a:noFill/>
-          </a:ln>
           <a:effectLst/>
         </p:spPr>
-        <p:style>
-          <a:lnRef idx="1">
-            <a:schemeClr val="accent1"/>
-          </a:lnRef>
-          <a:fillRef idx="3">
-            <a:schemeClr val="accent1"/>
-          </a:fillRef>
-          <a:effectRef idx="2">
-            <a:schemeClr val="accent1"/>
-          </a:effectRef>
-          <a:fontRef idx="minor">
-            <a:schemeClr val="lt1"/>
-          </a:fontRef>
-        </p:style>
         <p:txBody>
-          <a:bodyPr rtlCol="0" anchor="t" wrap="square" lIns="109728" rIns="109728" tIns="73152" bIns="73152"/>
+          <a:bodyPr wrap="square" anchor="t" lIns="36576" rIns="36576" tIns="27432" bIns="27432">
+            <a:spAutoFit/>
+          </a:bodyPr>
           <a:lstStyle/>
           <a:p>
-            <a:pPr algn="l"/>
+            <a:pPr algn="l">
+              <a:spcAft>
+                <a:spcPts val="0"/>
+              </a:spcAft>
+            </a:pPr>
             <a:r>
               <a:rPr sz="1300" b="0">
                 <a:solidFill>
                   <a:srgbClr val="5A6065"/>
                 </a:solidFill>
+                <a:latin typeface="Verdana"/>
               </a:rPr>
               <a:t>splits finer</a:t>
             </a:r>
@@ -53857,48 +54405,38 @@
       </p:sp>
       <p:sp>
         <p:nvSpPr>
-          <p:cNvPr id="14" name="Rectangle 13"/>
-          <p:cNvSpPr/>
+          <p:cNvPr id="17" name="TextBox 16"/>
+          <p:cNvSpPr txBox="1"/>
           <p:nvPr/>
         </p:nvSpPr>
         <p:spPr>
           <a:xfrm>
-            <a:off x="704088" y="5349240"/>
+            <a:off x="704088" y="5257800"/>
             <a:ext cx="10789920" cy="365760"/>
           </a:xfrm>
           <a:prstGeom prst="rect">
             <a:avLst/>
           </a:prstGeom>
           <a:noFill/>
-          <a:ln>
-            <a:noFill/>
-          </a:ln>
           <a:effectLst/>
         </p:spPr>
-        <p:style>
-          <a:lnRef idx="1">
-            <a:schemeClr val="accent1"/>
-          </a:lnRef>
-          <a:fillRef idx="3">
-            <a:schemeClr val="accent1"/>
-          </a:fillRef>
-          <a:effectRef idx="2">
-            <a:schemeClr val="accent1"/>
-          </a:effectRef>
-          <a:fontRef idx="minor">
-            <a:schemeClr val="lt1"/>
-          </a:fontRef>
-        </p:style>
         <p:txBody>
-          <a:bodyPr rtlCol="0" anchor="t" wrap="square" lIns="109728" rIns="109728" tIns="73152" bIns="73152"/>
+          <a:bodyPr wrap="square" anchor="t" lIns="36576" rIns="36576" tIns="27432" bIns="27432">
+            <a:spAutoFit/>
+          </a:bodyPr>
           <a:lstStyle/>
           <a:p>
-            <a:pPr algn="l"/>
+            <a:pPr algn="l">
+              <a:spcAft>
+                <a:spcPts val="0"/>
+              </a:spcAft>
+            </a:pPr>
             <a:r>
               <a:rPr sz="1200" b="0">
                 <a:solidFill>
                   <a:srgbClr val="5A6065"/>
                 </a:solidFill>
+                <a:latin typeface="Verdana"/>
               </a:rPr>
               <a:t>The same reference answer from notebook 2, section E b. The denominator of Context Recall depends on who splits.</a:t>
             </a:r>

--- a/slides/src/rag_iii_claims_english.pptx
+++ b/slides/src/rag_iii_claims_english.pptx
@@ -49241,7 +49241,7 @@
                 </a:solidFill>
                 <a:latin typeface="Verdana"/>
               </a:rPr>
-              <a:t>Mentimeter code: ____</a:t>
+              <a:t>menti.com, code 7946 2006</a:t>
             </a:r>
           </a:p>
         </p:txBody>
@@ -53819,7 +53819,7 @@
                 </a:solidFill>
                 <a:latin typeface="Verdana"/>
               </a:rPr>
-              <a:t>Mentimeter code: ____</a:t>
+              <a:t>menti.com, code 7946 2006</a:t>
             </a:r>
           </a:p>
         </p:txBody>
